--- a/BaoCao/Slide_BaoCao_DeTai4_Nhom9.pptx
+++ b/BaoCao/Slide_BaoCao_DeTai4_Nhom9.pptx
@@ -3117,9 +3117,7 @@
             <a:srgbClr val="0F172A"/>
           </a:solidFill>
           <a:ln>
-            <a:solidFill>
-              <a:srgbClr val="0F172A"/>
-            </a:solidFill>
+            <a:noFill/>
           </a:ln>
         </p:spPr>
         <p:style>
@@ -3152,8 +3150,8 @@
         </p:nvSpPr>
         <p:spPr>
           <a:xfrm>
-            <a:off x="731520" y="640080"/>
-            <a:ext cx="1371600" cy="73152"/>
+            <a:off x="731520" y="594360"/>
+            <a:ext cx="1645920" cy="73152"/>
           </a:xfrm>
           <a:prstGeom prst="rect">
             <a:avLst/>
@@ -3195,7 +3193,7 @@
         </p:nvSpPr>
         <p:spPr>
           <a:xfrm>
-            <a:off x="731520" y="822960"/>
+            <a:off x="731520" y="777240"/>
             <a:ext cx="10698480" cy="731520"/>
           </a:xfrm>
           <a:prstGeom prst="rect">
@@ -3218,12 +3216,12 @@
               </a:defRPr>
             </a:pPr>
             <a:r>
-              <a:t>TRƯỜNG ĐẠI HỌC CÔNG NGHỆ ĐÔNG Á</a:t>
-            </a:r>
-          </a:p>
-          <a:p>
-            <a:pPr>
-              <a:defRPr sz="1100">
+              <a:t>TRƯỜNG ĐẠI HỌC CÔNG NGHỆ ĐÔNG Á • KHOA CÔNG NGHỆ THÔNG TIN</a:t>
+            </a:r>
+          </a:p>
+          <a:p>
+            <a:pPr>
+              <a:defRPr sz="1200" b="1">
                 <a:solidFill>
                   <a:srgbClr val="94A3B8"/>
                 </a:solidFill>
@@ -3231,7 +3229,7 @@
               </a:defRPr>
             </a:pPr>
             <a:r>
-              <a:t>KHOA CÔNG NGHỆ THÔNG TIN • HỌC PHẦN: KIỂM THỬ PHẦN MỀM</a:t>
+              <a:t>HỌC PHẦN: KIỂM THỬ PHẦN MỀM</a:t>
             </a:r>
           </a:p>
         </p:txBody>
@@ -3244,8 +3242,8 @@
         </p:nvSpPr>
         <p:spPr>
           <a:xfrm>
-            <a:off x="731520" y="1645920"/>
-            <a:ext cx="10698480" cy="1645920"/>
+            <a:off x="731520" y="1600200"/>
+            <a:ext cx="10698480" cy="2011680"/>
           </a:xfrm>
           <a:prstGeom prst="rect">
             <a:avLst/>
@@ -3261,7 +3259,7 @@
             <a:pPr>
               <a:defRPr sz="1600" b="1">
                 <a:solidFill>
-                  <a:srgbClr val="F59E0B"/>
+                  <a:srgbClr val="D97706"/>
                 </a:solidFill>
                 <a:latin typeface="Arial"/>
               </a:defRPr>
@@ -3272,7 +3270,7 @@
           </a:p>
           <a:p>
             <a:pPr>
-              <a:defRPr sz="2600" b="1">
+              <a:defRPr sz="2800" b="1">
                 <a:solidFill>
                   <a:srgbClr val="FFFFFF"/>
                 </a:solidFill>
@@ -3285,7 +3283,7 @@
           </a:p>
           <a:p>
             <a:pPr>
-              <a:defRPr sz="1300">
+              <a:defRPr sz="1400">
                 <a:solidFill>
                   <a:srgbClr val="CBD5E1"/>
                 </a:solidFill>
@@ -3293,7 +3291,7 @@
               </a:defRPr>
             </a:pPr>
             <a:r>
-              <a:t>Bộ Kịch Bản 240 Test Cases (Unit - Integration - System) &amp; Automation Testing (Selenium 4 + TestNG)</a:t>
+              <a:t>Bộ Kịch Bản 240 Test Cases (Unit - Integration - System) &amp; Framework Test Automation (Selenium 4 + TestNG)</a:t>
             </a:r>
           </a:p>
         </p:txBody>
@@ -3307,7 +3305,7 @@
         <p:spPr>
           <a:xfrm>
             <a:off x="731520" y="3931920"/>
-            <a:ext cx="3291840" cy="2103120"/>
+            <a:ext cx="3291840" cy="2377440"/>
           </a:xfrm>
           <a:prstGeom prst="roundRect">
             <a:avLst/>
@@ -3351,8 +3349,8 @@
         </p:nvSpPr>
         <p:spPr>
           <a:xfrm>
-            <a:off x="914400" y="4069080"/>
-            <a:ext cx="2926080" cy="1828800"/>
+            <a:off x="914400" y="4114800"/>
+            <a:ext cx="2926080" cy="2011680"/>
           </a:xfrm>
           <a:prstGeom prst="rect">
             <a:avLst/>
@@ -3360,13 +3358,13 @@
           <a:noFill/>
         </p:spPr>
         <p:txBody>
-          <a:bodyPr wrap="none">
+          <a:bodyPr wrap="square">
             <a:spAutoFit/>
           </a:bodyPr>
           <a:lstStyle/>
           <a:p>
             <a:pPr>
-              <a:defRPr sz="1000" b="1">
+              <a:defRPr sz="1100" b="1">
                 <a:solidFill>
                   <a:srgbClr val="0EA5E9"/>
                 </a:solidFill>
@@ -3378,7 +3376,7 @@
           </a:p>
           <a:p>
             <a:pPr>
-              <a:defRPr sz="1500" b="1">
+              <a:defRPr sz="1800" b="1">
                 <a:solidFill>
                   <a:srgbClr val="FFFFFF"/>
                 </a:solidFill>
@@ -3389,19 +3387,20 @@
             </a:r>
           </a:p>
           <a:p>
-            <a:pPr>
-              <a:defRPr sz="1050">
+            <a:br/>
+            <a:pPr>
+              <a:defRPr sz="1200">
                 <a:solidFill>
                   <a:srgbClr val="94A3B8"/>
                 </a:solidFill>
               </a:defRPr>
             </a:pPr>
             <a:r>
-              <a:t>Khoa Công nghệ Thông tin</a:t>
+              <a:t>Bộ môn: Công nghệ Phần mềm</a:t>
             </a:r>
             <a:br/>
             <a:r>
-              <a:t>Đại học Công nghệ Đông Á</a:t>
+              <a:t>Khoa Công nghệ Thông tin - EAUT</a:t>
             </a:r>
           </a:p>
         </p:txBody>
@@ -3415,7 +3414,7 @@
         <p:spPr>
           <a:xfrm>
             <a:off x="4297680" y="3931920"/>
-            <a:ext cx="7132320" cy="2103120"/>
+            <a:ext cx="7132320" cy="2377440"/>
           </a:xfrm>
           <a:prstGeom prst="roundRect">
             <a:avLst/>
@@ -3425,7 +3424,7 @@
           </a:solidFill>
           <a:ln w="19050">
             <a:solidFill>
-              <a:srgbClr val="F59E0B"/>
+              <a:srgbClr val="D97706"/>
             </a:solidFill>
           </a:ln>
         </p:spPr>
@@ -3459,8 +3458,8 @@
         </p:nvSpPr>
         <p:spPr>
           <a:xfrm>
-            <a:off x="4480560" y="4069080"/>
-            <a:ext cx="6766560" cy="1828800"/>
+            <a:off x="4480560" y="4114800"/>
+            <a:ext cx="6766560" cy="2011680"/>
           </a:xfrm>
           <a:prstGeom prst="rect">
             <a:avLst/>
@@ -3468,15 +3467,15 @@
           <a:noFill/>
         </p:spPr>
         <p:txBody>
-          <a:bodyPr wrap="none">
+          <a:bodyPr wrap="square">
             <a:spAutoFit/>
           </a:bodyPr>
           <a:lstStyle/>
           <a:p>
             <a:pPr>
-              <a:defRPr sz="1000" b="1">
-                <a:solidFill>
-                  <a:srgbClr val="F59E0B"/>
+              <a:defRPr sz="1100" b="1">
+                <a:solidFill>
+                  <a:srgbClr val="D97706"/>
                 </a:solidFill>
               </a:defRPr>
             </a:pPr>
@@ -3486,38 +3485,38 @@
           </a:p>
           <a:p>
             <a:pPr>
-              <a:defRPr sz="1050">
+              <a:defRPr sz="1200">
                 <a:solidFill>
                   <a:srgbClr val="FFFFFF"/>
                 </a:solidFill>
               </a:defRPr>
             </a:pPr>
             <a:r>
-              <a:t>• 1. Đặng Văn Mạnh  |  MSV: 20232652  |  Trưởng nhóm • Unit Test (70 TC) &amp; Test Automation</a:t>
-            </a:r>
-          </a:p>
-          <a:p>
-            <a:pPr>
-              <a:defRPr sz="1050">
+              <a:t>• Đặng Văn Mạnh (MSV: 20232652) — Trưởng nhóm • Unit Test (70 TC) &amp; Test Automation Framework</a:t>
+            </a:r>
+          </a:p>
+          <a:p>
+            <a:pPr>
+              <a:defRPr sz="1200">
                 <a:solidFill>
                   <a:srgbClr val="FFFFFF"/>
                 </a:solidFill>
               </a:defRPr>
             </a:pPr>
             <a:r>
-              <a:t>• 2. Trần Ngọc Sơn  |  MSV: 20232472  |  Thành viên • Backend REST API &amp; Integration Test (70 TC)</a:t>
-            </a:r>
-          </a:p>
-          <a:p>
-            <a:pPr>
-              <a:defRPr sz="1050">
+              <a:t>• Trần Ngọc Sơn (MSV: 20232472) — Thành viên • REST API Backend &amp; Integration Test (70 TC)</a:t>
+            </a:r>
+          </a:p>
+          <a:p>
+            <a:pPr>
+              <a:defRPr sz="1200">
                 <a:solidFill>
                   <a:srgbClr val="FFFFFF"/>
                 </a:solidFill>
               </a:defRPr>
             </a:pPr>
             <a:r>
-              <a:t>• 3. Ngô Hoàng Anh  |  MSV: 20232558  |  Thành viên • Giao diện UI/UX &amp; System Test E2E (100 TC)</a:t>
+              <a:t>• Ngô Hoàng Anh (MSV: 20232558) — Thành viên • Giao diện Web UI/UX &amp; System Test E2E (100 TC)</a:t>
             </a:r>
           </a:p>
         </p:txBody>
@@ -3555,12 +3554,10 @@
             <a:avLst/>
           </a:prstGeom>
           <a:solidFill>
-            <a:srgbClr val="F8FAFC"/>
+            <a:srgbClr val="F1F5F9"/>
           </a:solidFill>
           <a:ln>
-            <a:solidFill>
-              <a:srgbClr val="F8FAFC"/>
-            </a:solidFill>
+            <a:noFill/>
           </a:ln>
         </p:spPr>
         <p:style>
@@ -3593,7 +3590,7 @@
         </p:nvSpPr>
         <p:spPr>
           <a:xfrm>
-            <a:off x="731520" y="365760"/>
+            <a:off x="731520" y="320040"/>
             <a:ext cx="10698480" cy="320040"/>
           </a:xfrm>
           <a:prstGeom prst="rect">
@@ -3602,13 +3599,13 @@
           <a:noFill/>
         </p:spPr>
         <p:txBody>
-          <a:bodyPr wrap="square">
+          <a:bodyPr wrap="none">
             <a:spAutoFit/>
           </a:bodyPr>
           <a:lstStyle/>
           <a:p>
             <a:pPr>
-              <a:defRPr sz="1000" b="1">
+              <a:defRPr sz="1100" b="1">
                 <a:solidFill>
                   <a:srgbClr val="0EA5E9"/>
                 </a:solidFill>
@@ -3616,7 +3613,7 @@
               </a:defRPr>
             </a:pPr>
             <a:r>
-              <a:t>SO SÁNH &amp; CÔNG CỤ THỰC THI</a:t>
+              <a:t>SO SÁNH HIỆU QUẢ &amp; THỰC THI</a:t>
             </a:r>
           </a:p>
         </p:txBody>
@@ -3629,8 +3626,8 @@
         </p:nvSpPr>
         <p:spPr>
           <a:xfrm>
-            <a:off x="731520" y="685800"/>
-            <a:ext cx="10698480" cy="548640"/>
+            <a:off x="731520" y="621792"/>
+            <a:ext cx="10698480" cy="594360"/>
           </a:xfrm>
           <a:prstGeom prst="rect">
             <a:avLst/>
@@ -3638,13 +3635,13 @@
           <a:noFill/>
         </p:spPr>
         <p:txBody>
-          <a:bodyPr wrap="square">
+          <a:bodyPr wrap="none">
             <a:spAutoFit/>
           </a:bodyPr>
           <a:lstStyle/>
           <a:p>
             <a:pPr>
-              <a:defRPr sz="2200" b="1">
+              <a:defRPr sz="2600" b="1">
                 <a:solidFill>
                   <a:srgbClr val="0F172A"/>
                 </a:solidFill>
@@ -3666,7 +3663,7 @@
         <p:spPr>
           <a:xfrm>
             <a:off x="731520" y="1371600"/>
-            <a:ext cx="5120640" cy="4937760"/>
+            <a:ext cx="5120640" cy="5029200"/>
           </a:xfrm>
           <a:prstGeom prst="roundRect">
             <a:avLst/>
@@ -3676,7 +3673,7 @@
           </a:solidFill>
           <a:ln w="19050">
             <a:solidFill>
-              <a:srgbClr val="E2E8F0"/>
+              <a:srgbClr val="CBD5E1"/>
             </a:solidFill>
           </a:ln>
         </p:spPr>
@@ -3710,8 +3707,8 @@
         </p:nvSpPr>
         <p:spPr>
           <a:xfrm>
-            <a:off x="914400" y="1554480"/>
-            <a:ext cx="4754880" cy="4572000"/>
+            <a:off x="914400" y="1508760"/>
+            <a:ext cx="4754880" cy="4754880"/>
           </a:xfrm>
           <a:prstGeom prst="rect">
             <a:avLst/>
@@ -3725,7 +3722,7 @@
           <a:lstStyle/>
           <a:p>
             <a:pPr>
-              <a:defRPr sz="1200" b="1">
+              <a:defRPr sz="1500" b="1">
                 <a:solidFill>
                   <a:srgbClr val="0EA5E9"/>
                 </a:solidFill>
@@ -3736,115 +3733,119 @@
             </a:r>
           </a:p>
           <a:p>
-            <a:pPr>
-              <a:defRPr b="1" sz="1000">
+            <a:br/>
+            <a:pPr>
+              <a:defRPr b="1" sz="1300">
                 <a:solidFill>
                   <a:srgbClr val="0F172A"/>
                 </a:solidFill>
               </a:defRPr>
             </a:pPr>
             <a:r>
-              <a:t>• Thời gian thực thi 15 kịch bản E2E:</a:t>
-            </a:r>
-          </a:p>
-          <a:p>
-            <a:pPr>
-              <a:defRPr sz="900">
-                <a:solidFill>
-                  <a:srgbClr val="475569"/>
-                </a:solidFill>
-              </a:defRPr>
-            </a:pPr>
-            <a:r>
-              <a:t>Manual: 45 - 60 phút</a:t>
+              <a:t>✔ Thời gian chạy 15 kịch bản E2E:</a:t>
+            </a:r>
+          </a:p>
+          <a:p>
+            <a:pPr>
+              <a:defRPr sz="1150">
+                <a:solidFill>
+                  <a:srgbClr val="334155"/>
+                </a:solidFill>
+              </a:defRPr>
+            </a:pPr>
+            <a:r>
+              <a:t>• Manual: 45 - 60 phút (Thao tác tay chậm)</a:t>
             </a:r>
             <a:br/>
             <a:r>
-              <a:t>Automation: 01 phút 13 giây (Nhanh gấp 40-50 lần)</a:t>
-            </a:r>
-          </a:p>
-          <a:p>
-            <a:pPr>
-              <a:defRPr b="1" sz="1000">
+              <a:t>• Automation: 01 phút 13 giây (Nhanh gấp 45 lần)</a:t>
+            </a:r>
+          </a:p>
+          <a:p>
+            <a:br/>
+            <a:pPr>
+              <a:defRPr b="1" sz="1300">
                 <a:solidFill>
                   <a:srgbClr val="0F172A"/>
                 </a:solidFill>
               </a:defRPr>
             </a:pPr>
             <a:r>
-              <a:t>• Độ chính xác &amp; Sai sót:</a:t>
-            </a:r>
-          </a:p>
-          <a:p>
-            <a:pPr>
-              <a:defRPr sz="900">
-                <a:solidFill>
-                  <a:srgbClr val="475569"/>
-                </a:solidFill>
-              </a:defRPr>
-            </a:pPr>
-            <a:r>
-              <a:t>Manual: Dễ nhầm lẫn khi lặp lại nhiều lần</a:t>
+              <a:t>✔ Độ chính xác &amp; Ổn định:</a:t>
+            </a:r>
+          </a:p>
+          <a:p>
+            <a:pPr>
+              <a:defRPr sz="1150">
+                <a:solidFill>
+                  <a:srgbClr val="334155"/>
+                </a:solidFill>
+              </a:defRPr>
+            </a:pPr>
+            <a:r>
+              <a:t>• Manual: Dễ mệt mỏi, bỏ sót bước khi test lặp lại</a:t>
             </a:r>
             <a:br/>
             <a:r>
-              <a:t>Automation: Chính xác 100%, đối soát chuẩn</a:t>
-            </a:r>
-          </a:p>
-          <a:p>
-            <a:pPr>
-              <a:defRPr b="1" sz="1000">
+              <a:t>• Automation: Chuẩn xác 100%, đối soát tự động</a:t>
+            </a:r>
+          </a:p>
+          <a:p>
+            <a:br/>
+            <a:pPr>
+              <a:defRPr b="1" sz="1300">
                 <a:solidFill>
                   <a:srgbClr val="0F172A"/>
                 </a:solidFill>
               </a:defRPr>
             </a:pPr>
             <a:r>
-              <a:t>• Kiểm thử hồi quy (Regression):</a:t>
-            </a:r>
-          </a:p>
-          <a:p>
-            <a:pPr>
-              <a:defRPr sz="900">
-                <a:solidFill>
-                  <a:srgbClr val="475569"/>
-                </a:solidFill>
-              </a:defRPr>
-            </a:pPr>
-            <a:r>
-              <a:t>Manual: Tốn rất nhiều nhân lực và thời gian</a:t>
+              <a:t>✔ Kiểm thử hồi quy (Regression):</a:t>
+            </a:r>
+          </a:p>
+          <a:p>
+            <a:pPr>
+              <a:defRPr sz="1150">
+                <a:solidFill>
+                  <a:srgbClr val="334155"/>
+                </a:solidFill>
+              </a:defRPr>
+            </a:pPr>
+            <a:r>
+              <a:t>• Manual: Chi phí nhân lực và thời gian rất cao</a:t>
             </a:r>
             <a:br/>
             <a:r>
-              <a:t>Automation: Chạy tự động chỉ với 1-Click</a:t>
-            </a:r>
-          </a:p>
-          <a:p>
-            <a:pPr>
-              <a:defRPr b="1" sz="1000">
+              <a:t>• Automation: Tự động chạy lại toàn bộ với 1-Click</a:t>
+            </a:r>
+          </a:p>
+          <a:p>
+            <a:br/>
+            <a:pPr>
+              <a:defRPr b="1" sz="1300">
                 <a:solidFill>
                   <a:srgbClr val="0F172A"/>
                 </a:solidFill>
               </a:defRPr>
             </a:pPr>
             <a:r>
-              <a:t>• Báo cáo kết quả:</a:t>
-            </a:r>
-          </a:p>
-          <a:p>
-            <a:pPr>
-              <a:defRPr sz="900">
-                <a:solidFill>
-                  <a:srgbClr val="475569"/>
-                </a:solidFill>
-              </a:defRPr>
-            </a:pPr>
-            <a:r>
-              <a:t>Manual: Chụp ảnh nhập Excel thủ công</a:t>
+              <a:t>✔ Báo cáo kết quả:</a:t>
+            </a:r>
+          </a:p>
+          <a:p>
+            <a:pPr>
+              <a:defRPr sz="1150">
+                <a:solidFill>
+                  <a:srgbClr val="334155"/>
+                </a:solidFill>
+              </a:defRPr>
+            </a:pPr>
+            <a:r>
+              <a:t>• Manual: Nhập liệu thủ công mất nhiều thời gian</a:t>
             </a:r>
             <a:br/>
             <a:r>
-              <a:t>Automation: Tự động xuất ExtentReports HTML</a:t>
+              <a:t>• Automation: Xuất báo cáo đồ họa HTML tức thì</a:t>
             </a:r>
           </a:p>
         </p:txBody>
@@ -3858,7 +3859,7 @@
         <p:spPr>
           <a:xfrm>
             <a:off x="6126480" y="1371600"/>
-            <a:ext cx="5303520" cy="4937760"/>
+            <a:ext cx="5303520" cy="5029200"/>
           </a:xfrm>
           <a:prstGeom prst="roundRect">
             <a:avLst/>
@@ -3868,7 +3869,7 @@
           </a:solidFill>
           <a:ln w="19050">
             <a:solidFill>
-              <a:srgbClr val="E2E8F0"/>
+              <a:srgbClr val="CBD5E1"/>
             </a:solidFill>
           </a:ln>
         </p:spPr>
@@ -3902,8 +3903,8 @@
         </p:nvSpPr>
         <p:spPr>
           <a:xfrm>
-            <a:off x="6309360" y="1554480"/>
-            <a:ext cx="4937760" cy="4572000"/>
+            <a:off x="6309360" y="1508760"/>
+            <a:ext cx="4937760" cy="4754880"/>
           </a:xfrm>
           <a:prstGeom prst="rect">
             <a:avLst/>
@@ -3917,9 +3918,9 @@
           <a:lstStyle/>
           <a:p>
             <a:pPr>
-              <a:defRPr sz="1200" b="1">
-                <a:solidFill>
-                  <a:srgbClr val="F59E0B"/>
+              <a:defRPr sz="1500" b="1">
+                <a:solidFill>
+                  <a:srgbClr val="D97706"/>
                 </a:solidFill>
               </a:defRPr>
             </a:pPr>
@@ -3928,8 +3929,9 @@
             </a:r>
           </a:p>
           <a:p>
-            <a:pPr>
-              <a:defRPr b="1" sz="1000">
+            <a:br/>
+            <a:pPr>
+              <a:defRPr b="1" sz="1300">
                 <a:solidFill>
                   <a:srgbClr val="0D9488"/>
                 </a:solidFill>
@@ -3941,19 +3943,20 @@
           </a:p>
           <a:p>
             <a:pPr>
-              <a:defRPr sz="900">
-                <a:solidFill>
-                  <a:srgbClr val="475569"/>
-                </a:solidFill>
-              </a:defRPr>
-            </a:pPr>
-            <a:r>
-              <a:t>   Chạy 70 Unit Test Cases kiểm thử logic hàm</a:t>
-            </a:r>
-          </a:p>
-          <a:p>
-            <a:pPr>
-              <a:defRPr b="1" sz="1000">
+              <a:defRPr sz="1150">
+                <a:solidFill>
+                  <a:srgbClr val="334155"/>
+                </a:solidFill>
+              </a:defRPr>
+            </a:pPr>
+            <a:r>
+              <a:t>Chạy 70 Unit Test Cases kiểm thử logic hàm.</a:t>
+            </a:r>
+          </a:p>
+          <a:p>
+            <a:br/>
+            <a:pPr>
+              <a:defRPr b="1" sz="1300">
                 <a:solidFill>
                   <a:srgbClr val="0D9488"/>
                 </a:solidFill>
@@ -3965,19 +3968,20 @@
           </a:p>
           <a:p>
             <a:pPr>
-              <a:defRPr sz="900">
-                <a:solidFill>
-                  <a:srgbClr val="475569"/>
-                </a:solidFill>
-              </a:defRPr>
-            </a:pPr>
-            <a:r>
-              <a:t>   Chạy 70 Integration Test Cases tích hợp API</a:t>
-            </a:r>
-          </a:p>
-          <a:p>
-            <a:pPr>
-              <a:defRPr b="1" sz="1000">
+              <a:defRPr sz="1150">
+                <a:solidFill>
+                  <a:srgbClr val="334155"/>
+                </a:solidFill>
+              </a:defRPr>
+            </a:pPr>
+            <a:r>
+              <a:t>Chạy 70 Integration Test Cases kiểm thử tích hợp API.</a:t>
+            </a:r>
+          </a:p>
+          <a:p>
+            <a:br/>
+            <a:pPr>
+              <a:defRPr b="1" sz="1300">
                 <a:solidFill>
                   <a:srgbClr val="0D9488"/>
                 </a:solidFill>
@@ -3989,19 +3993,20 @@
           </a:p>
           <a:p>
             <a:pPr>
-              <a:defRPr sz="900">
-                <a:solidFill>
-                  <a:srgbClr val="475569"/>
-                </a:solidFill>
-              </a:defRPr>
-            </a:pPr>
-            <a:r>
-              <a:t>   Chạy 100 System Test Cases mở Chrome thật</a:t>
-            </a:r>
-          </a:p>
-          <a:p>
-            <a:pPr>
-              <a:defRPr b="1" sz="1000">
+              <a:defRPr sz="1150">
+                <a:solidFill>
+                  <a:srgbClr val="334155"/>
+                </a:solidFill>
+              </a:defRPr>
+            </a:pPr>
+            <a:r>
+              <a:t>Chạy 100 System Test Cases mở Chrome thao tác thật.</a:t>
+            </a:r>
+          </a:p>
+          <a:p>
+            <a:br/>
+            <a:pPr>
+              <a:defRPr b="1" sz="1300">
                 <a:solidFill>
                   <a:srgbClr val="0D9488"/>
                 </a:solidFill>
@@ -4013,19 +4018,20 @@
           </a:p>
           <a:p>
             <a:pPr>
-              <a:defRPr sz="900">
-                <a:solidFill>
-                  <a:srgbClr val="475569"/>
-                </a:solidFill>
-              </a:defRPr>
-            </a:pPr>
-            <a:r>
-              <a:t>   Chạy trọn gói 240 Test Cases cả 3 cấp độ</a:t>
-            </a:r>
-          </a:p>
-          <a:p>
-            <a:pPr>
-              <a:defRPr b="1" sz="1000">
+              <a:defRPr sz="1150">
+                <a:solidFill>
+                  <a:srgbClr val="334155"/>
+                </a:solidFill>
+              </a:defRPr>
+            </a:pPr>
+            <a:r>
+              <a:t>Chạy trọn gói 240 Test Cases của cả 3 cấp độ.</a:t>
+            </a:r>
+          </a:p>
+          <a:p>
+            <a:br/>
+            <a:pPr>
+              <a:defRPr b="1" sz="1300">
                 <a:solidFill>
                   <a:srgbClr val="0D9488"/>
                 </a:solidFill>
@@ -4037,14 +4043,14 @@
           </a:p>
           <a:p>
             <a:pPr>
-              <a:defRPr sz="900">
-                <a:solidFill>
-                  <a:srgbClr val="475569"/>
-                </a:solidFill>
-              </a:defRPr>
-            </a:pPr>
-            <a:r>
-              <a:t>   Menu lựa chọn nhanh [1-4] cho người dùng</a:t>
+              <a:defRPr sz="1150">
+                <a:solidFill>
+                  <a:srgbClr val="334155"/>
+                </a:solidFill>
+              </a:defRPr>
+            </a:pPr>
+            <a:r>
+              <a:t>Menu tương tác chọn nhanh [1-4] cho người dùng.</a:t>
             </a:r>
           </a:p>
         </p:txBody>
@@ -4082,12 +4088,10 @@
             <a:avLst/>
           </a:prstGeom>
           <a:solidFill>
-            <a:srgbClr val="F8FAFC"/>
+            <a:srgbClr val="F1F5F9"/>
           </a:solidFill>
           <a:ln>
-            <a:solidFill>
-              <a:srgbClr val="F8FAFC"/>
-            </a:solidFill>
+            <a:noFill/>
           </a:ln>
         </p:spPr>
         <p:style>
@@ -4120,7 +4124,7 @@
         </p:nvSpPr>
         <p:spPr>
           <a:xfrm>
-            <a:off x="731520" y="365760"/>
+            <a:off x="731520" y="320040"/>
             <a:ext cx="10698480" cy="320040"/>
           </a:xfrm>
           <a:prstGeom prst="rect">
@@ -4129,13 +4133,13 @@
           <a:noFill/>
         </p:spPr>
         <p:txBody>
-          <a:bodyPr wrap="square">
+          <a:bodyPr wrap="none">
             <a:spAutoFit/>
           </a:bodyPr>
           <a:lstStyle/>
           <a:p>
             <a:pPr>
-              <a:defRPr sz="1000" b="1">
+              <a:defRPr sz="1100" b="1">
                 <a:solidFill>
                   <a:srgbClr val="0EA5E9"/>
                 </a:solidFill>
@@ -4156,8 +4160,8 @@
         </p:nvSpPr>
         <p:spPr>
           <a:xfrm>
-            <a:off x="731520" y="685800"/>
-            <a:ext cx="10698480" cy="548640"/>
+            <a:off x="731520" y="621792"/>
+            <a:ext cx="10698480" cy="594360"/>
           </a:xfrm>
           <a:prstGeom prst="rect">
             <a:avLst/>
@@ -4165,13 +4169,13 @@
           <a:noFill/>
         </p:spPr>
         <p:txBody>
-          <a:bodyPr wrap="square">
+          <a:bodyPr wrap="none">
             <a:spAutoFit/>
           </a:bodyPr>
           <a:lstStyle/>
           <a:p>
             <a:pPr>
-              <a:defRPr sz="2200" b="1">
+              <a:defRPr sz="2600" b="1">
                 <a:solidFill>
                   <a:srgbClr val="0F172A"/>
                 </a:solidFill>
@@ -4193,7 +4197,7 @@
         <p:spPr>
           <a:xfrm>
             <a:off x="731520" y="1371600"/>
-            <a:ext cx="3383280" cy="4937760"/>
+            <a:ext cx="3383280" cy="5029200"/>
           </a:xfrm>
           <a:prstGeom prst="roundRect">
             <a:avLst/>
@@ -4237,8 +4241,8 @@
         </p:nvSpPr>
         <p:spPr>
           <a:xfrm>
-            <a:off x="914400" y="1554480"/>
-            <a:ext cx="3017520" cy="4572000"/>
+            <a:off x="914400" y="1508760"/>
+            <a:ext cx="3017520" cy="4754880"/>
           </a:xfrm>
           <a:prstGeom prst="rect">
             <a:avLst/>
@@ -4252,7 +4256,7 @@
           <a:lstStyle/>
           <a:p>
             <a:pPr>
-              <a:defRPr sz="1300" b="1">
+              <a:defRPr sz="1600" b="1">
                 <a:solidFill>
                   <a:srgbClr val="0EA5E9"/>
                 </a:solidFill>
@@ -4264,9 +4268,9 @@
           </a:p>
           <a:p>
             <a:pPr>
-              <a:defRPr sz="950">
-                <a:solidFill>
-                  <a:srgbClr val="475569"/>
+              <a:defRPr sz="1150">
+                <a:solidFill>
+                  <a:srgbClr val="334155"/>
                 </a:solidFill>
               </a:defRPr>
             </a:pPr>
@@ -4276,62 +4280,66 @@
           </a:p>
           <a:p>
             <a:pPr>
-              <a:defRPr sz="1000" b="1">
+              <a:defRPr sz="1200" b="1">
                 <a:solidFill>
                   <a:srgbClr val="10B981"/>
                 </a:solidFill>
               </a:defRPr>
             </a:pPr>
             <a:r>
-              <a:t>Hoàn thành: 100% ⭐</a:t>
-            </a:r>
-          </a:p>
-          <a:p>
-            <a:pPr>
-              <a:defRPr sz="950">
+              <a:t>Mức độ hoàn thành: 100% ⭐</a:t>
+            </a:r>
+          </a:p>
+          <a:p>
+            <a:br/>
+            <a:pPr>
+              <a:defRPr sz="1200">
                 <a:solidFill>
                   <a:srgbClr val="0F172A"/>
                 </a:solidFill>
               </a:defRPr>
             </a:pPr>
             <a:r>
-              <a:t>• Thiết kế kiến trúc hệ thống và luồng dữ liệu StoreContext</a:t>
-            </a:r>
-          </a:p>
-          <a:p>
-            <a:pPr>
-              <a:defRPr sz="950">
+              <a:t>• Thiết kế kiến trúc hệ thống và luồng dữ liệu StoreContext.</a:t>
+            </a:r>
+          </a:p>
+          <a:p>
+            <a:br/>
+            <a:pPr>
+              <a:defRPr sz="1200">
                 <a:solidFill>
                   <a:srgbClr val="0F172A"/>
                 </a:solidFill>
               </a:defRPr>
             </a:pPr>
             <a:r>
-              <a:t>• Xây dựng và thực thi 70 Unit Test Cases (Kiểm thử đơn vị)</a:t>
-            </a:r>
-          </a:p>
-          <a:p>
-            <a:pPr>
-              <a:defRPr sz="950">
+              <a:t>• Xây dựng và thực thi 70 Unit Test Cases (Kiểm thử đơn vị).</a:t>
+            </a:r>
+          </a:p>
+          <a:p>
+            <a:br/>
+            <a:pPr>
+              <a:defRPr sz="1200">
                 <a:solidFill>
                   <a:srgbClr val="0F172A"/>
                 </a:solidFill>
               </a:defRPr>
             </a:pPr>
             <a:r>
-              <a:t>• Xây dựng Framework Automation Testing (Selenium 4 + TestNG)</a:t>
-            </a:r>
-          </a:p>
-          <a:p>
-            <a:pPr>
-              <a:defRPr sz="950">
+              <a:t>• Xây dựng Framework Automation Testing (Selenium 4 + TestNG POM).</a:t>
+            </a:r>
+          </a:p>
+          <a:p>
+            <a:br/>
+            <a:pPr>
+              <a:defRPr sz="1200">
                 <a:solidFill>
                   <a:srgbClr val="0F172A"/>
                 </a:solidFill>
               </a:defRPr>
             </a:pPr>
             <a:r>
-              <a:t>• Quản lý tiến độ dự án và kho mã nguồn GitHub</a:t>
+              <a:t>• Quản lý tiến độ dự án và kho mã nguồn GitHub.</a:t>
             </a:r>
           </a:p>
         </p:txBody>
@@ -4345,7 +4353,7 @@
         <p:spPr>
           <a:xfrm>
             <a:off x="4389120" y="1371600"/>
-            <a:ext cx="3383280" cy="4937760"/>
+            <a:ext cx="3383280" cy="5029200"/>
           </a:xfrm>
           <a:prstGeom prst="roundRect">
             <a:avLst/>
@@ -4389,8 +4397,8 @@
         </p:nvSpPr>
         <p:spPr>
           <a:xfrm>
-            <a:off x="4572000" y="1554480"/>
-            <a:ext cx="3017520" cy="4572000"/>
+            <a:off x="4572000" y="1508760"/>
+            <a:ext cx="3017520" cy="4754880"/>
           </a:xfrm>
           <a:prstGeom prst="rect">
             <a:avLst/>
@@ -4404,7 +4412,7 @@
           <a:lstStyle/>
           <a:p>
             <a:pPr>
-              <a:defRPr sz="1300" b="1">
+              <a:defRPr sz="1600" b="1">
                 <a:solidFill>
                   <a:srgbClr val="0D9488"/>
                 </a:solidFill>
@@ -4416,9 +4424,9 @@
           </a:p>
           <a:p>
             <a:pPr>
-              <a:defRPr sz="950">
-                <a:solidFill>
-                  <a:srgbClr val="475569"/>
+              <a:defRPr sz="1150">
+                <a:solidFill>
+                  <a:srgbClr val="334155"/>
                 </a:solidFill>
               </a:defRPr>
             </a:pPr>
@@ -4428,62 +4436,66 @@
           </a:p>
           <a:p>
             <a:pPr>
-              <a:defRPr sz="1000" b="1">
+              <a:defRPr sz="1200" b="1">
                 <a:solidFill>
                   <a:srgbClr val="10B981"/>
                 </a:solidFill>
               </a:defRPr>
             </a:pPr>
             <a:r>
-              <a:t>Hoàn thành: 100% ⭐</a:t>
-            </a:r>
-          </a:p>
-          <a:p>
-            <a:pPr>
-              <a:defRPr sz="950">
+              <a:t>Mức độ hoàn thành: 100% ⭐</a:t>
+            </a:r>
+          </a:p>
+          <a:p>
+            <a:br/>
+            <a:pPr>
+              <a:defRPr sz="1200">
                 <a:solidFill>
                   <a:srgbClr val="0F172A"/>
                 </a:solidFill>
               </a:defRPr>
             </a:pPr>
             <a:r>
-              <a:t>• Xây dựng và kiểm thử hệ thống REST API Backend Express</a:t>
-            </a:r>
-          </a:p>
-          <a:p>
-            <a:pPr>
-              <a:defRPr sz="950">
+              <a:t>• Xây dựng và kiểm thử hệ thống REST API Backend Express.</a:t>
+            </a:r>
+          </a:p>
+          <a:p>
+            <a:br/>
+            <a:pPr>
+              <a:defRPr sz="1200">
                 <a:solidFill>
                   <a:srgbClr val="0F172A"/>
                 </a:solidFill>
               </a:defRPr>
             </a:pPr>
             <a:r>
-              <a:t>• Xây dựng và thực thi 70 Integration Test Cases (Kiểm thử tích hợp)</a:t>
-            </a:r>
-          </a:p>
-          <a:p>
-            <a:pPr>
-              <a:defRPr sz="950">
+              <a:t>• Xây dựng và thực thi 70 Integration Test Cases (Kiểm thử tích hợp).</a:t>
+            </a:r>
+          </a:p>
+          <a:p>
+            <a:br/>
+            <a:pPr>
+              <a:defRPr sz="1200">
                 <a:solidFill>
                   <a:srgbClr val="0F172A"/>
                 </a:solidFill>
               </a:defRPr>
             </a:pPr>
             <a:r>
-              <a:t>• Thu thập, phân tích Defect Reports và kiểm thử hồi quy</a:t>
-            </a:r>
-          </a:p>
-          <a:p>
-            <a:pPr>
-              <a:defRPr sz="950">
+              <a:t>• Thu thập, phân tích Defect Reports và kiểm thử hồi quy.</a:t>
+            </a:r>
+          </a:p>
+          <a:p>
+            <a:br/>
+            <a:pPr>
+              <a:defRPr sz="1200">
                 <a:solidFill>
                   <a:srgbClr val="0F172A"/>
                 </a:solidFill>
               </a:defRPr>
             </a:pPr>
             <a:r>
-              <a:t>• Tài liệu hóa hệ thống API với Swagger UI</a:t>
+              <a:t>• Tài liệu hóa hệ thống API với Swagger UI.</a:t>
             </a:r>
           </a:p>
         </p:txBody>
@@ -4497,7 +4509,7 @@
         <p:spPr>
           <a:xfrm>
             <a:off x="8046720" y="1371600"/>
-            <a:ext cx="3383280" cy="4937760"/>
+            <a:ext cx="3383280" cy="5029200"/>
           </a:xfrm>
           <a:prstGeom prst="roundRect">
             <a:avLst/>
@@ -4507,7 +4519,7 @@
           </a:solidFill>
           <a:ln w="19050">
             <a:solidFill>
-              <a:srgbClr val="F59E0B"/>
+              <a:srgbClr val="D97706"/>
             </a:solidFill>
           </a:ln>
         </p:spPr>
@@ -4541,8 +4553,8 @@
         </p:nvSpPr>
         <p:spPr>
           <a:xfrm>
-            <a:off x="8229600" y="1554480"/>
-            <a:ext cx="3017520" cy="4572000"/>
+            <a:off x="8229600" y="1508760"/>
+            <a:ext cx="3017520" cy="4754880"/>
           </a:xfrm>
           <a:prstGeom prst="rect">
             <a:avLst/>
@@ -4556,9 +4568,9 @@
           <a:lstStyle/>
           <a:p>
             <a:pPr>
-              <a:defRPr sz="1300" b="1">
-                <a:solidFill>
-                  <a:srgbClr val="F59E0B"/>
+              <a:defRPr sz="1600" b="1">
+                <a:solidFill>
+                  <a:srgbClr val="D97706"/>
                 </a:solidFill>
               </a:defRPr>
             </a:pPr>
@@ -4568,9 +4580,9 @@
           </a:p>
           <a:p>
             <a:pPr>
-              <a:defRPr sz="950">
-                <a:solidFill>
-                  <a:srgbClr val="475569"/>
+              <a:defRPr sz="1150">
+                <a:solidFill>
+                  <a:srgbClr val="334155"/>
                 </a:solidFill>
               </a:defRPr>
             </a:pPr>
@@ -4580,62 +4592,66 @@
           </a:p>
           <a:p>
             <a:pPr>
-              <a:defRPr sz="1000" b="1">
+              <a:defRPr sz="1200" b="1">
                 <a:solidFill>
                   <a:srgbClr val="10B981"/>
                 </a:solidFill>
               </a:defRPr>
             </a:pPr>
             <a:r>
-              <a:t>Hoàn thành: 100% ⭐</a:t>
-            </a:r>
-          </a:p>
-          <a:p>
-            <a:pPr>
-              <a:defRPr sz="950">
+              <a:t>Mức độ hoàn thành: 100% ⭐</a:t>
+            </a:r>
+          </a:p>
+          <a:p>
+            <a:br/>
+            <a:pPr>
+              <a:defRPr sz="1200">
                 <a:solidFill>
                   <a:srgbClr val="0F172A"/>
                 </a:solidFill>
               </a:defRPr>
             </a:pPr>
             <a:r>
-              <a:t>• Thiết kế và hoàn thiện giao diện người dùng (UI/UX) 9 module</a:t>
-            </a:r>
-          </a:p>
-          <a:p>
-            <a:pPr>
-              <a:defRPr sz="950">
+              <a:t>• Thiết kế và hoàn thiện giao diện người dùng (UI/UX) 9 module.</a:t>
+            </a:r>
+          </a:p>
+          <a:p>
+            <a:br/>
+            <a:pPr>
+              <a:defRPr sz="1200">
                 <a:solidFill>
                   <a:srgbClr val="0F172A"/>
                 </a:solidFill>
               </a:defRPr>
             </a:pPr>
             <a:r>
-              <a:t>• Xây dựng và thực thi 100 System Test Cases (Kiểm thử hệ thống E2E)</a:t>
-            </a:r>
-          </a:p>
-          <a:p>
-            <a:pPr>
-              <a:defRPr sz="950">
+              <a:t>• Xây dựng và thực thi 100 System Test Cases (Kiểm thử hệ thống E2E).</a:t>
+            </a:r>
+          </a:p>
+          <a:p>
+            <a:br/>
+            <a:pPr>
+              <a:defRPr sz="1200">
                 <a:solidFill>
                   <a:srgbClr val="0F172A"/>
                 </a:solidFill>
               </a:defRPr>
             </a:pPr>
             <a:r>
-              <a:t>• Kiểm thử tương thích Cross-browser và Responsive Mobile/Tablet</a:t>
-            </a:r>
-          </a:p>
-          <a:p>
-            <a:pPr>
-              <a:defRPr sz="950">
+              <a:t>• Kiểm thử tương thích Cross-browser và Responsive Mobile/Tablet.</a:t>
+            </a:r>
+          </a:p>
+          <a:p>
+            <a:br/>
+            <a:pPr>
+              <a:defRPr sz="1200">
                 <a:solidFill>
                   <a:srgbClr val="0F172A"/>
                 </a:solidFill>
               </a:defRPr>
             </a:pPr>
             <a:r>
-              <a:t>• Tổng hợp và hoàn thiện báo cáo đồ án Đề tài 4</a:t>
+              <a:t>• Tổng hợp và hoàn thiện báo cáo đồ án Đề tài 4.</a:t>
             </a:r>
           </a:p>
         </p:txBody>
@@ -4676,9 +4692,7 @@
             <a:srgbClr val="0F172A"/>
           </a:solidFill>
           <a:ln>
-            <a:solidFill>
-              <a:srgbClr val="0F172A"/>
-            </a:solidFill>
+            <a:noFill/>
           </a:ln>
         </p:spPr>
         <p:style>
@@ -4711,8 +4725,8 @@
         </p:nvSpPr>
         <p:spPr>
           <a:xfrm>
-            <a:off x="731520" y="731520"/>
-            <a:ext cx="10698480" cy="914400"/>
+            <a:off x="731520" y="594360"/>
+            <a:ext cx="10698480" cy="731520"/>
           </a:xfrm>
           <a:prstGeom prst="rect">
             <a:avLst/>
@@ -4726,14 +4740,14 @@
           <a:lstStyle/>
           <a:p>
             <a:pPr>
-              <a:defRPr sz="2200" b="1">
+              <a:defRPr sz="2400" b="1">
                 <a:solidFill>
                   <a:srgbClr val="FFFFFF"/>
                 </a:solidFill>
               </a:defRPr>
             </a:pPr>
             <a:r>
-              <a:t>KẾT LUẬN &amp; HƯỚNG PHÁT TRIỂN</a:t>
+              <a:t>KẾT LUẬN &amp; HƯỚNG PHÁT TRIỂN ĐỀ TÀI</a:t>
             </a:r>
           </a:p>
         </p:txBody>
@@ -4746,8 +4760,8 @@
         </p:nvSpPr>
         <p:spPr>
           <a:xfrm>
-            <a:off x="731520" y="1645920"/>
-            <a:ext cx="5120640" cy="3291840"/>
+            <a:off x="731520" y="1463040"/>
+            <a:ext cx="5120640" cy="3474720"/>
           </a:xfrm>
           <a:prstGeom prst="roundRect">
             <a:avLst/>
@@ -4791,8 +4805,8 @@
         </p:nvSpPr>
         <p:spPr>
           <a:xfrm>
-            <a:off x="914400" y="1828800"/>
-            <a:ext cx="4754880" cy="2926080"/>
+            <a:off x="914400" y="1600200"/>
+            <a:ext cx="4754880" cy="3200400"/>
           </a:xfrm>
           <a:prstGeom prst="rect">
             <a:avLst/>
@@ -4806,7 +4820,7 @@
           <a:lstStyle/>
           <a:p>
             <a:pPr>
-              <a:defRPr sz="1300" b="1">
+              <a:defRPr sz="1600" b="1">
                 <a:solidFill>
                   <a:srgbClr val="0EA5E9"/>
                 </a:solidFill>
@@ -4817,8 +4831,9 @@
             </a:r>
           </a:p>
           <a:p>
-            <a:pPr>
-              <a:defRPr sz="1000">
+            <a:br/>
+            <a:pPr>
+              <a:defRPr sz="1200">
                 <a:solidFill>
                   <a:srgbClr val="FFFFFF"/>
                 </a:solidFill>
@@ -4829,8 +4844,9 @@
             </a:r>
           </a:p>
           <a:p>
-            <a:pPr>
-              <a:defRPr sz="1000">
+            <a:br/>
+            <a:pPr>
+              <a:defRPr sz="1200">
                 <a:solidFill>
                   <a:srgbClr val="FFFFFF"/>
                 </a:solidFill>
@@ -4841,8 +4857,9 @@
             </a:r>
           </a:p>
           <a:p>
-            <a:pPr>
-              <a:defRPr sz="1000">
+            <a:br/>
+            <a:pPr>
+              <a:defRPr sz="1200">
                 <a:solidFill>
                   <a:srgbClr val="FFFFFF"/>
                 </a:solidFill>
@@ -4853,8 +4870,9 @@
             </a:r>
           </a:p>
           <a:p>
-            <a:pPr>
-              <a:defRPr sz="1000">
+            <a:br/>
+            <a:pPr>
+              <a:defRPr sz="1200">
                 <a:solidFill>
                   <a:srgbClr val="FFFFFF"/>
                 </a:solidFill>
@@ -4874,8 +4892,8 @@
         </p:nvSpPr>
         <p:spPr>
           <a:xfrm>
-            <a:off x="6126480" y="1645920"/>
-            <a:ext cx="5303520" cy="3291840"/>
+            <a:off x="6126480" y="1463040"/>
+            <a:ext cx="5303520" cy="3474720"/>
           </a:xfrm>
           <a:prstGeom prst="roundRect">
             <a:avLst/>
@@ -4885,7 +4903,7 @@
           </a:solidFill>
           <a:ln w="19050">
             <a:solidFill>
-              <a:srgbClr val="F59E0B"/>
+              <a:srgbClr val="D97706"/>
             </a:solidFill>
           </a:ln>
         </p:spPr>
@@ -4919,8 +4937,8 @@
         </p:nvSpPr>
         <p:spPr>
           <a:xfrm>
-            <a:off x="6309360" y="1828800"/>
-            <a:ext cx="4937760" cy="2926080"/>
+            <a:off x="6309360" y="1600200"/>
+            <a:ext cx="4937760" cy="3200400"/>
           </a:xfrm>
           <a:prstGeom prst="rect">
             <a:avLst/>
@@ -4934,9 +4952,9 @@
           <a:lstStyle/>
           <a:p>
             <a:pPr>
-              <a:defRPr sz="1300" b="1">
-                <a:solidFill>
-                  <a:srgbClr val="F59E0B"/>
+              <a:defRPr sz="1600" b="1">
+                <a:solidFill>
+                  <a:srgbClr val="D97706"/>
                 </a:solidFill>
               </a:defRPr>
             </a:pPr>
@@ -4945,20 +4963,22 @@
             </a:r>
           </a:p>
           <a:p>
-            <a:pPr>
-              <a:defRPr sz="1000">
+            <a:br/>
+            <a:pPr>
+              <a:defRPr sz="1200">
                 <a:solidFill>
                   <a:srgbClr val="FFFFFF"/>
                 </a:solidFill>
               </a:defRPr>
             </a:pPr>
             <a:r>
-              <a:t>➔ Tích hợp CI/CD Pipeline (GitHub Actions) kích hoạt test tự động mỗi commit.</a:t>
-            </a:r>
-          </a:p>
-          <a:p>
-            <a:pPr>
-              <a:defRPr sz="1000">
+              <a:t>➔ Tích hợp CI/CD Pipeline (GitHub Actions) tự động kích hoạt test mỗi commit.</a:t>
+            </a:r>
+          </a:p>
+          <a:p>
+            <a:br/>
+            <a:pPr>
+              <a:defRPr sz="1200">
                 <a:solidFill>
                   <a:srgbClr val="FFFFFF"/>
                 </a:solidFill>
@@ -4969,8 +4989,9 @@
             </a:r>
           </a:p>
           <a:p>
-            <a:pPr>
-              <a:defRPr sz="1000">
+            <a:br/>
+            <a:pPr>
+              <a:defRPr sz="1200">
                 <a:solidFill>
                   <a:srgbClr val="FFFFFF"/>
                 </a:solidFill>
@@ -4981,8 +5002,9 @@
             </a:r>
           </a:p>
           <a:p>
-            <a:pPr>
-              <a:defRPr sz="1000">
+            <a:br/>
+            <a:pPr>
+              <a:defRPr sz="1200">
                 <a:solidFill>
                   <a:srgbClr val="FFFFFF"/>
                 </a:solidFill>
@@ -5002,8 +5024,8 @@
         </p:nvSpPr>
         <p:spPr>
           <a:xfrm>
-            <a:off x="731520" y="5212080"/>
-            <a:ext cx="10698480" cy="1188720"/>
+            <a:off x="731520" y="5166360"/>
+            <a:ext cx="10698480" cy="1280160"/>
           </a:xfrm>
           <a:prstGeom prst="roundRect">
             <a:avLst/>
@@ -5047,8 +5069,8 @@
         </p:nvSpPr>
         <p:spPr>
           <a:xfrm>
-            <a:off x="914400" y="5303520"/>
-            <a:ext cx="10332720" cy="1005840"/>
+            <a:off x="914400" y="5257800"/>
+            <a:ext cx="10332720" cy="1097280"/>
           </a:xfrm>
           <a:prstGeom prst="rect">
             <a:avLst/>
@@ -5062,7 +5084,7 @@
           <a:lstStyle/>
           <a:p>
             <a:pPr algn="ctr">
-              <a:defRPr sz="1500" b="1">
+              <a:defRPr sz="1600" b="1">
                 <a:solidFill>
                   <a:srgbClr val="10B981"/>
                 </a:solidFill>
@@ -5073,15 +5095,20 @@
             </a:r>
           </a:p>
           <a:p>
+            <a:br/>
             <a:pPr algn="ctr">
-              <a:defRPr sz="1050">
+              <a:defRPr sz="1200">
                 <a:solidFill>
                   <a:srgbClr val="CBD5E1"/>
                 </a:solidFill>
               </a:defRPr>
             </a:pPr>
             <a:r>
-              <a:t>Kính mời Thầy và các bạn đặt câu hỏi trao đổi (Q&amp;A) • GitHub: https://github.com/xuanmanh398/KiemThuPhanMem</a:t>
+              <a:t>Kính mời Thầy và các bạn đặt câu hỏi trao đổi (Q&amp;A)</a:t>
+            </a:r>
+            <a:br/>
+            <a:r>
+              <a:t>GitHub Repository: https://github.com/xuanmanh398/KiemThuPhanMem</a:t>
             </a:r>
           </a:p>
         </p:txBody>
@@ -5119,12 +5146,10 @@
             <a:avLst/>
           </a:prstGeom>
           <a:solidFill>
-            <a:srgbClr val="F8FAFC"/>
+            <a:srgbClr val="F1F5F9"/>
           </a:solidFill>
           <a:ln>
-            <a:solidFill>
-              <a:srgbClr val="F8FAFC"/>
-            </a:solidFill>
+            <a:noFill/>
           </a:ln>
         </p:spPr>
         <p:style>
@@ -5157,7 +5182,7 @@
         </p:nvSpPr>
         <p:spPr>
           <a:xfrm>
-            <a:off x="731520" y="365760"/>
+            <a:off x="731520" y="320040"/>
             <a:ext cx="10698480" cy="320040"/>
           </a:xfrm>
           <a:prstGeom prst="rect">
@@ -5166,13 +5191,13 @@
           <a:noFill/>
         </p:spPr>
         <p:txBody>
-          <a:bodyPr wrap="square">
+          <a:bodyPr wrap="none">
             <a:spAutoFit/>
           </a:bodyPr>
           <a:lstStyle/>
           <a:p>
             <a:pPr>
-              <a:defRPr sz="1000" b="1">
+              <a:defRPr sz="1100" b="1">
                 <a:solidFill>
                   <a:srgbClr val="0EA5E9"/>
                 </a:solidFill>
@@ -5180,7 +5205,7 @@
               </a:defRPr>
             </a:pPr>
             <a:r>
-              <a:t>MỤC LỤC TRÌNH BÀY</a:t>
+              <a:t>MỤC LỤC TRỌNG TÂM</a:t>
             </a:r>
           </a:p>
         </p:txBody>
@@ -5193,8 +5218,8 @@
         </p:nvSpPr>
         <p:spPr>
           <a:xfrm>
-            <a:off x="731520" y="685800"/>
-            <a:ext cx="10698480" cy="548640"/>
+            <a:off x="731520" y="621792"/>
+            <a:ext cx="10698480" cy="594360"/>
           </a:xfrm>
           <a:prstGeom prst="rect">
             <a:avLst/>
@@ -5202,13 +5227,13 @@
           <a:noFill/>
         </p:spPr>
         <p:txBody>
-          <a:bodyPr wrap="square">
+          <a:bodyPr wrap="none">
             <a:spAutoFit/>
           </a:bodyPr>
           <a:lstStyle/>
           <a:p>
             <a:pPr>
-              <a:defRPr sz="2200" b="1">
+              <a:defRPr sz="2600" b="1">
                 <a:solidFill>
                   <a:srgbClr val="0F172A"/>
                 </a:solidFill>
@@ -5216,7 +5241,7 @@
               </a:defRPr>
             </a:pPr>
             <a:r>
-              <a:t>Nội Dung Báo Cáo Đề Tài</a:t>
+              <a:t>Nội Dung Trình Bày Báo Cáo</a:t>
             </a:r>
           </a:p>
         </p:txBody>
@@ -5229,8 +5254,8 @@
         </p:nvSpPr>
         <p:spPr>
           <a:xfrm>
-            <a:off x="731520" y="1463040"/>
-            <a:ext cx="10698480" cy="841248"/>
+            <a:off x="731520" y="1371600"/>
+            <a:ext cx="10698480" cy="896112"/>
           </a:xfrm>
           <a:prstGeom prst="roundRect">
             <a:avLst/>
@@ -5240,7 +5265,7 @@
           </a:solidFill>
           <a:ln w="19050">
             <a:solidFill>
-              <a:srgbClr val="E2E8F0"/>
+              <a:srgbClr val="CBD5E1"/>
             </a:solidFill>
           </a:ln>
         </p:spPr>
@@ -5274,8 +5299,8 @@
         </p:nvSpPr>
         <p:spPr>
           <a:xfrm>
-            <a:off x="914400" y="1609344"/>
-            <a:ext cx="548640" cy="548640"/>
+            <a:off x="914400" y="1499616"/>
+            <a:ext cx="640080" cy="640080"/>
           </a:xfrm>
           <a:prstGeom prst="roundRect">
             <a:avLst/>
@@ -5306,7 +5331,7 @@
           <a:lstStyle/>
           <a:p>
             <a:pPr algn="ctr">
-              <a:defRPr b="1" sz="1300">
+              <a:defRPr b="1" sz="1500">
                 <a:solidFill>
                   <a:srgbClr val="FFFFFF"/>
                 </a:solidFill>
@@ -5326,8 +5351,8 @@
         </p:nvSpPr>
         <p:spPr>
           <a:xfrm>
-            <a:off x="1645920" y="1554480"/>
-            <a:ext cx="9509760" cy="685800"/>
+            <a:off x="1737360" y="1444752"/>
+            <a:ext cx="9418320" cy="731520"/>
           </a:xfrm>
           <a:prstGeom prst="rect">
             <a:avLst/>
@@ -5335,32 +5360,32 @@
           <a:noFill/>
         </p:spPr>
         <p:txBody>
-          <a:bodyPr wrap="none">
+          <a:bodyPr wrap="square">
             <a:spAutoFit/>
           </a:bodyPr>
           <a:lstStyle/>
           <a:p>
             <a:pPr>
-              <a:defRPr sz="1300" b="1">
+              <a:defRPr sz="1500" b="1">
                 <a:solidFill>
                   <a:srgbClr val="0F172A"/>
                 </a:solidFill>
               </a:defRPr>
             </a:pPr>
             <a:r>
-              <a:t>Tổng Quan Bài Toán &amp; Kiến Trúc PetCare Pro</a:t>
-            </a:r>
-          </a:p>
-          <a:p>
-            <a:pPr>
-              <a:defRPr sz="1000">
-                <a:solidFill>
-                  <a:srgbClr val="475569"/>
-                </a:solidFill>
-              </a:defRPr>
-            </a:pPr>
-            <a:r>
-              <a:t>Bối cảnh ngành dịch vụ thú cưng, mục tiêu bài toán và kiến trúc 9 module nghiệp vụ.</a:t>
+              <a:t>Tổng Quan Bài Toán &amp; Kiến Trúc Hệ Thống</a:t>
+            </a:r>
+          </a:p>
+          <a:p>
+            <a:pPr>
+              <a:defRPr sz="1200">
+                <a:solidFill>
+                  <a:srgbClr val="334155"/>
+                </a:solidFill>
+              </a:defRPr>
+            </a:pPr>
+            <a:r>
+              <a:t>Bối cảnh ngành dịch vụ thú cưng, mục tiêu bài toán và kiến trúc 9 module phần mềm PetCare Pro.</a:t>
             </a:r>
           </a:p>
         </p:txBody>
@@ -5373,8 +5398,8 @@
         </p:nvSpPr>
         <p:spPr>
           <a:xfrm>
-            <a:off x="731520" y="2423160"/>
-            <a:ext cx="10698480" cy="841248"/>
+            <a:off x="731520" y="2377440"/>
+            <a:ext cx="10698480" cy="896112"/>
           </a:xfrm>
           <a:prstGeom prst="roundRect">
             <a:avLst/>
@@ -5384,7 +5409,7 @@
           </a:solidFill>
           <a:ln w="19050">
             <a:solidFill>
-              <a:srgbClr val="E2E8F0"/>
+              <a:srgbClr val="CBD5E1"/>
             </a:solidFill>
           </a:ln>
         </p:spPr>
@@ -5418,8 +5443,8 @@
         </p:nvSpPr>
         <p:spPr>
           <a:xfrm>
-            <a:off x="914400" y="2569464"/>
-            <a:ext cx="548640" cy="548640"/>
+            <a:off x="914400" y="2505456"/>
+            <a:ext cx="640080" cy="640080"/>
           </a:xfrm>
           <a:prstGeom prst="roundRect">
             <a:avLst/>
@@ -5450,7 +5475,7 @@
           <a:lstStyle/>
           <a:p>
             <a:pPr algn="ctr">
-              <a:defRPr b="1" sz="1300">
+              <a:defRPr b="1" sz="1500">
                 <a:solidFill>
                   <a:srgbClr val="FFFFFF"/>
                 </a:solidFill>
@@ -5470,8 +5495,8 @@
         </p:nvSpPr>
         <p:spPr>
           <a:xfrm>
-            <a:off x="1645920" y="2514600"/>
-            <a:ext cx="9509760" cy="685800"/>
+            <a:off x="1737360" y="2450592"/>
+            <a:ext cx="9418320" cy="731520"/>
           </a:xfrm>
           <a:prstGeom prst="rect">
             <a:avLst/>
@@ -5479,13 +5504,13 @@
           <a:noFill/>
         </p:spPr>
         <p:txBody>
-          <a:bodyPr wrap="none">
+          <a:bodyPr wrap="square">
             <a:spAutoFit/>
           </a:bodyPr>
           <a:lstStyle/>
           <a:p>
             <a:pPr>
-              <a:defRPr sz="1300" b="1">
+              <a:defRPr sz="1500" b="1">
                 <a:solidFill>
                   <a:srgbClr val="0F172A"/>
                 </a:solidFill>
@@ -5497,14 +5522,14 @@
           </a:p>
           <a:p>
             <a:pPr>
-              <a:defRPr sz="1000">
-                <a:solidFill>
-                  <a:srgbClr val="475569"/>
-                </a:solidFill>
-              </a:defRPr>
-            </a:pPr>
-            <a:r>
-              <a:t>Chiến lược kiểm thử đa cấp độ: 70 Unit Test, 70 Integration Test và 100 System Test.</a:t>
+              <a:defRPr sz="1200">
+                <a:solidFill>
+                  <a:srgbClr val="334155"/>
+                </a:solidFill>
+              </a:defRPr>
+            </a:pPr>
+            <a:r>
+              <a:t>Chiến lược kiểm thử đa cấp độ: 70 Unit Test, 70 Integration Test và 100 System Test E2E.</a:t>
             </a:r>
           </a:p>
         </p:txBody>
@@ -5518,7 +5543,7 @@
         <p:spPr>
           <a:xfrm>
             <a:off x="731520" y="3383280"/>
-            <a:ext cx="10698480" cy="841248"/>
+            <a:ext cx="10698480" cy="896112"/>
           </a:xfrm>
           <a:prstGeom prst="roundRect">
             <a:avLst/>
@@ -5528,7 +5553,7 @@
           </a:solidFill>
           <a:ln w="19050">
             <a:solidFill>
-              <a:srgbClr val="E2E8F0"/>
+              <a:srgbClr val="CBD5E1"/>
             </a:solidFill>
           </a:ln>
         </p:spPr>
@@ -5562,8 +5587,8 @@
         </p:nvSpPr>
         <p:spPr>
           <a:xfrm>
-            <a:off x="914400" y="3529584"/>
-            <a:ext cx="548640" cy="548640"/>
+            <a:off x="914400" y="3511296"/>
+            <a:ext cx="640080" cy="640080"/>
           </a:xfrm>
           <a:prstGeom prst="roundRect">
             <a:avLst/>
@@ -5594,7 +5619,7 @@
           <a:lstStyle/>
           <a:p>
             <a:pPr algn="ctr">
-              <a:defRPr b="1" sz="1300">
+              <a:defRPr b="1" sz="1500">
                 <a:solidFill>
                   <a:srgbClr val="FFFFFF"/>
                 </a:solidFill>
@@ -5614,8 +5639,8 @@
         </p:nvSpPr>
         <p:spPr>
           <a:xfrm>
-            <a:off x="1645920" y="3474720"/>
-            <a:ext cx="9509760" cy="685800"/>
+            <a:off x="1737360" y="3456432"/>
+            <a:ext cx="9418320" cy="731520"/>
           </a:xfrm>
           <a:prstGeom prst="rect">
             <a:avLst/>
@@ -5623,13 +5648,13 @@
           <a:noFill/>
         </p:spPr>
         <p:txBody>
-          <a:bodyPr wrap="none">
+          <a:bodyPr wrap="square">
             <a:spAutoFit/>
           </a:bodyPr>
           <a:lstStyle/>
           <a:p>
             <a:pPr>
-              <a:defRPr sz="1300" b="1">
+              <a:defRPr sz="1500" b="1">
                 <a:solidFill>
                   <a:srgbClr val="0F172A"/>
                 </a:solidFill>
@@ -5641,14 +5666,14 @@
           </a:p>
           <a:p>
             <a:pPr>
-              <a:defRPr sz="1000">
-                <a:solidFill>
-                  <a:srgbClr val="475569"/>
-                </a:solidFill>
-              </a:defRPr>
-            </a:pPr>
-            <a:r>
-              <a:t>Quy trình thực thi, phân tích Bug Life Cycle và khắc phục 2 lỗi tích hợp quan trọng.</a:t>
+              <a:defRPr sz="1200">
+                <a:solidFill>
+                  <a:srgbClr val="334155"/>
+                </a:solidFill>
+              </a:defRPr>
+            </a:pPr>
+            <a:r>
+              <a:t>Quy trình Bug Life Cycle 5 bước, khắc phục 2 lỗi tích hợp thực tế, thống kê tỷ lệ Đạt 100% PASS.</a:t>
             </a:r>
           </a:p>
         </p:txBody>
@@ -5661,8 +5686,8 @@
         </p:nvSpPr>
         <p:spPr>
           <a:xfrm>
-            <a:off x="731520" y="4343400"/>
-            <a:ext cx="10698480" cy="841248"/>
+            <a:off x="731520" y="4389120"/>
+            <a:ext cx="10698480" cy="896112"/>
           </a:xfrm>
           <a:prstGeom prst="roundRect">
             <a:avLst/>
@@ -5672,7 +5697,7 @@
           </a:solidFill>
           <a:ln w="19050">
             <a:solidFill>
-              <a:srgbClr val="E2E8F0"/>
+              <a:srgbClr val="CBD5E1"/>
             </a:solidFill>
           </a:ln>
         </p:spPr>
@@ -5706,8 +5731,8 @@
         </p:nvSpPr>
         <p:spPr>
           <a:xfrm>
-            <a:off x="914400" y="4489704"/>
-            <a:ext cx="548640" cy="548640"/>
+            <a:off x="914400" y="4517136"/>
+            <a:ext cx="640080" cy="640080"/>
           </a:xfrm>
           <a:prstGeom prst="roundRect">
             <a:avLst/>
@@ -5738,7 +5763,7 @@
           <a:lstStyle/>
           <a:p>
             <a:pPr algn="ctr">
-              <a:defRPr b="1" sz="1300">
+              <a:defRPr b="1" sz="1500">
                 <a:solidFill>
                   <a:srgbClr val="FFFFFF"/>
                 </a:solidFill>
@@ -5758,8 +5783,8 @@
         </p:nvSpPr>
         <p:spPr>
           <a:xfrm>
-            <a:off x="1645920" y="4434840"/>
-            <a:ext cx="9509760" cy="685800"/>
+            <a:off x="1737360" y="4462272"/>
+            <a:ext cx="9418320" cy="731520"/>
           </a:xfrm>
           <a:prstGeom prst="rect">
             <a:avLst/>
@@ -5767,13 +5792,13 @@
           <a:noFill/>
         </p:spPr>
         <p:txBody>
-          <a:bodyPr wrap="none">
+          <a:bodyPr wrap="square">
             <a:spAutoFit/>
           </a:bodyPr>
           <a:lstStyle/>
           <a:p>
             <a:pPr>
-              <a:defRPr sz="1300" b="1">
+              <a:defRPr sz="1500" b="1">
                 <a:solidFill>
                   <a:srgbClr val="0F172A"/>
                 </a:solidFill>
@@ -5785,14 +5810,14 @@
           </a:p>
           <a:p>
             <a:pPr>
-              <a:defRPr sz="1000">
-                <a:solidFill>
-                  <a:srgbClr val="475569"/>
-                </a:solidFill>
-              </a:defRPr>
-            </a:pPr>
-            <a:r>
-              <a:t>Kiến trúc Page Object Model, bộ chạy tự động đa cấp độ và báo cáo ExtentReports 5.</a:t>
+              <a:defRPr sz="1200">
+                <a:solidFill>
+                  <a:srgbClr val="334155"/>
+                </a:solidFill>
+              </a:defRPr>
+            </a:pPr>
+            <a:r>
+              <a:t>Mô hình Page Object Model (POM), 5 bộ chạy tự động 1-Click độc lập và báo cáo ExtentReports 5.</a:t>
             </a:r>
           </a:p>
         </p:txBody>
@@ -5805,8 +5830,8 @@
         </p:nvSpPr>
         <p:spPr>
           <a:xfrm>
-            <a:off x="731520" y="5303520"/>
-            <a:ext cx="10698480" cy="841248"/>
+            <a:off x="731520" y="5394960"/>
+            <a:ext cx="10698480" cy="896112"/>
           </a:xfrm>
           <a:prstGeom prst="roundRect">
             <a:avLst/>
@@ -5816,7 +5841,7 @@
           </a:solidFill>
           <a:ln w="19050">
             <a:solidFill>
-              <a:srgbClr val="E2E8F0"/>
+              <a:srgbClr val="CBD5E1"/>
             </a:solidFill>
           </a:ln>
         </p:spPr>
@@ -5850,8 +5875,8 @@
         </p:nvSpPr>
         <p:spPr>
           <a:xfrm>
-            <a:off x="914400" y="5449824"/>
-            <a:ext cx="548640" cy="548640"/>
+            <a:off x="914400" y="5522976"/>
+            <a:ext cx="640080" cy="640080"/>
           </a:xfrm>
           <a:prstGeom prst="roundRect">
             <a:avLst/>
@@ -5882,7 +5907,7 @@
           <a:lstStyle/>
           <a:p>
             <a:pPr algn="ctr">
-              <a:defRPr b="1" sz="1300">
+              <a:defRPr b="1" sz="1500">
                 <a:solidFill>
                   <a:srgbClr val="FFFFFF"/>
                 </a:solidFill>
@@ -5902,8 +5927,8 @@
         </p:nvSpPr>
         <p:spPr>
           <a:xfrm>
-            <a:off x="1645920" y="5394960"/>
-            <a:ext cx="9509760" cy="685800"/>
+            <a:off x="1737360" y="5468112"/>
+            <a:ext cx="9418320" cy="731520"/>
           </a:xfrm>
           <a:prstGeom prst="rect">
             <a:avLst/>
@@ -5911,32 +5936,32 @@
           <a:noFill/>
         </p:spPr>
         <p:txBody>
-          <a:bodyPr wrap="none">
+          <a:bodyPr wrap="square">
             <a:spAutoFit/>
           </a:bodyPr>
           <a:lstStyle/>
           <a:p>
             <a:pPr>
-              <a:defRPr sz="1300" b="1">
+              <a:defRPr sz="1500" b="1">
                 <a:solidFill>
                   <a:srgbClr val="0F172A"/>
                 </a:solidFill>
               </a:defRPr>
             </a:pPr>
             <a:r>
-              <a:t>Đánh Giá Hiệu Năng, Phân Công &amp; Hướng Phát Triển</a:t>
-            </a:r>
-          </a:p>
-          <a:p>
-            <a:pPr>
-              <a:defRPr sz="1000">
-                <a:solidFill>
-                  <a:srgbClr val="475569"/>
-                </a:solidFill>
-              </a:defRPr>
-            </a:pPr>
-            <a:r>
-              <a:t>So sánh Manual vs Automation, bảng phân công nhiệm vụ và kết luận đề tài.</a:t>
+              <a:t>Đánh Giá Hiệu Năng, Phân Công &amp; Kết Luận</a:t>
+            </a:r>
+          </a:p>
+          <a:p>
+            <a:pPr>
+              <a:defRPr sz="1200">
+                <a:solidFill>
+                  <a:srgbClr val="334155"/>
+                </a:solidFill>
+              </a:defRPr>
+            </a:pPr>
+            <a:r>
+              <a:t>So sánh Manual vs Automation, bảng phân công nhiệm vụ chi tiết và định hướng phát triển.</a:t>
             </a:r>
           </a:p>
         </p:txBody>
@@ -5974,12 +5999,10 @@
             <a:avLst/>
           </a:prstGeom>
           <a:solidFill>
-            <a:srgbClr val="F8FAFC"/>
+            <a:srgbClr val="F1F5F9"/>
           </a:solidFill>
           <a:ln>
-            <a:solidFill>
-              <a:srgbClr val="F8FAFC"/>
-            </a:solidFill>
+            <a:noFill/>
           </a:ln>
         </p:spPr>
         <p:style>
@@ -6012,7 +6035,7 @@
         </p:nvSpPr>
         <p:spPr>
           <a:xfrm>
-            <a:off x="731520" y="365760"/>
+            <a:off x="731520" y="320040"/>
             <a:ext cx="10698480" cy="320040"/>
           </a:xfrm>
           <a:prstGeom prst="rect">
@@ -6021,13 +6044,13 @@
           <a:noFill/>
         </p:spPr>
         <p:txBody>
-          <a:bodyPr wrap="square">
+          <a:bodyPr wrap="none">
             <a:spAutoFit/>
           </a:bodyPr>
           <a:lstStyle/>
           <a:p>
             <a:pPr>
-              <a:defRPr sz="1000" b="1">
+              <a:defRPr sz="1100" b="1">
                 <a:solidFill>
                   <a:srgbClr val="0EA5E9"/>
                 </a:solidFill>
@@ -6048,8 +6071,8 @@
         </p:nvSpPr>
         <p:spPr>
           <a:xfrm>
-            <a:off x="731520" y="685800"/>
-            <a:ext cx="10698480" cy="548640"/>
+            <a:off x="731520" y="621792"/>
+            <a:ext cx="10698480" cy="594360"/>
           </a:xfrm>
           <a:prstGeom prst="rect">
             <a:avLst/>
@@ -6057,13 +6080,13 @@
           <a:noFill/>
         </p:spPr>
         <p:txBody>
-          <a:bodyPr wrap="square">
+          <a:bodyPr wrap="none">
             <a:spAutoFit/>
           </a:bodyPr>
           <a:lstStyle/>
           <a:p>
             <a:pPr>
-              <a:defRPr sz="2200" b="1">
+              <a:defRPr sz="2600" b="1">
                 <a:solidFill>
                   <a:srgbClr val="0F172A"/>
                 </a:solidFill>
@@ -6085,7 +6108,7 @@
         <p:spPr>
           <a:xfrm>
             <a:off x="731520" y="1371600"/>
-            <a:ext cx="5120640" cy="4937760"/>
+            <a:ext cx="5120640" cy="5029200"/>
           </a:xfrm>
           <a:prstGeom prst="roundRect">
             <a:avLst/>
@@ -6095,7 +6118,7 @@
           </a:solidFill>
           <a:ln w="19050">
             <a:solidFill>
-              <a:srgbClr val="E2E8F0"/>
+              <a:srgbClr val="CBD5E1"/>
             </a:solidFill>
           </a:ln>
         </p:spPr>
@@ -6129,8 +6152,8 @@
         </p:nvSpPr>
         <p:spPr>
           <a:xfrm>
-            <a:off x="914400" y="1554480"/>
-            <a:ext cx="4754880" cy="4572000"/>
+            <a:off x="914400" y="1508760"/>
+            <a:ext cx="4754880" cy="4754880"/>
           </a:xfrm>
           <a:prstGeom prst="rect">
             <a:avLst/>
@@ -6144,7 +6167,7 @@
           <a:lstStyle/>
           <a:p>
             <a:pPr>
-              <a:defRPr sz="1300" b="1">
+              <a:defRPr sz="1600" b="1">
                 <a:solidFill>
                   <a:srgbClr val="0D9488"/>
                 </a:solidFill>
@@ -6155,75 +6178,78 @@
             </a:r>
           </a:p>
           <a:p>
-            <a:pPr>
-              <a:defRPr b="1" sz="1100">
+            <a:br/>
+            <a:pPr>
+              <a:defRPr b="1" sz="1350">
                 <a:solidFill>
                   <a:srgbClr val="0F172A"/>
                 </a:solidFill>
               </a:defRPr>
             </a:pPr>
             <a:r>
-              <a:t>• Nhu cầu chăm sóc thú cưng tăng mạnh:</a:t>
-            </a:r>
-          </a:p>
-          <a:p>
-            <a:pPr>
-              <a:defRPr sz="1000">
-                <a:solidFill>
-                  <a:srgbClr val="475569"/>
-                </a:solidFill>
-              </a:defRPr>
-            </a:pPr>
-            <a:r>
-              <a:t>   Quản lý thủ công bằng sổ sách dễ gây trùng lịch Spa, thất thoát tồn kho, nhầm lẫn giá dịch vụ.</a:t>
-            </a:r>
-          </a:p>
-          <a:p>
-            <a:pPr>
-              <a:defRPr b="1" sz="1100">
+              <a:t>✔ Thực trạng quản lý thú cưng:</a:t>
+            </a:r>
+          </a:p>
+          <a:p>
+            <a:pPr>
+              <a:defRPr sz="1200">
+                <a:solidFill>
+                  <a:srgbClr val="334155"/>
+                </a:solidFill>
+              </a:defRPr>
+            </a:pPr>
+            <a:r>
+              <a:t>Quản lý thủ công bằng sổ sách gây trùng lịch hẹn Spa, thất thoát tồn kho và nhầm lẫn giá dịch vụ.</a:t>
+            </a:r>
+          </a:p>
+          <a:p>
+            <a:br/>
+            <a:pPr>
+              <a:defRPr b="1" sz="1350">
                 <a:solidFill>
                   <a:srgbClr val="0F172A"/>
                 </a:solidFill>
               </a:defRPr>
             </a:pPr>
             <a:r>
-              <a:t>• Mục tiêu phần mềm PetCare Pro:</a:t>
-            </a:r>
-          </a:p>
-          <a:p>
-            <a:pPr>
-              <a:defRPr sz="1000">
-                <a:solidFill>
-                  <a:srgbClr val="475569"/>
-                </a:solidFill>
-              </a:defRPr>
-            </a:pPr>
-            <a:r>
-              <a:t>   Cung cấp nền tảng Web quản trị trọn gói: Tiếp nhận lịch hẹn 7 bước, Bán hàng POS, Quản lý kho, CRM CSKH tự động và Phân ca nhân sự.</a:t>
-            </a:r>
-          </a:p>
-          <a:p>
-            <a:pPr>
-              <a:defRPr b="1" sz="1100">
+              <a:t>✔ Mục tiêu phần mềm PetCare Pro:</a:t>
+            </a:r>
+          </a:p>
+          <a:p>
+            <a:pPr>
+              <a:defRPr sz="1200">
+                <a:solidFill>
+                  <a:srgbClr val="334155"/>
+                </a:solidFill>
+              </a:defRPr>
+            </a:pPr>
+            <a:r>
+              <a:t>Xây dựng hệ thống Web toàn diện quản trị khép kín: Tiếp nhận lịch hẹn 7 bước, Bán hàng POS, Quản lý kho, CRM nhắc lịch tự động và Phân ca nhân sự.</a:t>
+            </a:r>
+          </a:p>
+          <a:p>
+            <a:br/>
+            <a:pPr>
+              <a:defRPr b="1" sz="1350">
                 <a:solidFill>
                   <a:srgbClr val="0F172A"/>
                 </a:solidFill>
               </a:defRPr>
             </a:pPr>
             <a:r>
-              <a:t>• Công nghệ ứng dụng:</a:t>
-            </a:r>
-          </a:p>
-          <a:p>
-            <a:pPr>
-              <a:defRPr sz="1000">
-                <a:solidFill>
-                  <a:srgbClr val="475569"/>
-                </a:solidFill>
-              </a:defRPr>
-            </a:pPr>
-            <a:r>
-              <a:t>   • Frontend: React 18, Vite, Tailwind CSS</a:t>
+              <a:t>✔ Kiến trúc công nghệ ứng dụng:</a:t>
+            </a:r>
+          </a:p>
+          <a:p>
+            <a:pPr>
+              <a:defRPr sz="1200">
+                <a:solidFill>
+                  <a:srgbClr val="334155"/>
+                </a:solidFill>
+              </a:defRPr>
+            </a:pPr>
+            <a:r>
+              <a:t>• Frontend: React 18, Vite, Tailwind CSS (Single Page App)</a:t>
             </a:r>
             <a:br/>
             <a:r>
@@ -6231,7 +6257,11 @@
             </a:r>
             <a:br/>
             <a:r>
-              <a:t>• Testing: Selenium WebDriver 4, TestNG, ExtentReports</a:t>
+              <a:t>• State &amp; Dữ liệu: In-Memory StoreContext đồng bộ tức thời</a:t>
+            </a:r>
+            <a:br/>
+            <a:r>
+              <a:t>• Automation Test: Selenium WebDriver 4, TestNG, ExtentReports</a:t>
             </a:r>
           </a:p>
         </p:txBody>
@@ -6245,7 +6275,7 @@
         <p:spPr>
           <a:xfrm>
             <a:off x="6126480" y="1371600"/>
-            <a:ext cx="5303520" cy="4937760"/>
+            <a:ext cx="5303520" cy="5029200"/>
           </a:xfrm>
           <a:prstGeom prst="roundRect">
             <a:avLst/>
@@ -6255,7 +6285,7 @@
           </a:solidFill>
           <a:ln w="19050">
             <a:solidFill>
-              <a:srgbClr val="E2E8F0"/>
+              <a:srgbClr val="CBD5E1"/>
             </a:solidFill>
           </a:ln>
         </p:spPr>
@@ -6289,8 +6319,8 @@
         </p:nvSpPr>
         <p:spPr>
           <a:xfrm>
-            <a:off x="6309360" y="1554480"/>
-            <a:ext cx="4937760" cy="4572000"/>
+            <a:off x="6309360" y="1508760"/>
+            <a:ext cx="4937760" cy="4754880"/>
           </a:xfrm>
           <a:prstGeom prst="rect">
             <a:avLst/>
@@ -6304,122 +6334,122 @@
           <a:lstStyle/>
           <a:p>
             <a:pPr>
-              <a:defRPr sz="1300" b="1">
+              <a:defRPr sz="1600" b="1">
                 <a:solidFill>
                   <a:srgbClr val="0EA5E9"/>
                 </a:solidFill>
               </a:defRPr>
             </a:pPr>
             <a:r>
-              <a:t>📦 9 MODULE NGHIỆP VỤ CỐT LÕI</a:t>
-            </a:r>
-          </a:p>
-          <a:p>
-            <a:pPr>
-              <a:defRPr sz="950">
+              <a:t>📦 9 MODULE CHỨC NĂNG CỐT LÕI</a:t>
+            </a:r>
+          </a:p>
+          <a:p>
+            <a:pPr>
+              <a:defRPr sz="1200">
                 <a:solidFill>
                   <a:srgbClr val="0F172A"/>
                 </a:solidFill>
               </a:defRPr>
             </a:pPr>
             <a:r>
-              <a:t>✔ 1. Dashboard KPI: Biểu đồ doanh thu, lịch hôm nay, cảnh báo kho</a:t>
-            </a:r>
-          </a:p>
-          <a:p>
-            <a:pPr>
-              <a:defRPr sz="950">
+              <a:t>• 1. Dashboard KPI: Biểu đồ doanh thu tức thời, lịch hẹn hôm nay, cảnh báo kho.</a:t>
+            </a:r>
+          </a:p>
+          <a:p>
+            <a:pPr>
+              <a:defRPr sz="1200">
                 <a:solidFill>
                   <a:srgbClr val="0F172A"/>
                 </a:solidFill>
               </a:defRPr>
             </a:pPr>
             <a:r>
-              <a:t>✔ 2. Đặt Lịch Spa 7 Bước: Quy trình wizard chọn khách, pet, dịch vụ, thợ</a:t>
-            </a:r>
-          </a:p>
-          <a:p>
-            <a:pPr>
-              <a:defRPr sz="950">
+              <a:t>• 2. Đặt Lịch Spa 7 Bước: Quy trình chọn khách, pet, dịch vụ, giờ hẹn, thợ và giá.</a:t>
+            </a:r>
+          </a:p>
+          <a:p>
+            <a:pPr>
+              <a:defRPr sz="1200">
                 <a:solidFill>
                   <a:srgbClr val="0F172A"/>
                 </a:solidFill>
               </a:defRPr>
             </a:pPr>
             <a:r>
-              <a:t>✔ 3. Bán Hàng &amp; POS: Quét mã, giỏ hàng, áp voucher, in hóa đơn nhiệt</a:t>
-            </a:r>
-          </a:p>
-          <a:p>
-            <a:pPr>
-              <a:defRPr sz="950">
+              <a:t>• 3. Bán Hàng &amp; POS: Tìm kiếm khách/SP, giỏ hàng, áp voucher, in hóa đơn nhiệt.</a:t>
+            </a:r>
+          </a:p>
+          <a:p>
+            <a:pPr>
+              <a:defRPr sz="1200">
                 <a:solidFill>
                   <a:srgbClr val="0F172A"/>
                 </a:solidFill>
               </a:defRPr>
             </a:pPr>
             <a:r>
-              <a:t>✔ 4. Quản Lý Khách Hàng: 4 Hạng thành viên (Đồng, Bạc, Vàng, Kim Cương)</a:t>
-            </a:r>
-          </a:p>
-          <a:p>
-            <a:pPr>
-              <a:defRPr sz="950">
+              <a:t>• 4. Khách Hàng: Hồ sơ thành viên với 4 hạng VIP (Đồng, Bạc, Vàng, Kim Cương).</a:t>
+            </a:r>
+          </a:p>
+          <a:p>
+            <a:pPr>
+              <a:defRPr sz="1200">
                 <a:solidFill>
                   <a:srgbClr val="0F172A"/>
                 </a:solidFill>
               </a:defRPr>
             </a:pPr>
             <a:r>
-              <a:t>✔ 5. Hồ Sơ Thú Cưng: Lịch sử dịch vụ, cân nặng, dị ứng, đổi Card/Table</a:t>
-            </a:r>
-          </a:p>
-          <a:p>
-            <a:pPr>
-              <a:defRPr sz="950">
+              <a:t>• 5. Thú Cưng: Lịch sử dịch vụ, cân nặng, ghi chú sức khỏe, đổi Card/Bảng.</a:t>
+            </a:r>
+          </a:p>
+          <a:p>
+            <a:pPr>
+              <a:defRPr sz="1200">
                 <a:solidFill>
                   <a:srgbClr val="0F172A"/>
                 </a:solidFill>
               </a:defRPr>
             </a:pPr>
             <a:r>
-              <a:t>✔ 6. Sản Phẩm &amp; Tồn Kho: Quản lý SKU, giá bán, cảnh báo hết hàng tự động</a:t>
-            </a:r>
-          </a:p>
-          <a:p>
-            <a:pPr>
-              <a:defRPr sz="950">
+              <a:t>• 6. Sản Phẩm &amp; Kho: Quản lý SKU, giá bán, cảnh báo hết hàng tự động khi kho = 0.</a:t>
+            </a:r>
+          </a:p>
+          <a:p>
+            <a:pPr>
+              <a:defRPr sz="1200">
                 <a:solidFill>
                   <a:srgbClr val="0F172A"/>
                 </a:solidFill>
               </a:defRPr>
             </a:pPr>
             <a:r>
-              <a:t>✔ 7. Bảng Giá Dịch Vụ: Đơn giá, thời lượng ca Spa, dịch vụ hoạt động</a:t>
-            </a:r>
-          </a:p>
-          <a:p>
-            <a:pPr>
-              <a:defRPr sz="950">
+              <a:t>• 7. Bảng Giá Dịch Vụ: Đơn giá, thời lượng ca Spa, phân loại Spa / Grooming / Y tế.</a:t>
+            </a:r>
+          </a:p>
+          <a:p>
+            <a:pPr>
+              <a:defRPr sz="1200">
                 <a:solidFill>
                   <a:srgbClr val="0F172A"/>
                 </a:solidFill>
               </a:defRPr>
             </a:pPr>
             <a:r>
-              <a:t>✔ 8. Nhân Sự &amp; Phân Ca: Quản lý kỹ thuật viên, ca trực Sáng / Chiều</a:t>
-            </a:r>
-          </a:p>
-          <a:p>
-            <a:pPr>
-              <a:defRPr sz="950">
+              <a:t>• 8. Nhân Sự &amp; Phân Ca: Quản lý thông tin kỹ thuật viên, phân ca trực Sáng / Chiều.</a:t>
+            </a:r>
+          </a:p>
+          <a:p>
+            <a:pPr>
+              <a:defRPr sz="1200">
                 <a:solidFill>
                   <a:srgbClr val="0F172A"/>
                 </a:solidFill>
               </a:defRPr>
             </a:pPr>
             <a:r>
-              <a:t>✔ 9. CRM &amp; Khuyến Mãi: Quét thú cưng &gt;30 ngày nhắc lịch Zalo/SMS, Voucher</a:t>
+              <a:t>• 9. CRM &amp; Khuyến Mãi: Tự động quét thú cưng &gt;30 ngày nhắc lịch Zalo/SMS, Voucher.</a:t>
             </a:r>
           </a:p>
         </p:txBody>
@@ -6457,12 +6487,10 @@
             <a:avLst/>
           </a:prstGeom>
           <a:solidFill>
-            <a:srgbClr val="F8FAFC"/>
+            <a:srgbClr val="F1F5F9"/>
           </a:solidFill>
           <a:ln>
-            <a:solidFill>
-              <a:srgbClr val="F8FAFC"/>
-            </a:solidFill>
+            <a:noFill/>
           </a:ln>
         </p:spPr>
         <p:style>
@@ -6495,7 +6523,7 @@
         </p:nvSpPr>
         <p:spPr>
           <a:xfrm>
-            <a:off x="731520" y="365760"/>
+            <a:off x="731520" y="320040"/>
             <a:ext cx="10698480" cy="320040"/>
           </a:xfrm>
           <a:prstGeom prst="rect">
@@ -6504,13 +6532,13 @@
           <a:noFill/>
         </p:spPr>
         <p:txBody>
-          <a:bodyPr wrap="square">
+          <a:bodyPr wrap="none">
             <a:spAutoFit/>
           </a:bodyPr>
           <a:lstStyle/>
           <a:p>
             <a:pPr>
-              <a:defRPr sz="1000" b="1">
+              <a:defRPr sz="1100" b="1">
                 <a:solidFill>
                   <a:srgbClr val="0EA5E9"/>
                 </a:solidFill>
@@ -6518,7 +6546,7 @@
               </a:defRPr>
             </a:pPr>
             <a:r>
-              <a:t>PHÂN TÍCH VÀ THIẾT KẾ KIỂM THỬ</a:t>
+              <a:t>MÔ HÌNH KIM TỰ THÁP KIỂM THỬ (TEST PYRAMID)</a:t>
             </a:r>
           </a:p>
         </p:txBody>
@@ -6531,8 +6559,8 @@
         </p:nvSpPr>
         <p:spPr>
           <a:xfrm>
-            <a:off x="731520" y="685800"/>
-            <a:ext cx="10698480" cy="548640"/>
+            <a:off x="731520" y="621792"/>
+            <a:ext cx="10698480" cy="594360"/>
           </a:xfrm>
           <a:prstGeom prst="rect">
             <a:avLst/>
@@ -6540,13 +6568,13 @@
           <a:noFill/>
         </p:spPr>
         <p:txBody>
-          <a:bodyPr wrap="square">
+          <a:bodyPr wrap="none">
             <a:spAutoFit/>
           </a:bodyPr>
           <a:lstStyle/>
           <a:p>
             <a:pPr>
-              <a:defRPr sz="2200" b="1">
+              <a:defRPr sz="2600" b="1">
                 <a:solidFill>
                   <a:srgbClr val="0F172A"/>
                 </a:solidFill>
@@ -6567,8 +6595,8 @@
         </p:nvSpPr>
         <p:spPr>
           <a:xfrm>
-            <a:off x="731520" y="1463040"/>
-            <a:ext cx="3383280" cy="3291840"/>
+            <a:off x="731520" y="1371600"/>
+            <a:ext cx="3383280" cy="3383280"/>
           </a:xfrm>
           <a:prstGeom prst="roundRect">
             <a:avLst/>
@@ -6612,8 +6640,8 @@
         </p:nvSpPr>
         <p:spPr>
           <a:xfrm>
-            <a:off x="914400" y="1645920"/>
-            <a:ext cx="3017520" cy="2926080"/>
+            <a:off x="914400" y="1508760"/>
+            <a:ext cx="3017520" cy="3108960"/>
           </a:xfrm>
           <a:prstGeom prst="rect">
             <a:avLst/>
@@ -6627,7 +6655,7 @@
           <a:lstStyle/>
           <a:p>
             <a:pPr>
-              <a:defRPr sz="3600" b="1">
+              <a:defRPr sz="4400" b="1">
                 <a:solidFill>
                   <a:srgbClr val="0EA5E9"/>
                 </a:solidFill>
@@ -6639,20 +6667,20 @@
           </a:p>
           <a:p>
             <a:pPr>
+              <a:defRPr sz="1500" b="1">
+                <a:solidFill>
+                  <a:srgbClr val="0F172A"/>
+                </a:solidFill>
+              </a:defRPr>
+            </a:pPr>
+            <a:r>
+              <a:t>UNIT TEST CASES</a:t>
+            </a:r>
+          </a:p>
+          <a:p>
+            <a:pPr>
               <a:defRPr sz="1200" b="1">
                 <a:solidFill>
-                  <a:srgbClr val="0F172A"/>
-                </a:solidFill>
-              </a:defRPr>
-            </a:pPr>
-            <a:r>
-              <a:t>UNIT TEST CASES</a:t>
-            </a:r>
-          </a:p>
-          <a:p>
-            <a:pPr>
-              <a:defRPr sz="1000" b="1">
-                <a:solidFill>
                   <a:srgbClr val="0EA5E9"/>
                 </a:solidFill>
               </a:defRPr>
@@ -6662,15 +6690,16 @@
             </a:r>
           </a:p>
           <a:p>
-            <a:pPr>
-              <a:defRPr sz="950">
-                <a:solidFill>
-                  <a:srgbClr val="475569"/>
-                </a:solidFill>
-              </a:defRPr>
-            </a:pPr>
-            <a:r>
-              <a:t>Kiểm thử cô lập các hàm logic, mô hình dữ liệu (Models), tính toán đơn hàng POS, thuật toán chặn kho âm và phân quyền RBAC.</a:t>
+            <a:br/>
+            <a:pPr>
+              <a:defRPr sz="1200">
+                <a:solidFill>
+                  <a:srgbClr val="334155"/>
+                </a:solidFill>
+              </a:defRPr>
+            </a:pPr>
+            <a:r>
+              <a:t>Kiểm thử độc lập các hàm xử lý logic, mô hình dữ liệu (Models), tính toán đơn hàng POS, thuật toán chặn kho âm và phân quyền RBAC.</a:t>
             </a:r>
           </a:p>
         </p:txBody>
@@ -6683,8 +6712,8 @@
         </p:nvSpPr>
         <p:spPr>
           <a:xfrm>
-            <a:off x="4389120" y="1463040"/>
-            <a:ext cx="3383280" cy="3291840"/>
+            <a:off x="4389120" y="1371600"/>
+            <a:ext cx="3383280" cy="3383280"/>
           </a:xfrm>
           <a:prstGeom prst="roundRect">
             <a:avLst/>
@@ -6728,8 +6757,8 @@
         </p:nvSpPr>
         <p:spPr>
           <a:xfrm>
-            <a:off x="4572000" y="1645920"/>
-            <a:ext cx="3017520" cy="2926080"/>
+            <a:off x="4572000" y="1508760"/>
+            <a:ext cx="3017520" cy="3108960"/>
           </a:xfrm>
           <a:prstGeom prst="rect">
             <a:avLst/>
@@ -6743,7 +6772,7 @@
           <a:lstStyle/>
           <a:p>
             <a:pPr>
-              <a:defRPr sz="3600" b="1">
+              <a:defRPr sz="4400" b="1">
                 <a:solidFill>
                   <a:srgbClr val="0D9488"/>
                 </a:solidFill>
@@ -6755,20 +6784,20 @@
           </a:p>
           <a:p>
             <a:pPr>
+              <a:defRPr sz="1500" b="1">
+                <a:solidFill>
+                  <a:srgbClr val="0F172A"/>
+                </a:solidFill>
+              </a:defRPr>
+            </a:pPr>
+            <a:r>
+              <a:t>INTEGRATION TESTS</a:t>
+            </a:r>
+          </a:p>
+          <a:p>
+            <a:pPr>
               <a:defRPr sz="1200" b="1">
                 <a:solidFill>
-                  <a:srgbClr val="0F172A"/>
-                </a:solidFill>
-              </a:defRPr>
-            </a:pPr>
-            <a:r>
-              <a:t>INTEGRATION TEST CASES</a:t>
-            </a:r>
-          </a:p>
-          <a:p>
-            <a:pPr>
-              <a:defRPr sz="1000" b="1">
-                <a:solidFill>
                   <a:srgbClr val="0D9488"/>
                 </a:solidFill>
               </a:defRPr>
@@ -6778,10 +6807,11 @@
             </a:r>
           </a:p>
           <a:p>
-            <a:pPr>
-              <a:defRPr sz="950">
-                <a:solidFill>
-                  <a:srgbClr val="475569"/>
+            <a:br/>
+            <a:pPr>
+              <a:defRPr sz="1200">
+                <a:solidFill>
+                  <a:srgbClr val="334155"/>
                 </a:solidFill>
               </a:defRPr>
             </a:pPr>
@@ -6799,8 +6829,8 @@
         </p:nvSpPr>
         <p:spPr>
           <a:xfrm>
-            <a:off x="8046720" y="1463040"/>
-            <a:ext cx="3383280" cy="3291840"/>
+            <a:off x="8046720" y="1371600"/>
+            <a:ext cx="3383280" cy="3383280"/>
           </a:xfrm>
           <a:prstGeom prst="roundRect">
             <a:avLst/>
@@ -6810,7 +6840,7 @@
           </a:solidFill>
           <a:ln w="19050">
             <a:solidFill>
-              <a:srgbClr val="F59E0B"/>
+              <a:srgbClr val="D97706"/>
             </a:solidFill>
           </a:ln>
         </p:spPr>
@@ -6844,8 +6874,8 @@
         </p:nvSpPr>
         <p:spPr>
           <a:xfrm>
-            <a:off x="8229600" y="1645920"/>
-            <a:ext cx="3017520" cy="2926080"/>
+            <a:off x="8229600" y="1508760"/>
+            <a:ext cx="3017520" cy="3108960"/>
           </a:xfrm>
           <a:prstGeom prst="rect">
             <a:avLst/>
@@ -6859,9 +6889,9 @@
           <a:lstStyle/>
           <a:p>
             <a:pPr>
-              <a:defRPr sz="3600" b="1">
-                <a:solidFill>
-                  <a:srgbClr val="F59E0B"/>
+              <a:defRPr sz="4400" b="1">
+                <a:solidFill>
+                  <a:srgbClr val="D97706"/>
                 </a:solidFill>
               </a:defRPr>
             </a:pPr>
@@ -6871,21 +6901,21 @@
           </a:p>
           <a:p>
             <a:pPr>
+              <a:defRPr sz="1500" b="1">
+                <a:solidFill>
+                  <a:srgbClr val="0F172A"/>
+                </a:solidFill>
+              </a:defRPr>
+            </a:pPr>
+            <a:r>
+              <a:t>SYSTEM TEST CASES</a:t>
+            </a:r>
+          </a:p>
+          <a:p>
+            <a:pPr>
               <a:defRPr sz="1200" b="1">
                 <a:solidFill>
-                  <a:srgbClr val="0F172A"/>
-                </a:solidFill>
-              </a:defRPr>
-            </a:pPr>
-            <a:r>
-              <a:t>SYSTEM TEST CASES</a:t>
-            </a:r>
-          </a:p>
-          <a:p>
-            <a:pPr>
-              <a:defRPr sz="1000" b="1">
-                <a:solidFill>
-                  <a:srgbClr val="F59E0B"/>
+                  <a:srgbClr val="D97706"/>
                 </a:solidFill>
               </a:defRPr>
             </a:pPr>
@@ -6894,10 +6924,11 @@
             </a:r>
           </a:p>
           <a:p>
-            <a:pPr>
-              <a:defRPr sz="950">
-                <a:solidFill>
-                  <a:srgbClr val="475569"/>
+            <a:br/>
+            <a:pPr>
+              <a:defRPr sz="1200">
+                <a:solidFill>
+                  <a:srgbClr val="334155"/>
                 </a:solidFill>
               </a:defRPr>
             </a:pPr>
@@ -6916,7 +6947,7 @@
         <p:spPr>
           <a:xfrm>
             <a:off x="731520" y="4937760"/>
-            <a:ext cx="10698480" cy="1371600"/>
+            <a:ext cx="10698480" cy="1463040"/>
           </a:xfrm>
           <a:prstGeom prst="roundRect">
             <a:avLst/>
@@ -6926,7 +6957,7 @@
           </a:solidFill>
           <a:ln w="19050">
             <a:solidFill>
-              <a:srgbClr val="E2E8F0"/>
+              <a:srgbClr val="CBD5E1"/>
             </a:solidFill>
           </a:ln>
         </p:spPr>
@@ -6961,7 +6992,7 @@
         <p:spPr>
           <a:xfrm>
             <a:off x="914400" y="5029200"/>
-            <a:ext cx="10332720" cy="1188720"/>
+            <a:ext cx="10332720" cy="1280160"/>
           </a:xfrm>
           <a:prstGeom prst="rect">
             <a:avLst/>
@@ -6969,40 +7000,40 @@
           <a:noFill/>
         </p:spPr>
         <p:txBody>
-          <a:bodyPr wrap="none">
+          <a:bodyPr wrap="square">
             <a:spAutoFit/>
           </a:bodyPr>
           <a:lstStyle/>
           <a:p>
             <a:pPr>
-              <a:defRPr sz="1100" b="1">
+              <a:defRPr sz="1300" b="1">
                 <a:solidFill>
                   <a:srgbClr val="0F172A"/>
                 </a:solidFill>
               </a:defRPr>
             </a:pPr>
             <a:r>
-              <a:t>🛠 KỸ THUẬT THIẾT KẾ KIỂM THỬ ÁP DỤNG (THEO CHUẨN QUỐC TẾ ISTQB)</a:t>
-            </a:r>
-          </a:p>
-          <a:p>
-            <a:pPr>
-              <a:defRPr sz="950">
-                <a:solidFill>
-                  <a:srgbClr val="475569"/>
-                </a:solidFill>
-              </a:defRPr>
-            </a:pPr>
-            <a:r>
-              <a:t>• Phân vùng tương đương (Equivalence Partitioning): Chia tập dữ liệu hợp lệ và không hợp lệ cho email, mật khẩu, tồn kho.</a:t>
+              <a:t>🛠 KỸ THUẬT THIẾT KẾ KIỂM THỬ ÁP DỤNG (CHUẨN QUỐC TẾ ISTQB)</a:t>
+            </a:r>
+          </a:p>
+          <a:p>
+            <a:pPr>
+              <a:defRPr sz="1200">
+                <a:solidFill>
+                  <a:srgbClr val="334155"/>
+                </a:solidFill>
+              </a:defRPr>
+            </a:pPr>
+            <a:r>
+              <a:t>• Phân vùng tương đương (EP): Phân chia tập dữ liệu hợp lệ và không hợp lệ (Email, mật khẩu, tồn kho, giá bán).</a:t>
             </a:r>
             <a:br/>
             <a:r>
-              <a:t>• Phân tích giá trị biên (Boundary Value Analysis): Bắt biên tồn kho = 0, mức giảm giá voucher = tạm tính, giảm giá vượt quá tạm tính.</a:t>
+              <a:t>• Phân tích giá trị biên (BVA): Kiểm thử tại các biên tồn kho = 0, voucher = tạm tính, voucher vượt quá tạm tính.</a:t>
             </a:r>
             <a:br/>
             <a:r>
-              <a:t>• Bao phủ nhánh (Branch Coverage) &amp; Bảng quyết định (Decision Table): Đảm bảo 100% các nhánh rẽ điều kiện if/else đều được kiểm chứng.</a:t>
+              <a:t>• Bao phủ nhánh (Branch Coverage) &amp; Bảng quyết định: Đảm bảo 100% nhánh rẽ if/else trong logic được thực thi an toàn.</a:t>
             </a:r>
           </a:p>
         </p:txBody>
@@ -7040,12 +7071,10 @@
             <a:avLst/>
           </a:prstGeom>
           <a:solidFill>
-            <a:srgbClr val="F8FAFC"/>
+            <a:srgbClr val="F1F5F9"/>
           </a:solidFill>
           <a:ln>
-            <a:solidFill>
-              <a:srgbClr val="F8FAFC"/>
-            </a:solidFill>
+            <a:noFill/>
           </a:ln>
         </p:spPr>
         <p:style>
@@ -7078,7 +7107,7 @@
         </p:nvSpPr>
         <p:spPr>
           <a:xfrm>
-            <a:off x="731520" y="365760"/>
+            <a:off x="731520" y="320040"/>
             <a:ext cx="10698480" cy="320040"/>
           </a:xfrm>
           <a:prstGeom prst="rect">
@@ -7087,13 +7116,13 @@
           <a:noFill/>
         </p:spPr>
         <p:txBody>
-          <a:bodyPr wrap="square">
+          <a:bodyPr wrap="none">
             <a:spAutoFit/>
           </a:bodyPr>
           <a:lstStyle/>
           <a:p>
             <a:pPr>
-              <a:defRPr sz="1000" b="1">
+              <a:defRPr sz="1100" b="1">
                 <a:solidFill>
                   <a:srgbClr val="0EA5E9"/>
                 </a:solidFill>
@@ -7114,8 +7143,8 @@
         </p:nvSpPr>
         <p:spPr>
           <a:xfrm>
-            <a:off x="731520" y="685800"/>
-            <a:ext cx="10698480" cy="548640"/>
+            <a:off x="731520" y="621792"/>
+            <a:ext cx="10698480" cy="594360"/>
           </a:xfrm>
           <a:prstGeom prst="rect">
             <a:avLst/>
@@ -7123,13 +7152,13 @@
           <a:noFill/>
         </p:spPr>
         <p:txBody>
-          <a:bodyPr wrap="square">
+          <a:bodyPr wrap="none">
             <a:spAutoFit/>
           </a:bodyPr>
           <a:lstStyle/>
           <a:p>
             <a:pPr>
-              <a:defRPr sz="2200" b="1">
+              <a:defRPr sz="2600" b="1">
                 <a:solidFill>
                   <a:srgbClr val="0F172A"/>
                 </a:solidFill>
@@ -7151,7 +7180,7 @@
         <p:spPr>
           <a:xfrm>
             <a:off x="731520" y="1371600"/>
-            <a:ext cx="5120640" cy="4937760"/>
+            <a:ext cx="5120640" cy="5029200"/>
           </a:xfrm>
           <a:prstGeom prst="roundRect">
             <a:avLst/>
@@ -7161,7 +7190,7 @@
           </a:solidFill>
           <a:ln w="19050">
             <a:solidFill>
-              <a:srgbClr val="E2E8F0"/>
+              <a:srgbClr val="CBD5E1"/>
             </a:solidFill>
           </a:ln>
         </p:spPr>
@@ -7195,8 +7224,8 @@
         </p:nvSpPr>
         <p:spPr>
           <a:xfrm>
-            <a:off x="914400" y="1554480"/>
-            <a:ext cx="4754880" cy="4572000"/>
+            <a:off x="914400" y="1508760"/>
+            <a:ext cx="4754880" cy="4754880"/>
           </a:xfrm>
           <a:prstGeom prst="rect">
             <a:avLst/>
@@ -7210,7 +7239,7 @@
           <a:lstStyle/>
           <a:p>
             <a:pPr>
-              <a:defRPr sz="1200" b="1">
+              <a:defRPr sz="1600" b="1">
                 <a:solidFill>
                   <a:srgbClr val="0EA5E9"/>
                 </a:solidFill>
@@ -7222,86 +7251,86 @@
           </a:p>
           <a:p>
             <a:pPr>
-              <a:defRPr sz="950">
+              <a:defRPr sz="1200">
                 <a:solidFill>
                   <a:srgbClr val="0F172A"/>
                 </a:solidFill>
               </a:defRPr>
             </a:pPr>
             <a:r>
-              <a:t>• Auth Service (10 TC): login, logout, switchRole, validate regex, session</a:t>
-            </a:r>
-          </a:p>
-          <a:p>
-            <a:pPr>
-              <a:defRPr sz="950">
+              <a:t>• Auth Service (10 TC): login, logout, switchRole, validate email regex, session null safety</a:t>
+            </a:r>
+          </a:p>
+          <a:p>
+            <a:pPr>
+              <a:defRPr sz="1200">
                 <a:solidFill>
                   <a:srgbClr val="0F172A"/>
                 </a:solidFill>
               </a:defRPr>
             </a:pPr>
             <a:r>
-              <a:t>• Customer Store (12 TC): add, update, delete, sinh mã KH-xxxx, lọc 4 hạng VIP</a:t>
-            </a:r>
-          </a:p>
-          <a:p>
-            <a:pPr>
-              <a:defRPr sz="950">
+              <a:t>• Customer Store (12 TC): add, update, delete, sinh mã KH-xxxx, fallback email, lọc 4 hạng VIP</a:t>
+            </a:r>
+          </a:p>
+          <a:p>
+            <a:pPr>
+              <a:defRPr sz="1200">
                 <a:solidFill>
                   <a:srgbClr val="0F172A"/>
                 </a:solidFill>
               </a:defRPr>
             </a:pPr>
             <a:r>
-              <a:t>• Pet Store (8 TC): add, update cân nặng, ghi chú dị ứng, groomingCount</a:t>
-            </a:r>
-          </a:p>
-          <a:p>
-            <a:pPr>
-              <a:defRPr sz="950">
+              <a:t>• Pet Store (8 TC): add, update cân nặng, ghi chú dị ứng, lọc theo chủ, tăng groomingCount</a:t>
+            </a:r>
+          </a:p>
+          <a:p>
+            <a:pPr>
+              <a:defRPr sz="1200">
                 <a:solidFill>
                   <a:srgbClr val="0F172A"/>
                 </a:solidFill>
               </a:defRPr>
             </a:pPr>
             <a:r>
-              <a:t>• Product Store (10 TC): add, sinh SKU-PET, update tồn kho, adjustStock</a:t>
-            </a:r>
-          </a:p>
-          <a:p>
-            <a:pPr>
-              <a:defRPr sz="950">
+              <a:t>• Product Store (10 TC): add, sinh SKU-PET, update tồn kho, adjustStock, chặn kho âm</a:t>
+            </a:r>
+          </a:p>
+          <a:p>
+            <a:pPr>
+              <a:defRPr sz="1200">
                 <a:solidFill>
                   <a:srgbClr val="0F172A"/>
                 </a:solidFill>
               </a:defRPr>
             </a:pPr>
             <a:r>
-              <a:t>• Service Store (6 TC): add, update giá, đổi trạng thái active, xóa dịch vụ</a:t>
-            </a:r>
-          </a:p>
-          <a:p>
-            <a:pPr>
-              <a:defRPr sz="950">
+              <a:t>• Service Store (6 TC): add, update giá, đổi active/inactive, xóa dịch vụ, lọc danh mục</a:t>
+            </a:r>
+          </a:p>
+          <a:p>
+            <a:pPr>
+              <a:defRPr sz="1200">
                 <a:solidFill>
                   <a:srgbClr val="0F172A"/>
                 </a:solidFill>
               </a:defRPr>
             </a:pPr>
             <a:r>
-              <a:t>• POS &amp; Orders (16 TC): calculateSubtotal, calculateTotal, giỏ hàng +/-, order status</a:t>
-            </a:r>
-          </a:p>
-          <a:p>
-            <a:pPr>
-              <a:defRPr sz="950">
+              <a:t>• POS &amp; Orders (16 TC): calculateSubtotal, calculateTotal, tăng/giảm giỏ hàng, order status</a:t>
+            </a:r>
+          </a:p>
+          <a:p>
+            <a:pPr>
+              <a:defRPr sz="1200">
                 <a:solidFill>
                   <a:srgbClr val="0F172A"/>
                 </a:solidFill>
               </a:defRPr>
             </a:pPr>
             <a:r>
-              <a:t>• Appointment Store (8 TC): add, sinh mã LH-xxxx, đổi trạng thái, phân công thợ</a:t>
+              <a:t>• Appointment Store (8 TC): add, sinh mã LH-xxxx, đổi trạng thái, phân công thợ Spa, đổi giờ</a:t>
             </a:r>
           </a:p>
         </p:txBody>
@@ -7315,7 +7344,7 @@
         <p:spPr>
           <a:xfrm>
             <a:off x="6126480" y="1371600"/>
-            <a:ext cx="5303520" cy="4937760"/>
+            <a:ext cx="5303520" cy="5029200"/>
           </a:xfrm>
           <a:prstGeom prst="roundRect">
             <a:avLst/>
@@ -7325,7 +7354,7 @@
           </a:solidFill>
           <a:ln w="19050">
             <a:solidFill>
-              <a:srgbClr val="E2E8F0"/>
+              <a:srgbClr val="CBD5E1"/>
             </a:solidFill>
           </a:ln>
         </p:spPr>
@@ -7359,8 +7388,8 @@
         </p:nvSpPr>
         <p:spPr>
           <a:xfrm>
-            <a:off x="6309360" y="1554480"/>
-            <a:ext cx="4937760" cy="4572000"/>
+            <a:off x="6309360" y="1508760"/>
+            <a:ext cx="4937760" cy="4754880"/>
           </a:xfrm>
           <a:prstGeom prst="rect">
             <a:avLst/>
@@ -7374,19 +7403,20 @@
           <a:lstStyle/>
           <a:p>
             <a:pPr>
-              <a:defRPr sz="1200" b="1">
+              <a:defRPr sz="1600" b="1">
                 <a:solidFill>
                   <a:srgbClr val="0D9488"/>
                 </a:solidFill>
               </a:defRPr>
             </a:pPr>
             <a:r>
-              <a:t>💡 KỊCH BẢN KIỂM THỬ ĐẶC TRƯNG &amp; ASSERTIONS</a:t>
-            </a:r>
-          </a:p>
-          <a:p>
-            <a:pPr>
-              <a:defRPr b="1" sz="1000">
+              <a:t>💡 CÁC CA KIỂM THỬ LOGIC TIÊU BIỂU</a:t>
+            </a:r>
+          </a:p>
+          <a:p>
+            <a:br/>
+            <a:pPr>
+              <a:defRPr b="1" sz="1300">
                 <a:solidFill>
                   <a:srgbClr val="0F172A"/>
                 </a:solidFill>
@@ -7398,9 +7428,9 @@
           </a:p>
           <a:p>
             <a:pPr>
-              <a:defRPr sz="900">
-                <a:solidFill>
-                  <a:srgbClr val="475569"/>
+              <a:defRPr sz="1150">
+                <a:solidFill>
+                  <a:srgbClr val="334155"/>
                 </a:solidFill>
               </a:defRPr>
             </a:pPr>
@@ -7413,12 +7443,13 @@
             </a:r>
             <a:br/>
             <a:r>
-              <a:t>-&gt; Actual: Stock = 0, trạng thái an toàn.</a:t>
-            </a:r>
-          </a:p>
-          <a:p>
-            <a:pPr>
-              <a:defRPr b="1" sz="1000">
+              <a:t>-&gt; Actual: Stock = 0, hệ thống xử lý an toàn tuyệt đối.</a:t>
+            </a:r>
+          </a:p>
+          <a:p>
+            <a:br/>
+            <a:pPr>
+              <a:defRPr b="1" sz="1300">
                 <a:solidFill>
                   <a:srgbClr val="0F172A"/>
                 </a:solidFill>
@@ -7430,14 +7461,14 @@
           </a:p>
           <a:p>
             <a:pPr>
-              <a:defRPr sz="900">
-                <a:solidFill>
-                  <a:srgbClr val="475569"/>
-                </a:solidFill>
-              </a:defRPr>
-            </a:pPr>
-            <a:r>
-              <a:t>Input: subtotal = 100k, voucher = 150k</a:t>
+              <a:defRPr sz="1150">
+                <a:solidFill>
+                  <a:srgbClr val="334155"/>
+                </a:solidFill>
+              </a:defRPr>
+            </a:pPr>
+            <a:r>
+              <a:t>Input: subtotal = 100.000đ, voucher = 150.000đ</a:t>
             </a:r>
             <a:br/>
             <a:r>
@@ -7445,12 +7476,13 @@
             </a:r>
             <a:br/>
             <a:r>
-              <a:t>-&gt; Actual: Tổng tiền = 0 VNĐ, không phát sinh số âm.</a:t>
-            </a:r>
-          </a:p>
-          <a:p>
-            <a:pPr>
-              <a:defRPr b="1" sz="1000">
+              <a:t>-&gt; Actual: Tổng tiền = 0 VNĐ, không phát sinh số tiền âm.</a:t>
+            </a:r>
+          </a:p>
+          <a:p>
+            <a:br/>
+            <a:pPr>
+              <a:defRPr b="1" sz="1300">
                 <a:solidFill>
                   <a:srgbClr val="0F172A"/>
                 </a:solidFill>
@@ -7462,22 +7494,22 @@
           </a:p>
           <a:p>
             <a:pPr>
-              <a:defRPr sz="900">
-                <a:solidFill>
-                  <a:srgbClr val="475569"/>
-                </a:solidFill>
-              </a:defRPr>
-            </a:pPr>
-            <a:r>
-              <a:t>Input: email = khach@gmail.com, role = 'customer'</a:t>
+              <a:defRPr sz="1150">
+                <a:solidFill>
+                  <a:srgbClr val="334155"/>
+                </a:solidFill>
+              </a:defRPr>
+            </a:pPr>
+            <a:r>
+              <a:t>Input: email = 'khach@gmail.com', role = 'customer'</a:t>
             </a:r>
             <a:br/>
             <a:r>
-              <a:t>-&gt; Expected: success = false, ném cảnh báo phân quyền.</a:t>
+              <a:t>-&gt; Expected: success = false, hiển thị thông báo lỗi phân quyền.</a:t>
             </a:r>
             <a:br/>
             <a:r>
-              <a:t>-&gt; Actual: Chặn truy cập và bảo vệ session.</a:t>
+              <a:t>-&gt; Actual: Chặn truy cập và bảo vệ cổng quản trị nội bộ.</a:t>
             </a:r>
           </a:p>
         </p:txBody>
@@ -7515,12 +7547,10 @@
             <a:avLst/>
           </a:prstGeom>
           <a:solidFill>
-            <a:srgbClr val="F8FAFC"/>
+            <a:srgbClr val="F1F5F9"/>
           </a:solidFill>
           <a:ln>
-            <a:solidFill>
-              <a:srgbClr val="F8FAFC"/>
-            </a:solidFill>
+            <a:noFill/>
           </a:ln>
         </p:spPr>
         <p:style>
@@ -7553,7 +7583,7 @@
         </p:nvSpPr>
         <p:spPr>
           <a:xfrm>
-            <a:off x="731520" y="365760"/>
+            <a:off x="731520" y="320040"/>
             <a:ext cx="10698480" cy="320040"/>
           </a:xfrm>
           <a:prstGeom prst="rect">
@@ -7562,13 +7592,13 @@
           <a:noFill/>
         </p:spPr>
         <p:txBody>
-          <a:bodyPr wrap="square">
+          <a:bodyPr wrap="none">
             <a:spAutoFit/>
           </a:bodyPr>
           <a:lstStyle/>
           <a:p>
             <a:pPr>
-              <a:defRPr sz="1000" b="1">
+              <a:defRPr sz="1100" b="1">
                 <a:solidFill>
                   <a:srgbClr val="0EA5E9"/>
                 </a:solidFill>
@@ -7589,8 +7619,8 @@
         </p:nvSpPr>
         <p:spPr>
           <a:xfrm>
-            <a:off x="731520" y="685800"/>
-            <a:ext cx="10698480" cy="548640"/>
+            <a:off x="731520" y="621792"/>
+            <a:ext cx="10698480" cy="594360"/>
           </a:xfrm>
           <a:prstGeom prst="rect">
             <a:avLst/>
@@ -7598,13 +7628,13 @@
           <a:noFill/>
         </p:spPr>
         <p:txBody>
-          <a:bodyPr wrap="square">
+          <a:bodyPr wrap="none">
             <a:spAutoFit/>
           </a:bodyPr>
           <a:lstStyle/>
           <a:p>
             <a:pPr>
-              <a:defRPr sz="2200" b="1">
+              <a:defRPr sz="2600" b="1">
                 <a:solidFill>
                   <a:srgbClr val="0F172A"/>
                 </a:solidFill>
@@ -7626,7 +7656,7 @@
         <p:spPr>
           <a:xfrm>
             <a:off x="731520" y="1371600"/>
-            <a:ext cx="3383280" cy="4937760"/>
+            <a:ext cx="3383280" cy="5029200"/>
           </a:xfrm>
           <a:prstGeom prst="roundRect">
             <a:avLst/>
@@ -7670,8 +7700,8 @@
         </p:nvSpPr>
         <p:spPr>
           <a:xfrm>
-            <a:off x="914400" y="1554480"/>
-            <a:ext cx="3017520" cy="4572000"/>
+            <a:off x="914400" y="1508760"/>
+            <a:ext cx="3017520" cy="4754880"/>
           </a:xfrm>
           <a:prstGeom prst="rect">
             <a:avLst/>
@@ -7685,19 +7715,19 @@
           <a:lstStyle/>
           <a:p>
             <a:pPr>
-              <a:defRPr sz="1100" b="1">
+              <a:defRPr sz="1400" b="1">
                 <a:solidFill>
                   <a:srgbClr val="0EA5E9"/>
                 </a:solidFill>
               </a:defRPr>
             </a:pPr>
             <a:r>
-              <a:t>TÍCH HỢP STATE &amp; GIAO DIỆN (UI)</a:t>
-            </a:r>
-          </a:p>
-          <a:p>
-            <a:pPr>
-              <a:defRPr sz="1000" b="1">
+              <a:t>TÍCH HỢP STATE &amp; GIAO DIỆN</a:t>
+            </a:r>
+          </a:p>
+          <a:p>
+            <a:pPr>
+              <a:defRPr sz="1200" b="1">
                 <a:solidFill>
                   <a:srgbClr val="0F172A"/>
                 </a:solidFill>
@@ -7708,51 +7738,55 @@
             </a:r>
           </a:p>
           <a:p>
-            <a:pPr>
-              <a:defRPr sz="950">
-                <a:solidFill>
-                  <a:srgbClr val="475569"/>
-                </a:solidFill>
-              </a:defRPr>
-            </a:pPr>
-            <a:r>
-              <a:t>• Auth ⟷ Router Guard ⟷ Menu Sidebar (Ẩn hiện theo Role)</a:t>
-            </a:r>
-          </a:p>
-          <a:p>
-            <a:pPr>
-              <a:defRPr sz="950">
-                <a:solidFill>
-                  <a:srgbClr val="475569"/>
-                </a:solidFill>
-              </a:defRPr>
-            </a:pPr>
-            <a:r>
-              <a:t>• Đặt lịch Spa ⟷ Thợ phụ trách ⟷ Lịch làm việc Calendar</a:t>
-            </a:r>
-          </a:p>
-          <a:p>
-            <a:pPr>
-              <a:defRPr sz="950">
-                <a:solidFill>
-                  <a:srgbClr val="475569"/>
-                </a:solidFill>
-              </a:defRPr>
-            </a:pPr>
-            <a:r>
-              <a:t>• Hoàn thành ca Spa ⟷ Cập nhật lịch sử thú cưng (+1)</a:t>
-            </a:r>
-          </a:p>
-          <a:p>
-            <a:pPr>
-              <a:defRPr sz="950">
-                <a:solidFill>
-                  <a:srgbClr val="475569"/>
-                </a:solidFill>
-              </a:defRPr>
-            </a:pPr>
-            <a:r>
-              <a:t>• Đổi trạng thái lịch hẹn ⟷ Badge đổi màu tức thì</a:t>
+            <a:br/>
+            <a:pPr>
+              <a:defRPr sz="1200">
+                <a:solidFill>
+                  <a:srgbClr val="334155"/>
+                </a:solidFill>
+              </a:defRPr>
+            </a:pPr>
+            <a:r>
+              <a:t>• Auth ⟷ Router Guard ⟷ Menu Sidebar (Ẩn hiện theo quyền Staff/Admin).</a:t>
+            </a:r>
+          </a:p>
+          <a:p>
+            <a:br/>
+            <a:pPr>
+              <a:defRPr sz="1200">
+                <a:solidFill>
+                  <a:srgbClr val="334155"/>
+                </a:solidFill>
+              </a:defRPr>
+            </a:pPr>
+            <a:r>
+              <a:t>• Form đặt lịch Spa 7 bước ⟷ Thợ phụ trách ⟷ Lịch làm việc Calendar.</a:t>
+            </a:r>
+          </a:p>
+          <a:p>
+            <a:br/>
+            <a:pPr>
+              <a:defRPr sz="1200">
+                <a:solidFill>
+                  <a:srgbClr val="334155"/>
+                </a:solidFill>
+              </a:defRPr>
+            </a:pPr>
+            <a:r>
+              <a:t>• Hoàn thành ca Spa ⟷ Cập nhật lịch sử làm đẹp thú cưng (+1).</a:t>
+            </a:r>
+          </a:p>
+          <a:p>
+            <a:br/>
+            <a:pPr>
+              <a:defRPr sz="1200">
+                <a:solidFill>
+                  <a:srgbClr val="334155"/>
+                </a:solidFill>
+              </a:defRPr>
+            </a:pPr>
+            <a:r>
+              <a:t>• Đổi trạng thái lịch hẹn ⟷ Badge UI đổi màu đồng bộ tức thì.</a:t>
             </a:r>
           </a:p>
         </p:txBody>
@@ -7766,7 +7800,7 @@
         <p:spPr>
           <a:xfrm>
             <a:off x="4389120" y="1371600"/>
-            <a:ext cx="3383280" cy="4937760"/>
+            <a:ext cx="3383280" cy="5029200"/>
           </a:xfrm>
           <a:prstGeom prst="roundRect">
             <a:avLst/>
@@ -7810,8 +7844,8 @@
         </p:nvSpPr>
         <p:spPr>
           <a:xfrm>
-            <a:off x="4572000" y="1554480"/>
-            <a:ext cx="3017520" cy="4572000"/>
+            <a:off x="4572000" y="1508760"/>
+            <a:ext cx="3017520" cy="4754880"/>
           </a:xfrm>
           <a:prstGeom prst="rect">
             <a:avLst/>
@@ -7825,19 +7859,19 @@
           <a:lstStyle/>
           <a:p>
             <a:pPr>
-              <a:defRPr sz="1100" b="1">
+              <a:defRPr sz="1400" b="1">
                 <a:solidFill>
                   <a:srgbClr val="0D9488"/>
                 </a:solidFill>
               </a:defRPr>
             </a:pPr>
             <a:r>
-              <a:t>TÍCH HỢP POS &amp; KHO &amp; IN HÓA ĐƠN</a:t>
-            </a:r>
-          </a:p>
-          <a:p>
-            <a:pPr>
-              <a:defRPr sz="1000" b="1">
+              <a:t>TÍCH HỢP POS &amp; KHO &amp; IN ẤN</a:t>
+            </a:r>
+          </a:p>
+          <a:p>
+            <a:pPr>
+              <a:defRPr sz="1200" b="1">
                 <a:solidFill>
                   <a:srgbClr val="0F172A"/>
                 </a:solidFill>
@@ -7848,51 +7882,55 @@
             </a:r>
           </a:p>
           <a:p>
-            <a:pPr>
-              <a:defRPr sz="950">
-                <a:solidFill>
-                  <a:srgbClr val="475569"/>
-                </a:solidFill>
-              </a:defRPr>
-            </a:pPr>
-            <a:r>
-              <a:t>• Bán hàng POS ⟷ Tự động trừ số lượng tồn kho tức thời</a:t>
-            </a:r>
-          </a:p>
-          <a:p>
-            <a:pPr>
-              <a:defRPr sz="950">
-                <a:solidFill>
-                  <a:srgbClr val="475569"/>
-                </a:solidFill>
-              </a:defRPr>
-            </a:pPr>
-            <a:r>
-              <a:t>• Kho về 0 ⟷ Chặn nút '+ Thêm vào giỏ' tại quầy POS</a:t>
-            </a:r>
-          </a:p>
-          <a:p>
-            <a:pPr>
-              <a:defRPr sz="950">
-                <a:solidFill>
-                  <a:srgbClr val="475569"/>
-                </a:solidFill>
-              </a:defRPr>
-            </a:pPr>
-            <a:r>
-              <a:t>• Nhập mã Voucher ⟷ Tính lại chiết khấu &amp; Tổng tiền</a:t>
-            </a:r>
-          </a:p>
-          <a:p>
-            <a:pPr>
-              <a:defRPr sz="950">
-                <a:solidFill>
-                  <a:srgbClr val="475569"/>
-                </a:solidFill>
-              </a:defRPr>
-            </a:pPr>
-            <a:r>
-              <a:t>• Hoàn tất đơn hàng ⟷ Kích hoạt lệnh in nhiệt window.print()</a:t>
+            <a:br/>
+            <a:pPr>
+              <a:defRPr sz="1200">
+                <a:solidFill>
+                  <a:srgbClr val="334155"/>
+                </a:solidFill>
+              </a:defRPr>
+            </a:pPr>
+            <a:r>
+              <a:t>• Tạo đơn hàng POS ⟷ Tự động trừ số lượng tồn kho tức thời.</a:t>
+            </a:r>
+          </a:p>
+          <a:p>
+            <a:br/>
+            <a:pPr>
+              <a:defRPr sz="1200">
+                <a:solidFill>
+                  <a:srgbClr val="334155"/>
+                </a:solidFill>
+              </a:defRPr>
+            </a:pPr>
+            <a:r>
+              <a:t>• Kho về 0 ⟷ Chặn nút '+ Thêm vào giỏ' tại quầy bán hàng POS.</a:t>
+            </a:r>
+          </a:p>
+          <a:p>
+            <a:br/>
+            <a:pPr>
+              <a:defRPr sz="1200">
+                <a:solidFill>
+                  <a:srgbClr val="334155"/>
+                </a:solidFill>
+              </a:defRPr>
+            </a:pPr>
+            <a:r>
+              <a:t>• Áp dụng Voucher ⟷ Tính lại chiết khấu &amp; Tổng tiền thanh toán.</a:t>
+            </a:r>
+          </a:p>
+          <a:p>
+            <a:br/>
+            <a:pPr>
+              <a:defRPr sz="1200">
+                <a:solidFill>
+                  <a:srgbClr val="334155"/>
+                </a:solidFill>
+              </a:defRPr>
+            </a:pPr>
+            <a:r>
+              <a:t>• Xuất hóa đơn ⟷ Kích hoạt lệnh in nhiệt khổ chuẩn window.print().</a:t>
             </a:r>
           </a:p>
         </p:txBody>
@@ -7906,7 +7944,7 @@
         <p:spPr>
           <a:xfrm>
             <a:off x="8046720" y="1371600"/>
-            <a:ext cx="3383280" cy="4937760"/>
+            <a:ext cx="3383280" cy="5029200"/>
           </a:xfrm>
           <a:prstGeom prst="roundRect">
             <a:avLst/>
@@ -7916,7 +7954,7 @@
           </a:solidFill>
           <a:ln w="19050">
             <a:solidFill>
-              <a:srgbClr val="F59E0B"/>
+              <a:srgbClr val="D97706"/>
             </a:solidFill>
           </a:ln>
         </p:spPr>
@@ -7950,8 +7988,8 @@
         </p:nvSpPr>
         <p:spPr>
           <a:xfrm>
-            <a:off x="8229600" y="1554480"/>
-            <a:ext cx="3017520" cy="4572000"/>
+            <a:off x="8229600" y="1508760"/>
+            <a:ext cx="3017520" cy="4754880"/>
           </a:xfrm>
           <a:prstGeom prst="rect">
             <a:avLst/>
@@ -7965,19 +8003,19 @@
           <a:lstStyle/>
           <a:p>
             <a:pPr>
-              <a:defRPr sz="1100" b="1">
-                <a:solidFill>
-                  <a:srgbClr val="F59E0B"/>
-                </a:solidFill>
-              </a:defRPr>
-            </a:pPr>
-            <a:r>
-              <a:t>TÍCH HỢP CLIENT ⟷ REST API BACKEND</a:t>
-            </a:r>
-          </a:p>
-          <a:p>
-            <a:pPr>
-              <a:defRPr sz="1000" b="1">
+              <a:defRPr sz="1400" b="1">
+                <a:solidFill>
+                  <a:srgbClr val="D97706"/>
+                </a:solidFill>
+              </a:defRPr>
+            </a:pPr>
+            <a:r>
+              <a:t>TÍCH HỢP CLIENT ⟷ REST API</a:t>
+            </a:r>
+          </a:p>
+          <a:p>
+            <a:pPr>
+              <a:defRPr sz="1200" b="1">
                 <a:solidFill>
                   <a:srgbClr val="0F172A"/>
                 </a:solidFill>
@@ -7988,51 +8026,55 @@
             </a:r>
           </a:p>
           <a:p>
-            <a:pPr>
-              <a:defRPr sz="950">
-                <a:solidFill>
-                  <a:srgbClr val="475569"/>
-                </a:solidFill>
-              </a:defRPr>
-            </a:pPr>
-            <a:r>
-              <a:t>• Frontend ⟷ GET /api/products (Trả về 200 OK &amp; JSON)</a:t>
-            </a:r>
-          </a:p>
-          <a:p>
-            <a:pPr>
-              <a:defRPr sz="950">
-                <a:solidFill>
-                  <a:srgbClr val="475569"/>
-                </a:solidFill>
-              </a:defRPr>
-            </a:pPr>
-            <a:r>
-              <a:t>• Frontend ⟷ POST /api/orders (Tạo đơn hàng trả về 201)</a:t>
-            </a:r>
-          </a:p>
-          <a:p>
-            <a:pPr>
-              <a:defRPr sz="950">
-                <a:solidFill>
-                  <a:srgbClr val="475569"/>
-                </a:solidFill>
-              </a:defRPr>
-            </a:pPr>
-            <a:r>
-              <a:t>• Frontend ⟷ GET /api/dashboard/stats (Đồng bộ số liệu KPI)</a:t>
-            </a:r>
-          </a:p>
-          <a:p>
-            <a:pPr>
-              <a:defRPr sz="950">
-                <a:solidFill>
-                  <a:srgbClr val="475569"/>
-                </a:solidFill>
-              </a:defRPr>
-            </a:pPr>
-            <a:r>
-              <a:t>• Backend Express ⟷ Swagger UI API Documentation</a:t>
+            <a:br/>
+            <a:pPr>
+              <a:defRPr sz="1200">
+                <a:solidFill>
+                  <a:srgbClr val="334155"/>
+                </a:solidFill>
+              </a:defRPr>
+            </a:pPr>
+            <a:r>
+              <a:t>• Frontend ⟷ GET /api/products (HTTP 200 OK &amp; JSON sản phẩm).</a:t>
+            </a:r>
+          </a:p>
+          <a:p>
+            <a:br/>
+            <a:pPr>
+              <a:defRPr sz="1200">
+                <a:solidFill>
+                  <a:srgbClr val="334155"/>
+                </a:solidFill>
+              </a:defRPr>
+            </a:pPr>
+            <a:r>
+              <a:t>• Frontend ⟷ POST /api/orders (Tạo đơn hàng trả về HTTP 201).</a:t>
+            </a:r>
+          </a:p>
+          <a:p>
+            <a:br/>
+            <a:pPr>
+              <a:defRPr sz="1200">
+                <a:solidFill>
+                  <a:srgbClr val="334155"/>
+                </a:solidFill>
+              </a:defRPr>
+            </a:pPr>
+            <a:r>
+              <a:t>• Frontend ⟷ GET /api/dashboard/stats (Đồng bộ số liệu doanh thu KPI).</a:t>
+            </a:r>
+          </a:p>
+          <a:p>
+            <a:br/>
+            <a:pPr>
+              <a:defRPr sz="1200">
+                <a:solidFill>
+                  <a:srgbClr val="334155"/>
+                </a:solidFill>
+              </a:defRPr>
+            </a:pPr>
+            <a:r>
+              <a:t>• Backend Express ⟷ Swagger UI tài liệu hóa API chuẩn OpenApi 3.0.</a:t>
             </a:r>
           </a:p>
         </p:txBody>
@@ -8070,12 +8112,10 @@
             <a:avLst/>
           </a:prstGeom>
           <a:solidFill>
-            <a:srgbClr val="F8FAFC"/>
+            <a:srgbClr val="F1F5F9"/>
           </a:solidFill>
           <a:ln>
-            <a:solidFill>
-              <a:srgbClr val="F8FAFC"/>
-            </a:solidFill>
+            <a:noFill/>
           </a:ln>
         </p:spPr>
         <p:style>
@@ -8108,7 +8148,7 @@
         </p:nvSpPr>
         <p:spPr>
           <a:xfrm>
-            <a:off x="731520" y="365760"/>
+            <a:off x="731520" y="320040"/>
             <a:ext cx="10698480" cy="320040"/>
           </a:xfrm>
           <a:prstGeom prst="rect">
@@ -8117,13 +8157,13 @@
           <a:noFill/>
         </p:spPr>
         <p:txBody>
-          <a:bodyPr wrap="square">
+          <a:bodyPr wrap="none">
             <a:spAutoFit/>
           </a:bodyPr>
           <a:lstStyle/>
           <a:p>
             <a:pPr>
-              <a:defRPr sz="1000" b="1">
+              <a:defRPr sz="1100" b="1">
                 <a:solidFill>
                   <a:srgbClr val="0EA5E9"/>
                 </a:solidFill>
@@ -8144,8 +8184,8 @@
         </p:nvSpPr>
         <p:spPr>
           <a:xfrm>
-            <a:off x="731520" y="685800"/>
-            <a:ext cx="10698480" cy="548640"/>
+            <a:off x="731520" y="621792"/>
+            <a:ext cx="10698480" cy="594360"/>
           </a:xfrm>
           <a:prstGeom prst="rect">
             <a:avLst/>
@@ -8153,13 +8193,13 @@
           <a:noFill/>
         </p:spPr>
         <p:txBody>
-          <a:bodyPr wrap="square">
+          <a:bodyPr wrap="none">
             <a:spAutoFit/>
           </a:bodyPr>
           <a:lstStyle/>
           <a:p>
             <a:pPr>
-              <a:defRPr sz="2200" b="1">
+              <a:defRPr sz="2600" b="1">
                 <a:solidFill>
                   <a:srgbClr val="0F172A"/>
                 </a:solidFill>
@@ -8181,7 +8221,7 @@
         <p:spPr>
           <a:xfrm>
             <a:off x="731520" y="1371600"/>
-            <a:ext cx="5212080" cy="1115568"/>
+            <a:ext cx="5212080" cy="1143000"/>
           </a:xfrm>
           <a:prstGeom prst="roundRect">
             <a:avLst/>
@@ -8191,7 +8231,7 @@
           </a:solidFill>
           <a:ln w="19050">
             <a:solidFill>
-              <a:srgbClr val="E2E8F0"/>
+              <a:srgbClr val="CBD5E1"/>
             </a:solidFill>
           </a:ln>
         </p:spPr>
@@ -8225,8 +8265,8 @@
         </p:nvSpPr>
         <p:spPr>
           <a:xfrm>
-            <a:off x="914400" y="1463040"/>
-            <a:ext cx="4846320" cy="914400"/>
+            <a:off x="914400" y="1444752"/>
+            <a:ext cx="4846320" cy="1005840"/>
           </a:xfrm>
           <a:prstGeom prst="rect">
             <a:avLst/>
@@ -8240,7 +8280,7 @@
           <a:lstStyle/>
           <a:p>
             <a:pPr>
-              <a:defRPr sz="1100" b="1">
+              <a:defRPr sz="1300" b="1">
                 <a:solidFill>
                   <a:srgbClr val="0EA5E9"/>
                 </a:solidFill>
@@ -8252,14 +8292,14 @@
           </a:p>
           <a:p>
             <a:pPr>
-              <a:defRPr sz="900">
-                <a:solidFill>
-                  <a:srgbClr val="475569"/>
-                </a:solidFill>
-              </a:defRPr>
-            </a:pPr>
-            <a:r>
-              <a:t>Mô phỏng trọn vẹn hành trình khách hàng: Đặt lịch 7 bước, Bán lẻ thu ngân, Đổi ca trực, Chăm sóc khách hàng CRM.</a:t>
+              <a:defRPr sz="1100">
+                <a:solidFill>
+                  <a:srgbClr val="334155"/>
+                </a:solidFill>
+              </a:defRPr>
+            </a:pPr>
+            <a:r>
+              <a:t>Mô phỏng trọn vẹn hành trình khách hàng: Đặt lịch Spa 7 bước từ tạo khách mới, Bán lẻ POS, Đổi ca trực, CRM nhắc lịch.</a:t>
             </a:r>
           </a:p>
         </p:txBody>
@@ -8273,7 +8313,7 @@
         <p:spPr>
           <a:xfrm>
             <a:off x="6126480" y="1371600"/>
-            <a:ext cx="5212080" cy="1115568"/>
+            <a:ext cx="5212080" cy="1143000"/>
           </a:xfrm>
           <a:prstGeom prst="roundRect">
             <a:avLst/>
@@ -8283,7 +8323,7 @@
           </a:solidFill>
           <a:ln w="19050">
             <a:solidFill>
-              <a:srgbClr val="E2E8F0"/>
+              <a:srgbClr val="CBD5E1"/>
             </a:solidFill>
           </a:ln>
         </p:spPr>
@@ -8317,8 +8357,8 @@
         </p:nvSpPr>
         <p:spPr>
           <a:xfrm>
-            <a:off x="6309360" y="1463040"/>
-            <a:ext cx="4846320" cy="914400"/>
+            <a:off x="6309360" y="1444752"/>
+            <a:ext cx="4846320" cy="1005840"/>
           </a:xfrm>
           <a:prstGeom prst="rect">
             <a:avLst/>
@@ -8332,7 +8372,7 @@
           <a:lstStyle/>
           <a:p>
             <a:pPr>
-              <a:defRPr sz="1100" b="1">
+              <a:defRPr sz="1300" b="1">
                 <a:solidFill>
                   <a:srgbClr val="0EA5E9"/>
                 </a:solidFill>
@@ -8344,14 +8384,14 @@
           </a:p>
           <a:p>
             <a:pPr>
-              <a:defRPr sz="900">
-                <a:solidFill>
-                  <a:srgbClr val="475569"/>
-                </a:solidFill>
-              </a:defRPr>
-            </a:pPr>
-            <a:r>
-              <a:t>Bán hàng đa hình thức (Tiền mặt, QR, Thẻ), tạo khách nhanh tại quầy, xuất hóa đơn in nhiệt khổ tiêu chuẩn.</a:t>
+              <a:defRPr sz="1100">
+                <a:solidFill>
+                  <a:srgbClr val="334155"/>
+                </a:solidFill>
+              </a:defRPr>
+            </a:pPr>
+            <a:r>
+              <a:t>Bán hàng đa phương thức (Tiền mặt, QR, Thẻ), tạo khách nhanh tại quầy, xuất hóa đơn in nhiệt khổ tiêu chuẩn.</a:t>
             </a:r>
           </a:p>
         </p:txBody>
@@ -8365,7 +8405,7 @@
         <p:spPr>
           <a:xfrm>
             <a:off x="731520" y="2606040"/>
-            <a:ext cx="5212080" cy="1115568"/>
+            <a:ext cx="5212080" cy="1143000"/>
           </a:xfrm>
           <a:prstGeom prst="roundRect">
             <a:avLst/>
@@ -8375,7 +8415,7 @@
           </a:solidFill>
           <a:ln w="19050">
             <a:solidFill>
-              <a:srgbClr val="E2E8F0"/>
+              <a:srgbClr val="CBD5E1"/>
             </a:solidFill>
           </a:ln>
         </p:spPr>
@@ -8409,8 +8449,8 @@
         </p:nvSpPr>
         <p:spPr>
           <a:xfrm>
-            <a:off x="914400" y="2697480"/>
-            <a:ext cx="4846320" cy="914400"/>
+            <a:off x="914400" y="2679192"/>
+            <a:ext cx="4846320" cy="1005840"/>
           </a:xfrm>
           <a:prstGeom prst="rect">
             <a:avLst/>
@@ -8424,7 +8464,7 @@
           <a:lstStyle/>
           <a:p>
             <a:pPr>
-              <a:defRPr sz="1100" b="1">
+              <a:defRPr sz="1300" b="1">
                 <a:solidFill>
                   <a:srgbClr val="0EA5E9"/>
                 </a:solidFill>
@@ -8436,14 +8476,14 @@
           </a:p>
           <a:p>
             <a:pPr>
-              <a:defRPr sz="900">
-                <a:solidFill>
-                  <a:srgbClr val="475569"/>
-                </a:solidFill>
-              </a:defRPr>
-            </a:pPr>
-            <a:r>
-              <a:t>Quy trình điều phối dịch vụ từ Tiếp nhận -&gt; Đang làm -&gt; Hoàn thành, đổi thợ phụ trách, xem lịch Ngày/Tuần/Tháng.</a:t>
+              <a:defRPr sz="1100">
+                <a:solidFill>
+                  <a:srgbClr val="334155"/>
+                </a:solidFill>
+              </a:defRPr>
+            </a:pPr>
+            <a:r>
+              <a:t>Quy trình điều phối từ Tiếp nhận -&gt; Đang làm -&gt; Hoàn thành, đổi thợ phụ trách, xem lịch Ngày / Tuần / Tháng.</a:t>
             </a:r>
           </a:p>
         </p:txBody>
@@ -8457,7 +8497,7 @@
         <p:spPr>
           <a:xfrm>
             <a:off x="6126480" y="2606040"/>
-            <a:ext cx="5212080" cy="1115568"/>
+            <a:ext cx="5212080" cy="1143000"/>
           </a:xfrm>
           <a:prstGeom prst="roundRect">
             <a:avLst/>
@@ -8467,7 +8507,7 @@
           </a:solidFill>
           <a:ln w="19050">
             <a:solidFill>
-              <a:srgbClr val="E2E8F0"/>
+              <a:srgbClr val="CBD5E1"/>
             </a:solidFill>
           </a:ln>
         </p:spPr>
@@ -8501,8 +8541,8 @@
         </p:nvSpPr>
         <p:spPr>
           <a:xfrm>
-            <a:off x="6309360" y="2697480"/>
-            <a:ext cx="4846320" cy="914400"/>
+            <a:off x="6309360" y="2679192"/>
+            <a:ext cx="4846320" cy="1005840"/>
           </a:xfrm>
           <a:prstGeom prst="rect">
             <a:avLst/>
@@ -8516,7 +8556,7 @@
           <a:lstStyle/>
           <a:p>
             <a:pPr>
-              <a:defRPr sz="1100" b="1">
+              <a:defRPr sz="1300" b="1">
                 <a:solidFill>
                   <a:srgbClr val="0EA5E9"/>
                 </a:solidFill>
@@ -8528,14 +8568,14 @@
           </a:p>
           <a:p>
             <a:pPr>
-              <a:defRPr sz="900">
-                <a:solidFill>
-                  <a:srgbClr val="475569"/>
-                </a:solidFill>
-              </a:defRPr>
-            </a:pPr>
-            <a:r>
-              <a:t>Quản lý quan hệ 1 chủ - nhiều thú cưng, phân hạng thành viên, tra cứu đa điều kiện theo tên, SĐT, mã KH.</a:t>
+              <a:defRPr sz="1100">
+                <a:solidFill>
+                  <a:srgbClr val="334155"/>
+                </a:solidFill>
+              </a:defRPr>
+            </a:pPr>
+            <a:r>
+              <a:t>Quản lý quan hệ 1 chủ - nhiều thú cưng, phân hạng thành viên VIP, tra cứu đa tiêu chí theo Tên, SĐT, Mã KH.</a:t>
             </a:r>
           </a:p>
         </p:txBody>
@@ -8549,7 +8589,7 @@
         <p:spPr>
           <a:xfrm>
             <a:off x="731520" y="3840480"/>
-            <a:ext cx="5212080" cy="1115568"/>
+            <a:ext cx="5212080" cy="1143000"/>
           </a:xfrm>
           <a:prstGeom prst="roundRect">
             <a:avLst/>
@@ -8559,7 +8599,7 @@
           </a:solidFill>
           <a:ln w="19050">
             <a:solidFill>
-              <a:srgbClr val="E2E8F0"/>
+              <a:srgbClr val="CBD5E1"/>
             </a:solidFill>
           </a:ln>
         </p:spPr>
@@ -8593,8 +8633,8 @@
         </p:nvSpPr>
         <p:spPr>
           <a:xfrm>
-            <a:off x="914400" y="3931920"/>
-            <a:ext cx="4846320" cy="914400"/>
+            <a:off x="914400" y="3913632"/>
+            <a:ext cx="4846320" cy="1005840"/>
           </a:xfrm>
           <a:prstGeom prst="rect">
             <a:avLst/>
@@ -8608,7 +8648,7 @@
           <a:lstStyle/>
           <a:p>
             <a:pPr>
-              <a:defRPr sz="1100" b="1">
+              <a:defRPr sz="1300" b="1">
                 <a:solidFill>
                   <a:srgbClr val="0EA5E9"/>
                 </a:solidFill>
@@ -8620,14 +8660,14 @@
           </a:p>
           <a:p>
             <a:pPr>
-              <a:defRPr sz="900">
-                <a:solidFill>
-                  <a:srgbClr val="475569"/>
-                </a:solidFill>
-              </a:defRPr>
-            </a:pPr>
-            <a:r>
-              <a:t>Theo dõi biến động tồn kho, cảnh báo badge đỏ hết hàng, cập nhật giá bán đồng bộ tức thời.</a:t>
+              <a:defRPr sz="1100">
+                <a:solidFill>
+                  <a:srgbClr val="334155"/>
+                </a:solidFill>
+              </a:defRPr>
+            </a:pPr>
+            <a:r>
+              <a:t>Theo dõi biến động tồn kho, cảnh báo badge đỏ khi hết hàng, cập nhật giá bán đồng bộ tức thời.</a:t>
             </a:r>
           </a:p>
         </p:txBody>
@@ -8641,7 +8681,7 @@
         <p:spPr>
           <a:xfrm>
             <a:off x="6126480" y="3840480"/>
-            <a:ext cx="5212080" cy="1115568"/>
+            <a:ext cx="5212080" cy="1143000"/>
           </a:xfrm>
           <a:prstGeom prst="roundRect">
             <a:avLst/>
@@ -8651,7 +8691,7 @@
           </a:solidFill>
           <a:ln w="19050">
             <a:solidFill>
-              <a:srgbClr val="E2E8F0"/>
+              <a:srgbClr val="CBD5E1"/>
             </a:solidFill>
           </a:ln>
         </p:spPr>
@@ -8685,8 +8725,8 @@
         </p:nvSpPr>
         <p:spPr>
           <a:xfrm>
-            <a:off x="6309360" y="3931920"/>
-            <a:ext cx="4846320" cy="914400"/>
+            <a:off x="6309360" y="3913632"/>
+            <a:ext cx="4846320" cy="1005840"/>
           </a:xfrm>
           <a:prstGeom prst="rect">
             <a:avLst/>
@@ -8700,7 +8740,7 @@
           <a:lstStyle/>
           <a:p>
             <a:pPr>
-              <a:defRPr sz="1100" b="1">
+              <a:defRPr sz="1300" b="1">
                 <a:solidFill>
                   <a:srgbClr val="0EA5E9"/>
                 </a:solidFill>
@@ -8712,14 +8752,14 @@
           </a:p>
           <a:p>
             <a:pPr>
-              <a:defRPr sz="900">
-                <a:solidFill>
-                  <a:srgbClr val="475569"/>
-                </a:solidFill>
-              </a:defRPr>
-            </a:pPr>
-            <a:r>
-              <a:t>Chặn truy cập URL trái phép (/staff), chống tấn công XSS trong form, chống SQLi trong ô search, hủy session khi logout.</a:t>
+              <a:defRPr sz="1100">
+                <a:solidFill>
+                  <a:srgbClr val="334155"/>
+                </a:solidFill>
+              </a:defRPr>
+            </a:pPr>
+            <a:r>
+              <a:t>Chặn truy cập URL trái phép (/staff), chống XSS trong form, chống SQLi trong ô search, hủy session khi logout.</a:t>
             </a:r>
           </a:p>
         </p:txBody>
@@ -8733,7 +8773,7 @@
         <p:spPr>
           <a:xfrm>
             <a:off x="731520" y="5074920"/>
-            <a:ext cx="10698480" cy="1115568"/>
+            <a:ext cx="10698480" cy="1143000"/>
           </a:xfrm>
           <a:prstGeom prst="roundRect">
             <a:avLst/>
@@ -8743,7 +8783,7 @@
           </a:solidFill>
           <a:ln w="19050">
             <a:solidFill>
-              <a:srgbClr val="E2E8F0"/>
+              <a:srgbClr val="CBD5E1"/>
             </a:solidFill>
           </a:ln>
         </p:spPr>
@@ -8777,8 +8817,8 @@
         </p:nvSpPr>
         <p:spPr>
           <a:xfrm>
-            <a:off x="914400" y="5166360"/>
-            <a:ext cx="10332720" cy="914400"/>
+            <a:off x="914400" y="5148072"/>
+            <a:ext cx="10332720" cy="1005840"/>
           </a:xfrm>
           <a:prstGeom prst="rect">
             <a:avLst/>
@@ -8792,7 +8832,7 @@
           <a:lstStyle/>
           <a:p>
             <a:pPr>
-              <a:defRPr sz="1100" b="1">
+              <a:defRPr sz="1300" b="1">
                 <a:solidFill>
                   <a:srgbClr val="0EA5E9"/>
                 </a:solidFill>
@@ -8804,14 +8844,14 @@
           </a:p>
           <a:p>
             <a:pPr>
-              <a:defRPr sz="900">
-                <a:solidFill>
-                  <a:srgbClr val="475569"/>
-                </a:solidFill>
-              </a:defRPr>
-            </a:pPr>
-            <a:r>
-              <a:t>Kiểm thử co giãn Mobile Drawer (375px), Tablet (768px), cuộn ngang bảng lớn, tương thích Chrome và MS Edge.</a:t>
+              <a:defRPr sz="1100">
+                <a:solidFill>
+                  <a:srgbClr val="334155"/>
+                </a:solidFill>
+              </a:defRPr>
+            </a:pPr>
+            <a:r>
+              <a:t>Kiểm thử co giãn Mobile Drawer (375px), Tablet (768px), cuộn ngang bảng lớn, tương thích Chrome &amp; Edge.</a:t>
             </a:r>
           </a:p>
         </p:txBody>
@@ -8849,12 +8889,10 @@
             <a:avLst/>
           </a:prstGeom>
           <a:solidFill>
-            <a:srgbClr val="F8FAFC"/>
+            <a:srgbClr val="F1F5F9"/>
           </a:solidFill>
           <a:ln>
-            <a:solidFill>
-              <a:srgbClr val="F8FAFC"/>
-            </a:solidFill>
+            <a:noFill/>
           </a:ln>
         </p:spPr>
         <p:style>
@@ -8887,7 +8925,7 @@
         </p:nvSpPr>
         <p:spPr>
           <a:xfrm>
-            <a:off x="731520" y="365760"/>
+            <a:off x="731520" y="320040"/>
             <a:ext cx="10698480" cy="320040"/>
           </a:xfrm>
           <a:prstGeom prst="rect">
@@ -8896,13 +8934,13 @@
           <a:noFill/>
         </p:spPr>
         <p:txBody>
-          <a:bodyPr wrap="square">
+          <a:bodyPr wrap="none">
             <a:spAutoFit/>
           </a:bodyPr>
           <a:lstStyle/>
           <a:p>
             <a:pPr>
-              <a:defRPr sz="1000" b="1">
+              <a:defRPr sz="1100" b="1">
                 <a:solidFill>
                   <a:srgbClr val="0EA5E9"/>
                 </a:solidFill>
@@ -8923,8 +8961,8 @@
         </p:nvSpPr>
         <p:spPr>
           <a:xfrm>
-            <a:off x="731520" y="685800"/>
-            <a:ext cx="10698480" cy="548640"/>
+            <a:off x="731520" y="621792"/>
+            <a:ext cx="10698480" cy="594360"/>
           </a:xfrm>
           <a:prstGeom prst="rect">
             <a:avLst/>
@@ -8932,13 +8970,13 @@
           <a:noFill/>
         </p:spPr>
         <p:txBody>
-          <a:bodyPr wrap="square">
+          <a:bodyPr wrap="none">
             <a:spAutoFit/>
           </a:bodyPr>
           <a:lstStyle/>
           <a:p>
             <a:pPr>
-              <a:defRPr sz="2200" b="1">
+              <a:defRPr sz="2600" b="1">
                 <a:solidFill>
                   <a:srgbClr val="0F172A"/>
                 </a:solidFill>
@@ -8960,7 +8998,7 @@
         <p:spPr>
           <a:xfrm>
             <a:off x="731520" y="1371600"/>
-            <a:ext cx="5120640" cy="4937760"/>
+            <a:ext cx="5120640" cy="5029200"/>
           </a:xfrm>
           <a:prstGeom prst="roundRect">
             <a:avLst/>
@@ -8970,7 +9008,7 @@
           </a:solidFill>
           <a:ln w="19050">
             <a:solidFill>
-              <a:srgbClr val="E2E8F0"/>
+              <a:srgbClr val="CBD5E1"/>
             </a:solidFill>
           </a:ln>
         </p:spPr>
@@ -9004,8 +9042,8 @@
         </p:nvSpPr>
         <p:spPr>
           <a:xfrm>
-            <a:off x="914400" y="1554480"/>
-            <a:ext cx="4754880" cy="4572000"/>
+            <a:off x="914400" y="1508760"/>
+            <a:ext cx="4754880" cy="4754880"/>
           </a:xfrm>
           <a:prstGeom prst="rect">
             <a:avLst/>
@@ -9019,7 +9057,7 @@
           <a:lstStyle/>
           <a:p>
             <a:pPr>
-              <a:defRPr sz="1200" b="1">
+              <a:defRPr sz="1500" b="1">
                 <a:solidFill>
                   <a:srgbClr val="0D9488"/>
                 </a:solidFill>
@@ -9030,8 +9068,9 @@
             </a:r>
           </a:p>
           <a:p>
-            <a:pPr>
-              <a:defRPr b="1" sz="1000">
+            <a:br/>
+            <a:pPr>
+              <a:defRPr b="1" sz="1300">
                 <a:solidFill>
                   <a:srgbClr val="0F172A"/>
                 </a:solidFill>
@@ -9043,19 +9082,20 @@
           </a:p>
           <a:p>
             <a:pPr>
-              <a:defRPr sz="900">
-                <a:solidFill>
-                  <a:srgbClr val="475569"/>
-                </a:solidFill>
-              </a:defRPr>
-            </a:pPr>
-            <a:r>
-              <a:t>Tester phát hiện khiếm khuyết trong quá trình chạy test case, ghi nhận log và ảnh chụp màn hình.</a:t>
-            </a:r>
-          </a:p>
-          <a:p>
-            <a:pPr>
-              <a:defRPr b="1" sz="1000">
+              <a:defRPr sz="1150">
+                <a:solidFill>
+                  <a:srgbClr val="334155"/>
+                </a:solidFill>
+              </a:defRPr>
+            </a:pPr>
+            <a:r>
+              <a:t>Tester ghi nhận khiếm khuyết trong quá trình kiểm thử, lưu log lỗi và ảnh chụp màn hình.</a:t>
+            </a:r>
+          </a:p>
+          <a:p>
+            <a:br/>
+            <a:pPr>
+              <a:defRPr b="1" sz="1300">
                 <a:solidFill>
                   <a:srgbClr val="0F172A"/>
                 </a:solidFill>
@@ -9067,43 +9107,45 @@
           </a:p>
           <a:p>
             <a:pPr>
-              <a:defRPr sz="900">
-                <a:solidFill>
-                  <a:srgbClr val="475569"/>
-                </a:solidFill>
-              </a:defRPr>
-            </a:pPr>
-            <a:r>
-              <a:t>Gán lỗi cho Developer phụ trách module tương ứng để phân tích nguyên nhân gốc rễ.</a:t>
-            </a:r>
-          </a:p>
-          <a:p>
-            <a:pPr>
-              <a:defRPr b="1" sz="1000">
+              <a:defRPr sz="1150">
+                <a:solidFill>
+                  <a:srgbClr val="334155"/>
+                </a:solidFill>
+              </a:defRPr>
+            </a:pPr>
+            <a:r>
+              <a:t>Gán ticket lỗi cho Developer phụ trách module tương ứng để phân tích nguyên nhân.</a:t>
+            </a:r>
+          </a:p>
+          <a:p>
+            <a:br/>
+            <a:pPr>
+              <a:defRPr b="1" sz="1300">
                 <a:solidFill>
                   <a:srgbClr val="0F172A"/>
                 </a:solidFill>
               </a:defRPr>
             </a:pPr>
             <a:r>
-              <a:t>3. Fixed (Đã sửa):</a:t>
-            </a:r>
-          </a:p>
-          <a:p>
-            <a:pPr>
-              <a:defRPr sz="900">
-                <a:solidFill>
-                  <a:srgbClr val="475569"/>
-                </a:solidFill>
-              </a:defRPr>
-            </a:pPr>
-            <a:r>
-              <a:t>Developer tiến hành fix code và build lại bản vá (Hotfix).</a:t>
-            </a:r>
-          </a:p>
-          <a:p>
-            <a:pPr>
-              <a:defRPr b="1" sz="1000">
+              <a:t>3. Fixed (Đã sửa xong):</a:t>
+            </a:r>
+          </a:p>
+          <a:p>
+            <a:pPr>
+              <a:defRPr sz="1150">
+                <a:solidFill>
+                  <a:srgbClr val="334155"/>
+                </a:solidFill>
+              </a:defRPr>
+            </a:pPr>
+            <a:r>
+              <a:t>Developer tiến hành fix code và build bản vá lỗi (Hotfix).</a:t>
+            </a:r>
+          </a:p>
+          <a:p>
+            <a:br/>
+            <a:pPr>
+              <a:defRPr b="1" sz="1300">
                 <a:solidFill>
                   <a:srgbClr val="0F172A"/>
                 </a:solidFill>
@@ -9115,19 +9157,20 @@
           </a:p>
           <a:p>
             <a:pPr>
-              <a:defRPr sz="900">
-                <a:solidFill>
-                  <a:srgbClr val="475569"/>
-                </a:solidFill>
-              </a:defRPr>
-            </a:pPr>
-            <a:r>
-              <a:t>Tester thực thi lại kịch bản kiểm thử để xác minh lỗi đã được giải quyết.</a:t>
-            </a:r>
-          </a:p>
-          <a:p>
-            <a:pPr>
-              <a:defRPr b="1" sz="1000">
+              <a:defRPr sz="1150">
+                <a:solidFill>
+                  <a:srgbClr val="334155"/>
+                </a:solidFill>
+              </a:defRPr>
+            </a:pPr>
+            <a:r>
+              <a:t>Tester thực thi lại kịch bản kiểm thử để xác minh lỗi đã được khắc phục hoàn toàn.</a:t>
+            </a:r>
+          </a:p>
+          <a:p>
+            <a:br/>
+            <a:pPr>
+              <a:defRPr b="1" sz="1300">
                 <a:solidFill>
                   <a:srgbClr val="0F172A"/>
                 </a:solidFill>
@@ -9139,14 +9182,14 @@
           </a:p>
           <a:p>
             <a:pPr>
-              <a:defRPr sz="900">
-                <a:solidFill>
-                  <a:srgbClr val="475569"/>
-                </a:solidFill>
-              </a:defRPr>
-            </a:pPr>
-            <a:r>
-              <a:t>Xác nhận đạt 100% mong đợi và đóng ticket lỗi trên hệ thống.</a:t>
+              <a:defRPr sz="1150">
+                <a:solidFill>
+                  <a:srgbClr val="334155"/>
+                </a:solidFill>
+              </a:defRPr>
+            </a:pPr>
+            <a:r>
+              <a:t>Xác nhận đạt kết quả mong đợi và đóng ticket lỗi trên hệ thống.</a:t>
             </a:r>
           </a:p>
         </p:txBody>
@@ -9160,7 +9203,7 @@
         <p:spPr>
           <a:xfrm>
             <a:off x="6126480" y="1371600"/>
-            <a:ext cx="5303520" cy="4937760"/>
+            <a:ext cx="5303520" cy="5029200"/>
           </a:xfrm>
           <a:prstGeom prst="roundRect">
             <a:avLst/>
@@ -9170,7 +9213,7 @@
           </a:solidFill>
           <a:ln w="19050">
             <a:solidFill>
-              <a:srgbClr val="E2E8F0"/>
+              <a:srgbClr val="CBD5E1"/>
             </a:solidFill>
           </a:ln>
         </p:spPr>
@@ -9204,8 +9247,8 @@
         </p:nvSpPr>
         <p:spPr>
           <a:xfrm>
-            <a:off x="6309360" y="1554480"/>
-            <a:ext cx="4937760" cy="4572000"/>
+            <a:off x="6309360" y="1508760"/>
+            <a:ext cx="4937760" cy="4754880"/>
           </a:xfrm>
           <a:prstGeom prst="rect">
             <a:avLst/>
@@ -9219,9 +9262,9 @@
           <a:lstStyle/>
           <a:p>
             <a:pPr>
-              <a:defRPr sz="1200" b="1">
-                <a:solidFill>
-                  <a:srgbClr val="F59E0B"/>
+              <a:defRPr sz="1500" b="1">
+                <a:solidFill>
+                  <a:srgbClr val="D97706"/>
                 </a:solidFill>
               </a:defRPr>
             </a:pPr>
@@ -9230,8 +9273,9 @@
             </a:r>
           </a:p>
           <a:p>
-            <a:pPr>
-              <a:defRPr b="1" sz="1000">
+            <a:br/>
+            <a:pPr>
+              <a:defRPr b="1" sz="1300">
                 <a:solidFill>
                   <a:srgbClr val="0F172A"/>
                 </a:solidFill>
@@ -9243,23 +9287,24 @@
           </a:p>
           <a:p>
             <a:pPr>
-              <a:defRPr sz="900">
-                <a:solidFill>
-                  <a:srgbClr val="475569"/>
-                </a:solidFill>
-              </a:defRPr>
-            </a:pPr>
-            <a:r>
-              <a:t>Hiện tượng: Khi tạo đơn POS sản phẩm mới, số lượng kho chưa trừ ngay.</a:t>
+              <a:defRPr sz="1150">
+                <a:solidFill>
+                  <a:srgbClr val="334155"/>
+                </a:solidFill>
+              </a:defRPr>
+            </a:pPr>
+            <a:r>
+              <a:t>Hiện tượng: Khi tạo đơn hàng POS với sản phẩm mới, số lượng tồn kho hiển thị chưa đồng bộ ngay nếu không reload trang.</a:t>
             </a:r>
             <a:br/>
             <a:r>
-              <a:t>-&gt; Khắc phục: Bổ sung trigger updateProductStock trong action addOrder.</a:t>
-            </a:r>
-          </a:p>
-          <a:p>
-            <a:pPr>
-              <a:defRPr b="1" sz="1000">
+              <a:t>-&gt; Khắc phục: Bổ sung trigger updateProductStock tự động kích hoạt trong action addOrder.</a:t>
+            </a:r>
+          </a:p>
+          <a:p>
+            <a:br/>
+            <a:pPr>
+              <a:defRPr b="1" sz="1300">
                 <a:solidFill>
                   <a:srgbClr val="0F172A"/>
                 </a:solidFill>
@@ -9271,14 +9316,14 @@
           </a:p>
           <a:p>
             <a:pPr>
-              <a:defRPr sz="900">
-                <a:solidFill>
-                  <a:srgbClr val="475569"/>
-                </a:solidFill>
-              </a:defRPr>
-            </a:pPr>
-            <a:r>
-              <a:t>Hiện tượng: Đóng modal POS, lớp mờ fade-out 300ms chặn click tiếp theo.</a:t>
+              <a:defRPr sz="1150">
+                <a:solidFill>
+                  <a:srgbClr val="334155"/>
+                </a:solidFill>
+              </a:defRPr>
+            </a:pPr>
+            <a:r>
+              <a:t>Hiện tượng: Khi đóng Modal POS, lớp phủ mờ fade-out 300ms khiến thao tác click tiếp theo bị chặn (ElementClickIntercepted).</a:t>
             </a:r>
             <a:br/>
             <a:r>
@@ -9288,26 +9333,22 @@
           <a:p>
             <a:br/>
             <a:pPr>
-              <a:defRPr sz="1050" b="1">
+              <a:defRPr sz="1300" b="1">
                 <a:solidFill>
                   <a:srgbClr val="10B981"/>
                 </a:solidFill>
               </a:defRPr>
             </a:pPr>
             <a:r>
-              <a:t>🎉 KẾT QUẢ THỰC THI CUỐI CÙNG:</a:t>
+              <a:t>🎉 KẾT QUẢ THỰC THI TOÀN BỘ:</a:t>
             </a:r>
             <a:br/>
             <a:r>
-              <a:t>• Tổng số kịch bản: 240 / 240 Test Cases</a:t>
+              <a:t>• Tổng số kịch bản: 240 / 240 Test Cases (100% PASS)</a:t>
             </a:r>
             <a:br/>
             <a:r>
-              <a:t>• Số lượng Đạt (PASS): 240 (100%)</a:t>
-            </a:r>
-            <a:br/>
-            <a:r>
-              <a:t>• Số lượng Lỗi tồn đọng: 0 (0%)</a:t>
+              <a:t>• Số lượng lỗi tồn đọng: 0 (Hệ thống ổn định tuyệt đối)</a:t>
             </a:r>
           </a:p>
         </p:txBody>
@@ -9345,12 +9386,10 @@
             <a:avLst/>
           </a:prstGeom>
           <a:solidFill>
-            <a:srgbClr val="F8FAFC"/>
+            <a:srgbClr val="F1F5F9"/>
           </a:solidFill>
           <a:ln>
-            <a:solidFill>
-              <a:srgbClr val="F8FAFC"/>
-            </a:solidFill>
+            <a:noFill/>
           </a:ln>
         </p:spPr>
         <p:style>
@@ -9383,7 +9422,7 @@
         </p:nvSpPr>
         <p:spPr>
           <a:xfrm>
-            <a:off x="731520" y="365760"/>
+            <a:off x="731520" y="320040"/>
             <a:ext cx="10698480" cy="320040"/>
           </a:xfrm>
           <a:prstGeom prst="rect">
@@ -9392,13 +9431,13 @@
           <a:noFill/>
         </p:spPr>
         <p:txBody>
-          <a:bodyPr wrap="square">
+          <a:bodyPr wrap="none">
             <a:spAutoFit/>
           </a:bodyPr>
           <a:lstStyle/>
           <a:p>
             <a:pPr>
-              <a:defRPr sz="1000" b="1">
+              <a:defRPr sz="1100" b="1">
                 <a:solidFill>
                   <a:srgbClr val="0EA5E9"/>
                 </a:solidFill>
@@ -9419,8 +9458,8 @@
         </p:nvSpPr>
         <p:spPr>
           <a:xfrm>
-            <a:off x="731520" y="685800"/>
-            <a:ext cx="10698480" cy="548640"/>
+            <a:off x="731520" y="621792"/>
+            <a:ext cx="10698480" cy="594360"/>
           </a:xfrm>
           <a:prstGeom prst="rect">
             <a:avLst/>
@@ -9428,13 +9467,13 @@
           <a:noFill/>
         </p:spPr>
         <p:txBody>
-          <a:bodyPr wrap="square">
+          <a:bodyPr wrap="none">
             <a:spAutoFit/>
           </a:bodyPr>
           <a:lstStyle/>
           <a:p>
             <a:pPr>
-              <a:defRPr sz="2200" b="1">
+              <a:defRPr sz="2600" b="1">
                 <a:solidFill>
                   <a:srgbClr val="0F172A"/>
                 </a:solidFill>
@@ -9455,8 +9494,8 @@
         </p:nvSpPr>
         <p:spPr>
           <a:xfrm>
-            <a:off x="731520" y="1463040"/>
-            <a:ext cx="5212080" cy="2194560"/>
+            <a:off x="731520" y="1371600"/>
+            <a:ext cx="5212080" cy="2331720"/>
           </a:xfrm>
           <a:prstGeom prst="roundRect">
             <a:avLst/>
@@ -9500,8 +9539,8 @@
         </p:nvSpPr>
         <p:spPr>
           <a:xfrm>
-            <a:off x="914400" y="1645920"/>
-            <a:ext cx="4846320" cy="1828800"/>
+            <a:off x="914400" y="1508760"/>
+            <a:ext cx="4846320" cy="2011680"/>
           </a:xfrm>
           <a:prstGeom prst="rect">
             <a:avLst/>
@@ -9515,7 +9554,7 @@
           <a:lstStyle/>
           <a:p>
             <a:pPr>
-              <a:defRPr sz="1300" b="1">
+              <a:defRPr sz="1500" b="1">
                 <a:solidFill>
                   <a:srgbClr val="0EA5E9"/>
                 </a:solidFill>
@@ -9526,15 +9565,16 @@
             </a:r>
           </a:p>
           <a:p>
-            <a:pPr>
-              <a:defRPr sz="1050">
-                <a:solidFill>
-                  <a:srgbClr val="475569"/>
-                </a:solidFill>
-              </a:defRPr>
-            </a:pPr>
-            <a:r>
-              <a:t>Tách biệt 100% giữa Mã kịch bản (Test Scripts) và Cấu trúc giao diện (Locators). Khi giao diện thay đổi chỉ cần cập nhật tại 1 file Page Class.</a:t>
+            <a:br/>
+            <a:pPr>
+              <a:defRPr sz="1200">
+                <a:solidFill>
+                  <a:srgbClr val="334155"/>
+                </a:solidFill>
+              </a:defRPr>
+            </a:pPr>
+            <a:r>
+              <a:t>Tách biệt 100% giữa Mã kịch bản kiểm thử (Test Scripts) và Cấu trúc giao diện (Locators). Khi giao diện thay đổi chỉ cần cập nhật tại 1 file Page Class duy nhất, giúp code sạch và dễ bảo trì.</a:t>
             </a:r>
           </a:p>
         </p:txBody>
@@ -9547,8 +9587,8 @@
         </p:nvSpPr>
         <p:spPr>
           <a:xfrm>
-            <a:off x="6126480" y="1463040"/>
-            <a:ext cx="5212080" cy="2194560"/>
+            <a:off x="6126480" y="1371600"/>
+            <a:ext cx="5212080" cy="2331720"/>
           </a:xfrm>
           <a:prstGeom prst="roundRect">
             <a:avLst/>
@@ -9592,8 +9632,8 @@
         </p:nvSpPr>
         <p:spPr>
           <a:xfrm>
-            <a:off x="6309360" y="1645920"/>
-            <a:ext cx="4846320" cy="1828800"/>
+            <a:off x="6309360" y="1508760"/>
+            <a:ext cx="4846320" cy="2011680"/>
           </a:xfrm>
           <a:prstGeom prst="rect">
             <a:avLst/>
@@ -9607,26 +9647,27 @@
           <a:lstStyle/>
           <a:p>
             <a:pPr>
-              <a:defRPr sz="1300" b="1">
+              <a:defRPr sz="1500" b="1">
                 <a:solidFill>
                   <a:srgbClr val="0D9488"/>
                 </a:solidFill>
               </a:defRPr>
             </a:pPr>
             <a:r>
-              <a:t>🚀 Selenium WebDriver 4</a:t>
-            </a:r>
-          </a:p>
-          <a:p>
-            <a:pPr>
-              <a:defRPr sz="1050">
-                <a:solidFill>
-                  <a:srgbClr val="475569"/>
-                </a:solidFill>
-              </a:defRPr>
-            </a:pPr>
-            <a:r>
-              <a:t>Tự động hóa trình duyệt Chrome, Edge, Firefox. Tương tác mượt mà với Modal, Form 7 bước, Bàn phím ảo POS và In ấn window.print().</a:t>
+              <a:t>🚀 Selenium WebDriver 4.25</a:t>
+            </a:r>
+          </a:p>
+          <a:p>
+            <a:br/>
+            <a:pPr>
+              <a:defRPr sz="1200">
+                <a:solidFill>
+                  <a:srgbClr val="334155"/>
+                </a:solidFill>
+              </a:defRPr>
+            </a:pPr>
+            <a:r>
+              <a:t>Tự động hóa trình duyệt Google Chrome, MS Edge. Tương tác mượt mà với Modal, Form đặt lịch 7 bước, Quầy bán hàng POS, cuộn trang mượt mà và kích hoạt in ấn window.print().</a:t>
             </a:r>
           </a:p>
         </p:txBody>
@@ -9639,8 +9680,8 @@
         </p:nvSpPr>
         <p:spPr>
           <a:xfrm>
-            <a:off x="731520" y="3931920"/>
-            <a:ext cx="5212080" cy="2194560"/>
+            <a:off x="731520" y="3886200"/>
+            <a:ext cx="5212080" cy="2331720"/>
           </a:xfrm>
           <a:prstGeom prst="roundRect">
             <a:avLst/>
@@ -9650,7 +9691,7 @@
           </a:solidFill>
           <a:ln w="19050">
             <a:solidFill>
-              <a:srgbClr val="F59E0B"/>
+              <a:srgbClr val="D97706"/>
             </a:solidFill>
           </a:ln>
         </p:spPr>
@@ -9684,8 +9725,8 @@
         </p:nvSpPr>
         <p:spPr>
           <a:xfrm>
-            <a:off x="914400" y="4114800"/>
-            <a:ext cx="4846320" cy="1828800"/>
+            <a:off x="914400" y="4023360"/>
+            <a:ext cx="4846320" cy="2011680"/>
           </a:xfrm>
           <a:prstGeom prst="rect">
             <a:avLst/>
@@ -9699,26 +9740,27 @@
           <a:lstStyle/>
           <a:p>
             <a:pPr>
-              <a:defRPr sz="1300" b="1">
-                <a:solidFill>
-                  <a:srgbClr val="F59E0B"/>
-                </a:solidFill>
-              </a:defRPr>
-            </a:pPr>
-            <a:r>
-              <a:t>🚀 TestNG Test Runner</a:t>
-            </a:r>
-          </a:p>
-          <a:p>
-            <a:pPr>
-              <a:defRPr sz="1050">
-                <a:solidFill>
-                  <a:srgbClr val="475569"/>
-                </a:solidFill>
-              </a:defRPr>
-            </a:pPr>
-            <a:r>
-              <a:t>Quản lý bộ test suite qua XML, hỗ trợ @Test annotations, DataProvider, đa luồng song song và bắt ngoại lệ Assertions.</a:t>
+              <a:defRPr sz="1500" b="1">
+                <a:solidFill>
+                  <a:srgbClr val="D97706"/>
+                </a:solidFill>
+              </a:defRPr>
+            </a:pPr>
+            <a:r>
+              <a:t>🚀 TestNG Test Runner 7.10</a:t>
+            </a:r>
+          </a:p>
+          <a:p>
+            <a:br/>
+            <a:pPr>
+              <a:defRPr sz="1200">
+                <a:solidFill>
+                  <a:srgbClr val="334155"/>
+                </a:solidFill>
+              </a:defRPr>
+            </a:pPr>
+            <a:r>
+              <a:t>Quản lý các bộ test suite đa cấp độ qua file XML, hỗ trợ @Test annotations, DataProvider, chạy song song đa luồng và quản lý bắt lỗi Assertions chính xác.</a:t>
             </a:r>
           </a:p>
         </p:txBody>
@@ -9731,8 +9773,8 @@
         </p:nvSpPr>
         <p:spPr>
           <a:xfrm>
-            <a:off x="6126480" y="3931920"/>
-            <a:ext cx="5212080" cy="2194560"/>
+            <a:off x="6126480" y="3886200"/>
+            <a:ext cx="5212080" cy="2331720"/>
           </a:xfrm>
           <a:prstGeom prst="roundRect">
             <a:avLst/>
@@ -9776,8 +9818,8 @@
         </p:nvSpPr>
         <p:spPr>
           <a:xfrm>
-            <a:off x="6309360" y="4114800"/>
-            <a:ext cx="4846320" cy="1828800"/>
+            <a:off x="6309360" y="4023360"/>
+            <a:ext cx="4846320" cy="2011680"/>
           </a:xfrm>
           <a:prstGeom prst="rect">
             <a:avLst/>
@@ -9791,7 +9833,7 @@
           <a:lstStyle/>
           <a:p>
             <a:pPr>
-              <a:defRPr sz="1300" b="1">
+              <a:defRPr sz="1500" b="1">
                 <a:solidFill>
                   <a:srgbClr val="10B981"/>
                 </a:solidFill>
@@ -9802,15 +9844,16 @@
             </a:r>
           </a:p>
           <a:p>
-            <a:pPr>
-              <a:defRPr sz="1050">
-                <a:solidFill>
-                  <a:srgbClr val="475569"/>
-                </a:solidFill>
-              </a:defRPr>
-            </a:pPr>
-            <a:r>
-              <a:t>Xuất báo cáo HTML đồ họa chuyên nghiệp (PetCare_TestReport.html) có biểu đồ tròn Pie Chart và ảnh chụp màn hình lỗi tự động.</a:t>
+            <a:br/>
+            <a:pPr>
+              <a:defRPr sz="1200">
+                <a:solidFill>
+                  <a:srgbClr val="334155"/>
+                </a:solidFill>
+              </a:defRPr>
+            </a:pPr>
+            <a:r>
+              <a:t>Tự động xuất file báo cáo HTML trực quan (PetCare_TestReport.html) có biểu đồ tròn Pie Chart tỷ lệ đạt, thời gian thực thi chi tiết và đính kèm ảnh chụp màn hình tự động.</a:t>
             </a:r>
           </a:p>
         </p:txBody>

--- a/BaoCao/Slide_BaoCao_DeTai4_Nhom9.pptx
+++ b/BaoCao/Slide_BaoCao_DeTai4_Nhom9.pptx
@@ -3150,8 +3150,8 @@
         </p:nvSpPr>
         <p:spPr>
           <a:xfrm>
-            <a:off x="731520" y="548640"/>
-            <a:ext cx="10728655" cy="475488"/>
+            <a:off x="731520" y="502920"/>
+            <a:ext cx="10728655" cy="457200"/>
           </a:xfrm>
           <a:prstGeom prst="roundRect">
             <a:avLst/>
@@ -3184,7 +3184,7 @@
           <a:lstStyle/>
           <a:p>
             <a:pPr algn="ctr">
-              <a:defRPr sz="1250" b="1">
+              <a:defRPr sz="1200" b="1">
                 <a:solidFill>
                   <a:srgbClr val="BAE6FD"/>
                 </a:solidFill>
@@ -3205,8 +3205,8 @@
         </p:nvSpPr>
         <p:spPr>
           <a:xfrm>
-            <a:off x="731520" y="1234440"/>
-            <a:ext cx="10728655" cy="2011680"/>
+            <a:off x="731520" y="1143000"/>
+            <a:ext cx="10728655" cy="2194560"/>
           </a:xfrm>
           <a:prstGeom prst="rect">
             <a:avLst/>
@@ -3221,9 +3221,9 @@
           <a:p>
             <a:pPr>
               <a:spcAft>
-                <a:spcPts val="600"/>
+                <a:spcPts val="400"/>
               </a:spcAft>
-              <a:defRPr sz="1500" b="1">
+              <a:defRPr sz="1400" b="1">
                 <a:solidFill>
                   <a:srgbClr val="38BDF8"/>
                 </a:solidFill>
@@ -3231,15 +3231,18 @@
               </a:defRPr>
             </a:pPr>
             <a:r>
-              <a:t>BÁO CÁO THỰC TẬP &amp; ĐỒ ÁN MÔN HỌC</a:t>
-            </a:r>
-          </a:p>
-          <a:p>
-            <a:pPr>
+              <a:t>BÁO CÁO BÀI TẬP LỚN • HỌC PHẦN: KIỂM THỬ PHẦN MỀM</a:t>
+            </a:r>
+          </a:p>
+          <a:p>
+            <a:pPr>
+              <a:lnSpc>
+                <a:spcPct val="115000"/>
+              </a:lnSpc>
               <a:spcAft>
                 <a:spcPts val="600"/>
               </a:spcAft>
-              <a:defRPr sz="3200" b="1">
+              <a:defRPr sz="2600" b="1">
                 <a:solidFill>
                   <a:srgbClr val="FFFFFF"/>
                 </a:solidFill>
@@ -3247,12 +3250,16 @@
               </a:defRPr>
             </a:pPr>
             <a:r>
-              <a:t>ĐỀ TÀI 4: KIỂM THỬ PHẦN MỀM PETCARE PRO</a:t>
-            </a:r>
-          </a:p>
-          <a:p>
-            <a:pPr>
-              <a:defRPr sz="1400">
+              <a:t>ĐỀ TÀI 4: XÂY DỰNG VÀ KIỂM THỬ HỆ THỐNG QUẢN LÝ</a:t>
+            </a:r>
+            <a:br/>
+            <a:r>
+              <a:t>DỊCH VỤ CHĂM SÓC THÚ CƯNG</a:t>
+            </a:r>
+          </a:p>
+          <a:p>
+            <a:pPr>
+              <a:defRPr sz="1300">
                 <a:solidFill>
                   <a:srgbClr val="CBD5E1"/>
                 </a:solidFill>
@@ -3260,7 +3267,7 @@
               </a:defRPr>
             </a:pPr>
             <a:r>
-              <a:t>Hệ thống Quản lý Dịch vụ Thú cưng Toàn diện • 240 Test Cases (Unit - Integration - System Automation)</a:t>
+              <a:t>Giải pháp Quản lý Cửa hàng &amp; Dịch vụ Toàn diện • 240 Ca kiểm thử (Đơn vị - Tích hợp - Hệ thống Tự động hóa)</a:t>
             </a:r>
           </a:p>
         </p:txBody>
@@ -3273,7 +3280,7 @@
         </p:nvSpPr>
         <p:spPr>
           <a:xfrm>
-            <a:off x="731520" y="3520440"/>
+            <a:off x="731520" y="3566160"/>
             <a:ext cx="3429000" cy="2057400"/>
           </a:xfrm>
           <a:prstGeom prst="roundRect">
@@ -3303,43 +3310,59 @@
           </a:fontRef>
         </p:style>
         <p:txBody>
-          <a:bodyPr rtlCol="0" anchor="ctr" wrap="square" lIns="228600" rIns="228600"/>
+          <a:bodyPr rtlCol="0" anchor="ctr" wrap="square" lIns="201168" rIns="201168"/>
           <a:lstStyle/>
           <a:p>
             <a:pPr algn="ctr">
+              <a:spcAft>
+                <a:spcPts val="200"/>
+              </a:spcAft>
+              <a:defRPr sz="1150" b="1">
+                <a:solidFill>
+                  <a:srgbClr val="38BDF8"/>
+                </a:solidFill>
+                <a:latin typeface="Segoe UI"/>
+              </a:defRPr>
+            </a:pPr>
+            <a:r>
+              <a:t>★ TRƯỞNG NHÓM</a:t>
+            </a:r>
+          </a:p>
+          <a:p>
+            <a:pPr>
               <a:spcAft>
                 <a:spcPts val="400"/>
               </a:spcAft>
-              <a:defRPr sz="1150" b="1">
-                <a:solidFill>
-                  <a:srgbClr val="38BDF8"/>
-                </a:solidFill>
-                <a:latin typeface="Segoe UI"/>
-              </a:defRPr>
-            </a:pPr>
-            <a:r>
-              <a:t>★ TRƯỞNG NHÓM - MSV: 20221398</a:t>
+              <a:defRPr sz="1750" b="1">
+                <a:solidFill>
+                  <a:srgbClr val="FFFFFF"/>
+                </a:solidFill>
+                <a:latin typeface="Segoe UI"/>
+              </a:defRPr>
+            </a:pPr>
+            <a:r>
+              <a:t>Đặng Văn Mạnh</a:t>
             </a:r>
           </a:p>
           <a:p>
             <a:pPr>
               <a:spcAft>
-                <a:spcPts val="600"/>
+                <a:spcPts val="400"/>
               </a:spcAft>
-              <a:defRPr sz="1800" b="1">
-                <a:solidFill>
-                  <a:srgbClr val="FFFFFF"/>
-                </a:solidFill>
-                <a:latin typeface="Segoe UI"/>
-              </a:defRPr>
-            </a:pPr>
-            <a:r>
-              <a:t>Vũ Xuân Mạnh</a:t>
-            </a:r>
-          </a:p>
-          <a:p>
-            <a:pPr>
-              <a:defRPr sz="1200">
+              <a:defRPr sz="1100" b="1">
+                <a:solidFill>
+                  <a:srgbClr val="BAE6FD"/>
+                </a:solidFill>
+                <a:latin typeface="Segoe UI"/>
+              </a:defRPr>
+            </a:pPr>
+            <a:r>
+              <a:t>MSV: 20232652 • Lớp: DCCNTT 14.C.3</a:t>
+            </a:r>
+          </a:p>
+          <a:p>
+            <a:pPr>
+              <a:defRPr sz="1150">
                 <a:solidFill>
                   <a:srgbClr val="CBD5E1"/>
                 </a:solidFill>
@@ -3347,7 +3370,7 @@
               </a:defRPr>
             </a:pPr>
             <a:r>
-              <a:t>Phụ trách Unit Test &amp; Test Automation Selenium 4</a:t>
+              <a:t>Phụ trách Kiểm thử Đơn vị (Unit Test) &amp; Kiểm thử Tự động</a:t>
             </a:r>
           </a:p>
         </p:txBody>
@@ -3360,7 +3383,7 @@
         </p:nvSpPr>
         <p:spPr>
           <a:xfrm>
-            <a:off x="4379976" y="3520440"/>
+            <a:off x="4379976" y="3566160"/>
             <a:ext cx="3429000" cy="2057400"/>
           </a:xfrm>
           <a:prstGeom prst="roundRect">
@@ -3390,43 +3413,59 @@
           </a:fontRef>
         </p:style>
         <p:txBody>
-          <a:bodyPr rtlCol="0" anchor="ctr" wrap="square" lIns="228600" rIns="228600"/>
+          <a:bodyPr rtlCol="0" anchor="ctr" wrap="square" lIns="201168" rIns="201168"/>
           <a:lstStyle/>
           <a:p>
             <a:pPr algn="ctr">
+              <a:spcAft>
+                <a:spcPts val="200"/>
+              </a:spcAft>
+              <a:defRPr sz="1150" b="1">
+                <a:solidFill>
+                  <a:srgbClr val="38BDF8"/>
+                </a:solidFill>
+                <a:latin typeface="Segoe UI"/>
+              </a:defRPr>
+            </a:pPr>
+            <a:r>
+              <a:t>★ THÀNH VIÊN</a:t>
+            </a:r>
+          </a:p>
+          <a:p>
+            <a:pPr>
               <a:spcAft>
                 <a:spcPts val="400"/>
               </a:spcAft>
-              <a:defRPr sz="1150" b="1">
-                <a:solidFill>
-                  <a:srgbClr val="38BDF8"/>
-                </a:solidFill>
-                <a:latin typeface="Segoe UI"/>
-              </a:defRPr>
-            </a:pPr>
-            <a:r>
-              <a:t>★ THÀNH VIÊN - MSV: 20220678</a:t>
+              <a:defRPr sz="1750" b="1">
+                <a:solidFill>
+                  <a:srgbClr val="FFFFFF"/>
+                </a:solidFill>
+                <a:latin typeface="Segoe UI"/>
+              </a:defRPr>
+            </a:pPr>
+            <a:r>
+              <a:t>Trần Ngọc Sơn</a:t>
             </a:r>
           </a:p>
           <a:p>
             <a:pPr>
               <a:spcAft>
-                <a:spcPts val="600"/>
+                <a:spcPts val="400"/>
               </a:spcAft>
-              <a:defRPr sz="1800" b="1">
-                <a:solidFill>
-                  <a:srgbClr val="FFFFFF"/>
-                </a:solidFill>
-                <a:latin typeface="Segoe UI"/>
-              </a:defRPr>
-            </a:pPr>
-            <a:r>
-              <a:t>Nguyễn Thế Sơn</a:t>
-            </a:r>
-          </a:p>
-          <a:p>
-            <a:pPr>
-              <a:defRPr sz="1200">
+              <a:defRPr sz="1100" b="1">
+                <a:solidFill>
+                  <a:srgbClr val="BAE6FD"/>
+                </a:solidFill>
+                <a:latin typeface="Segoe UI"/>
+              </a:defRPr>
+            </a:pPr>
+            <a:r>
+              <a:t>MSV: 20232472 • Lớp: DCCNTT 14.C.3</a:t>
+            </a:r>
+          </a:p>
+          <a:p>
+            <a:pPr>
+              <a:defRPr sz="1150">
                 <a:solidFill>
                   <a:srgbClr val="CBD5E1"/>
                 </a:solidFill>
@@ -3434,7 +3473,7 @@
               </a:defRPr>
             </a:pPr>
             <a:r>
-              <a:t>Phụ trách Integration Test &amp; Soạn thảo Báo cáo</a:t>
+              <a:t>Phụ trách Kiểm thử Tích hợp (Integration Test) &amp; Báo cáo</a:t>
             </a:r>
           </a:p>
         </p:txBody>
@@ -3447,7 +3486,7 @@
         </p:nvSpPr>
         <p:spPr>
           <a:xfrm>
-            <a:off x="8028432" y="3520440"/>
+            <a:off x="8028432" y="3566160"/>
             <a:ext cx="3429000" cy="2057400"/>
           </a:xfrm>
           <a:prstGeom prst="roundRect">
@@ -3477,43 +3516,59 @@
           </a:fontRef>
         </p:style>
         <p:txBody>
-          <a:bodyPr rtlCol="0" anchor="ctr" wrap="square" lIns="228600" rIns="228600"/>
+          <a:bodyPr rtlCol="0" anchor="ctr" wrap="square" lIns="201168" rIns="201168"/>
           <a:lstStyle/>
           <a:p>
             <a:pPr algn="ctr">
+              <a:spcAft>
+                <a:spcPts val="200"/>
+              </a:spcAft>
+              <a:defRPr sz="1150" b="1">
+                <a:solidFill>
+                  <a:srgbClr val="38BDF8"/>
+                </a:solidFill>
+                <a:latin typeface="Segoe UI"/>
+              </a:defRPr>
+            </a:pPr>
+            <a:r>
+              <a:t>★ THÀNH VIÊN</a:t>
+            </a:r>
+          </a:p>
+          <a:p>
+            <a:pPr>
               <a:spcAft>
                 <a:spcPts val="400"/>
               </a:spcAft>
-              <a:defRPr sz="1150" b="1">
-                <a:solidFill>
-                  <a:srgbClr val="38BDF8"/>
-                </a:solidFill>
-                <a:latin typeface="Segoe UI"/>
-              </a:defRPr>
-            </a:pPr>
-            <a:r>
-              <a:t>★ THÀNH VIÊN - MSV: 20220123</a:t>
+              <a:defRPr sz="1750" b="1">
+                <a:solidFill>
+                  <a:srgbClr val="FFFFFF"/>
+                </a:solidFill>
+                <a:latin typeface="Segoe UI"/>
+              </a:defRPr>
+            </a:pPr>
+            <a:r>
+              <a:t>Ngô Hoàng Anh</a:t>
             </a:r>
           </a:p>
           <a:p>
             <a:pPr>
               <a:spcAft>
-                <a:spcPts val="600"/>
+                <a:spcPts val="400"/>
               </a:spcAft>
-              <a:defRPr sz="1800" b="1">
-                <a:solidFill>
-                  <a:srgbClr val="FFFFFF"/>
-                </a:solidFill>
-                <a:latin typeface="Segoe UI"/>
-              </a:defRPr>
-            </a:pPr>
-            <a:r>
-              <a:t>Dương Hoàng Anh</a:t>
-            </a:r>
-          </a:p>
-          <a:p>
-            <a:pPr>
-              <a:defRPr sz="1200">
+              <a:defRPr sz="1100" b="1">
+                <a:solidFill>
+                  <a:srgbClr val="BAE6FD"/>
+                </a:solidFill>
+                <a:latin typeface="Segoe UI"/>
+              </a:defRPr>
+            </a:pPr>
+            <a:r>
+              <a:t>MSV: 20232558 • Lớp: DCCNTT 14.C.3</a:t>
+            </a:r>
+          </a:p>
+          <a:p>
+            <a:pPr>
+              <a:defRPr sz="1150">
                 <a:solidFill>
                   <a:srgbClr val="CBD5E1"/>
                 </a:solidFill>
@@ -3521,7 +3576,7 @@
               </a:defRPr>
             </a:pPr>
             <a:r>
-              <a:t>Phụ trách System Test &amp; UI/UX Responsive</a:t>
+              <a:t>Phụ trách Kiểm thử Hệ thống (System Test) &amp; Giao diện UI/UX</a:t>
             </a:r>
           </a:p>
         </p:txBody>
@@ -3549,7 +3604,7 @@
           <a:lstStyle/>
           <a:p>
             <a:pPr algn="ctr">
-              <a:defRPr sz="1200">
+              <a:defRPr sz="1150">
                 <a:solidFill>
                   <a:srgbClr val="94A3B8"/>
                 </a:solidFill>
@@ -3557,7 +3612,7 @@
               </a:defRPr>
             </a:pPr>
             <a:r>
-              <a:t>Giảng viên hướng dẫn: ThS. Hoàng Thị Phương Lan • Nhóm 9 • Lớp: CNTT-K13 • Hà Nội 2026</a:t>
+              <a:t>Giảng viên hướng dẫn: ThS. Hoàng Thị Phương Lan • Nhóm 9 • Lớp tín chỉ: Kiểm thử phần mềm-1-1-26(N04) • Hà Nội 2026</a:t>
             </a:r>
           </a:p>
         </p:txBody>
@@ -3682,7 +3737,7 @@
           <a:lstStyle/>
           <a:p>
             <a:pPr>
-              <a:defRPr sz="2400" b="1">
+              <a:defRPr sz="2300" b="1">
                 <a:solidFill>
                   <a:srgbClr val="0F172A"/>
                 </a:solidFill>
@@ -3690,7 +3745,7 @@
               </a:defRPr>
             </a:pPr>
             <a:r>
-              <a:t>Quy Trình Quản Lý &amp; Xử Lý Lỗi (Defect Lifecycle)</a:t>
+              <a:t>Quy Trình Quản Lý &amp; Xử Lý Lỗi (Vòng đời lỗi)</a:t>
             </a:r>
           </a:p>
         </p:txBody>
@@ -3788,7 +3843,7 @@
               </a:defRPr>
             </a:pPr>
             <a:r>
-              <a:t>🔄 VÒNG ĐỜI XỬ LÝ BUG (BUG LIFECYCLE)</a:t>
+              <a:t>🔄 VÒNG ĐỜI XỬ LÝ LỖI (DEFECT LIFECYCLE)</a:t>
             </a:r>
           </a:p>
           <a:p>
@@ -3843,7 +3898,7 @@
                 </a:solidFill>
                 <a:latin typeface="Segoe UI"/>
               </a:rPr>
-              <a:t>• 1. New (Phát hiện lỗi): </a:t>
+              <a:t>• 1. Mới (Phát hiện lỗi): </a:t>
             </a:r>
             <a:r>
               <a:rPr sz="1200">
@@ -3871,7 +3926,7 @@
                 </a:solidFill>
                 <a:latin typeface="Segoe UI"/>
               </a:rPr>
-              <a:t>• 2. Assigned (Phân công): </a:t>
+              <a:t>• 2. Phân công (Assigned): </a:t>
             </a:r>
             <a:r>
               <a:rPr sz="1200">
@@ -3880,7 +3935,7 @@
                 </a:solidFill>
                 <a:latin typeface="Segoe UI"/>
               </a:rPr>
-              <a:t>Gán lỗi cho Developer phụ trách module tương ứng, xác định độ nghiêm trọng (Severity: High/Medium/Low).</a:t>
+              <a:t>Gán lỗi cho Developer phụ trách module tương ứng, xác định độ nghiêm trọng (Nghiêm trọng / Cao / Trung bình).</a:t>
             </a:r>
           </a:p>
           <a:p>
@@ -3899,7 +3954,7 @@
                 </a:solidFill>
                 <a:latin typeface="Segoe UI"/>
               </a:rPr>
-              <a:t>• 3. Fixed (Đã sửa): </a:t>
+              <a:t>• 3. Đã sửa (Fixed): </a:t>
             </a:r>
             <a:r>
               <a:rPr sz="1200">
@@ -3927,7 +3982,7 @@
                 </a:solidFill>
                 <a:latin typeface="Segoe UI"/>
               </a:rPr>
-              <a:t>• 4. Retest (Kiểm thử lại): </a:t>
+              <a:t>• 4. Kiểm thử lại (Retest): </a:t>
             </a:r>
             <a:r>
               <a:rPr sz="1200">
@@ -3955,7 +4010,7 @@
                 </a:solidFill>
                 <a:latin typeface="Segoe UI"/>
               </a:rPr>
-              <a:t>• 5. Closed (Đóng lỗi): </a:t>
+              <a:t>• 5. Đóng lỗi (Closed): </a:t>
             </a:r>
             <a:r>
               <a:rPr sz="1200">
@@ -4207,7 +4262,7 @@
                 </a:solidFill>
                 <a:latin typeface="Segoe UI"/>
               </a:rPr>
-              <a:t>4/4 lỗi đã sửa xong 100% (Ví dụ: Chặn trừ kho âm, sửa tính sai tổng tiền voucher, lỗi mất session).</a:t>
+              <a:t>4/4 lỗi đã sửa xong 100% (Ví dụ: Chặn trừ kho âm, sửa tính sai tổng tiền voucher, lỗi mất phiên đăng nhập).</a:t>
             </a:r>
           </a:p>
           <a:p>
@@ -4263,7 +4318,7 @@
                 </a:solidFill>
                 <a:latin typeface="Segoe UI"/>
               </a:rPr>
-              <a:t>0 Lỗi Critical, 0 Lỗi High. Hệ thống vận hành cực kỳ mượt mà, sẵn sàng triển khai thực tế.</a:t>
+              <a:t>0 Lỗi Nghiêm trọng, 0 Lỗi Cao. Hệ thống vận hành cực kỳ mượt mà, sẵn sàng triển khai thực tế.</a:t>
             </a:r>
           </a:p>
         </p:txBody>
@@ -4441,7 +4496,7 @@
           <a:lstStyle/>
           <a:p>
             <a:pPr>
-              <a:defRPr sz="2400" b="1">
+              <a:defRPr sz="2300" b="1">
                 <a:solidFill>
                   <a:srgbClr val="0F172A"/>
                 </a:solidFill>
@@ -4520,7 +4575,7 @@
               </a:defRPr>
             </a:pPr>
             <a:r>
-              <a:t>TỔNG TEST CASES</a:t>
+              <a:t>TỔNG CA KIỂM THỬ</a:t>
             </a:r>
           </a:p>
           <a:p>
@@ -4533,7 +4588,7 @@
               </a:defRPr>
             </a:pPr>
             <a:r>
-              <a:t>Unit + Integration + System</a:t>
+              <a:t>Đơn vị + Tích hợp + Hệ thống</a:t>
             </a:r>
           </a:p>
         </p:txBody>
@@ -4604,7 +4659,7 @@
               </a:defRPr>
             </a:pPr>
             <a:r>
-              <a:t>TỶ LỆ PASS</a:t>
+              <a:t>TỶ LỆ ĐẠT (PASS)</a:t>
             </a:r>
           </a:p>
           <a:p>
@@ -4701,7 +4756,7 @@
               </a:defRPr>
             </a:pPr>
             <a:r>
-              <a:t>Toàn diện từ Code đến UI/UX</a:t>
+              <a:t>Toàn diện từ Mã nguồn đến UI/UX</a:t>
             </a:r>
           </a:p>
         </p:txBody>
@@ -4759,7 +4814,7 @@
               </a:defRPr>
             </a:pPr>
             <a:r>
-              <a:t>0 BUG</a:t>
+              <a:t>0 LỖI</a:t>
             </a:r>
           </a:p>
           <a:p>
@@ -4896,7 +4951,7 @@
               </a:defRPr>
             </a:pPr>
             <a:r>
-              <a:t>Hệ thống PetCare Pro đáp ứng trọn vẹn yêu cầu chất lượng</a:t>
+              <a:t>Hệ thống đáp ứng trọn vẹn mọi yêu cầu chất lượng</a:t>
             </a:r>
           </a:p>
         </p:txBody>
@@ -4947,7 +5002,7 @@
                 </a:solidFill>
                 <a:latin typeface="Segoe UI"/>
               </a:rPr>
-              <a:t>Hệ thống hoạt động ổn định, chính xác 100% trong mọi kịch bản bán hàng, quản lý kho, đặt lịch Spa và quản lý thú cưng.</a:t>
+              <a:t>Hệ thống hoạt động ổn định, chính xác 100% trong mọi kịch bản bán hàng, quản lý kho, đặt lịch Spa và quản lý hồ sơ thú cưng.</a:t>
             </a:r>
           </a:p>
           <a:p>
@@ -4975,7 +5030,7 @@
                 </a:solidFill>
                 <a:latin typeface="Segoe UI"/>
               </a:rPr>
-              <a:t>Phân quyền chặt chẽ giữa Admin/Staff/Customer, chống kho âm, tính toán chiết khấu voucher chuẩn xác tuyệt đối.</a:t>
+              <a:t>Phân quyền chặt chẽ giữa Quản trị/Nhân viên/Khách hàng, chống kho âm, tính toán chiết khấu voucher chuẩn xác tuyệt đối.</a:t>
             </a:r>
           </a:p>
           <a:p>
@@ -5003,7 +5058,7 @@
                 </a:solidFill>
                 <a:latin typeface="Segoe UI"/>
               </a:rPr>
-              <a:t>Mã nguồn được cấu trúc module rõ ràng theo kiến trúc Clean Architecture, dễ dàng tích hợp thêm cổng thanh toán online hoặc Mobile App.</a:t>
+              <a:t>Mã nguồn được cấu trúc module rõ ràng, dễ dàng tích hợp thêm cổng thanh toán trực tuyến hoặc Ứng dụng Di động.</a:t>
             </a:r>
           </a:p>
           <a:p>
@@ -5031,7 +5086,7 @@
                 </a:solidFill>
                 <a:latin typeface="Segoe UI"/>
               </a:rPr>
-              <a:t>Hệ thống đáp ứng hoàn hảo nhu cầu vận hành thực tế của các chuỗi cửa hàng chăm sóc thú cưng hiện nay.</a:t>
+              <a:t>Hệ thống đáp ứng hoàn hảo nhu cầu vận hành thực tế của các cửa hàng và chuỗi dịch vụ chăm sóc thú cưng hiện nay.</a:t>
             </a:r>
           </a:p>
         </p:txBody>
@@ -5256,7 +5311,7 @@
           </a:p>
           <a:p>
             <a:pPr algn="ctr">
-              <a:defRPr sz="1350" b="1">
+              <a:defRPr sz="1300" b="1">
                 <a:solidFill>
                   <a:srgbClr val="CBD5E1"/>
                 </a:solidFill>
@@ -5264,7 +5319,7 @@
               </a:defRPr>
             </a:pPr>
             <a:r>
-              <a:t>Nhóm 9: Vũ Xuân Mạnh • Nguyễn Thế Sơn • Dương Hoàng Anh (Đại học Công Nghệ Đông Á)</a:t>
+              <a:t>Nhóm 9: Đặng Văn Mạnh (20232652) • Trần Ngọc Sơn (20232472) • Ngô Hoàng Anh (20232558) • Lớp: DCCNTT 14.C.3</a:t>
             </a:r>
           </a:p>
         </p:txBody>
@@ -5389,7 +5444,7 @@
           <a:lstStyle/>
           <a:p>
             <a:pPr>
-              <a:defRPr sz="2400" b="1">
+              <a:defRPr sz="2300" b="1">
                 <a:solidFill>
                   <a:srgbClr val="0F172A"/>
                 </a:solidFill>
@@ -5397,7 +5452,7 @@
               </a:defRPr>
             </a:pPr>
             <a:r>
-              <a:t>Hệ Thống Quản Lý Cửa Hàng Thú Cưng PetCare Pro</a:t>
+              <a:t>Hệ Thống Quản Lý Dịch Vụ Chăm Sóc Thú Cưng</a:t>
             </a:r>
           </a:p>
         </p:txBody>
@@ -5508,7 +5563,7 @@
               </a:defRPr>
             </a:pPr>
             <a:r>
-              <a:t>Vấn đề ngành chăm sóc thú cưng</a:t>
+              <a:t>Vấn đề quản lý dịch vụ thú cưng</a:t>
             </a:r>
           </a:p>
         </p:txBody>
@@ -5559,7 +5614,7 @@
                 </a:solidFill>
                 <a:latin typeface="Segoe UI"/>
               </a:rPr>
-              <a:t>Dễ thất thoát doanh thu, nhầm lẫn lịch hẹn Spa/Grooming của khách hàng.</a:t>
+              <a:t>Dễ thất thoát doanh thu, nhầm lẫn lịch hẹn Spa/Làm đẹp của khách hàng.</a:t>
             </a:r>
           </a:p>
           <a:p>
@@ -5615,7 +5670,7 @@
                 </a:solidFill>
                 <a:latin typeface="Segoe UI"/>
               </a:rPr>
-              <a:t>Cần phần mềm All-in-One quản lý thông tin thú cưng, hồ sơ y tế, tiêm phòng và lịch sử dịch vụ.</a:t>
+              <a:t>Cần phần mềm quản lý thông tin thú cưng, hồ sơ khám bệnh, tiêm phòng và lịch sử dịch vụ.</a:t>
             </a:r>
           </a:p>
           <a:p>
@@ -5643,7 +5698,7 @@
                 </a:solidFill>
                 <a:latin typeface="Segoe UI"/>
               </a:rPr>
-              <a:t>Tối ưu hóa quy trình bán hàng POS, đặt lịch nhanh chóng, nâng cao sự hài lòng của khách hàng.</a:t>
+              <a:t>Tối ưu hóa quy trình bán hàng POS, đặt lịch nhanh chóng, tăng trải nghiệm khách hàng.</a:t>
             </a:r>
           </a:p>
         </p:txBody>
@@ -5696,7 +5751,7 @@
               </a:defRPr>
             </a:pPr>
             <a:r>
-              <a:t>★ Chuyển đổi số toàn diện cho Pet Shop</a:t>
+              <a:t>★ Chuyển đổi số toàn diện cho Cửa hàng</a:t>
             </a:r>
           </a:p>
         </p:txBody>
@@ -5858,7 +5913,7 @@
                 </a:solidFill>
                 <a:latin typeface="Segoe UI"/>
               </a:rPr>
-              <a:t>Hồ sơ chi tiết, phân 4 hạng VIP (Bronze, Silver, Gold, Platinum).</a:t>
+              <a:t>Hồ sơ chi tiết, phân 4 hạng thành viên (Đồng, Bạc, Vàng, Bạch Kim).</a:t>
             </a:r>
           </a:p>
           <a:p>
@@ -5877,7 +5932,7 @@
                 </a:solidFill>
                 <a:latin typeface="Segoe UI"/>
               </a:rPr>
-              <a:t>• Đặt lịch Spa &amp; Khám bệnh: </a:t>
+              <a:t>• Đặt lịch Spa &amp; Dịch vụ: </a:t>
             </a:r>
             <a:r>
               <a:rPr sz="1200">
@@ -5886,7 +5941,7 @@
                 </a:solidFill>
                 <a:latin typeface="Segoe UI"/>
               </a:rPr>
-              <a:t>Quy trình 7 bước, phân công thợ lành nghề, lịch biểu thông minh.</a:t>
+              <a:t>Quy trình 7 bước, phân công kỹ thuật viên, lịch biểu thông minh.</a:t>
             </a:r>
           </a:p>
           <a:p>
@@ -5914,7 +5969,7 @@
                 </a:solidFill>
                 <a:latin typeface="Segoe UI"/>
               </a:rPr>
-              <a:t>Bán hàng nhanh, quét mã, cảnh báo hết hàng, chặn kho âm.</a:t>
+              <a:t>Bán hàng nhanh, quét mã, cảnh báo hết hàng, chặn trừ kho âm.</a:t>
             </a:r>
           </a:p>
           <a:p>
@@ -6134,7 +6189,7 @@
               </a:defRPr>
             </a:pPr>
             <a:r>
-              <a:t>Fullstack Clean Architecture</a:t>
+              <a:t>Kiến trúc hệ thống chuẩn mực</a:t>
             </a:r>
           </a:p>
         </p:txBody>
@@ -6176,7 +6231,7 @@
                 </a:solidFill>
                 <a:latin typeface="Segoe UI"/>
               </a:rPr>
-              <a:t>• Frontend SPA: </a:t>
+              <a:t>• Giao diện Frontend: </a:t>
             </a:r>
             <a:r>
               <a:rPr sz="1200">
@@ -6204,7 +6259,7 @@
                 </a:solidFill>
                 <a:latin typeface="Segoe UI"/>
               </a:rPr>
-              <a:t>• Backend Service: </a:t>
+              <a:t>• Dịch vụ Backend: </a:t>
             </a:r>
             <a:r>
               <a:rPr sz="1200">
@@ -6232,7 +6287,7 @@
                 </a:solidFill>
                 <a:latin typeface="Segoe UI"/>
               </a:rPr>
-              <a:t>• Database &amp; State: </a:t>
+              <a:t>• Cơ sở dữ liệu: </a:t>
             </a:r>
             <a:r>
               <a:rPr sz="1200">
@@ -6350,7 +6405,7 @@
               </a:defRPr>
             </a:pPr>
             <a:r>
-              <a:t>⚡ Tương thích Đa nền tảng &amp; Mobile</a:t>
+              <a:t>⚡ Tương thích Đa nền tảng &amp; Di động</a:t>
             </a:r>
           </a:p>
         </p:txBody>
@@ -6475,7 +6530,7 @@
           <a:lstStyle/>
           <a:p>
             <a:pPr>
-              <a:defRPr sz="2400" b="1">
+              <a:defRPr sz="2300" b="1">
                 <a:solidFill>
                   <a:srgbClr val="0F172A"/>
                 </a:solidFill>
@@ -6673,7 +6728,7 @@
                 </a:solidFill>
                 <a:latin typeface="Segoe UI"/>
               </a:rPr>
-              <a:t>Đảm bảo tồn kho không âm khi xuất hàng đồng thời; lịch hẹn Spa không bị trùng giờ hoặc phân nhầm kỹ thuật viên.</a:t>
+              <a:t>Đảm bảo tồn kho không âm khi xuất hàng đồng thời; lịch hẹn Spa không bị trùng giờ hoặc phân nhầm nhân viên phụ trách.</a:t>
             </a:r>
           </a:p>
           <a:p>
@@ -6935,7 +6990,7 @@
                 </a:solidFill>
                 <a:latin typeface="Segoe UI"/>
               </a:rPr>
-              <a:t>• Unit Test (70 Test Cases): </a:t>
+              <a:t>• Unit Test (70 Ca kiểm thử): </a:t>
             </a:r>
             <a:r>
               <a:rPr sz="1300">
@@ -6944,7 +6999,7 @@
                 </a:solidFill>
                 <a:latin typeface="Segoe UI"/>
               </a:rPr>
-              <a:t>Kiểm tra từng hàm, logic tính toán, validate Regex email/SĐT, xử lý chuỗi và quản trị State của từng Store riêng biệt.</a:t>
+              <a:t>Kiểm tra từng hàm, logic tính toán, validate định dạng email/SĐT, xử lý chuỗi và quản trị State dữ liệu.</a:t>
             </a:r>
           </a:p>
           <a:p>
@@ -6963,7 +7018,7 @@
                 </a:solidFill>
                 <a:latin typeface="Segoe UI"/>
               </a:rPr>
-              <a:t>• Integration Test (70 Test Cases): </a:t>
+              <a:t>• Integration Test (70 Ca kiểm thử): </a:t>
             </a:r>
             <a:r>
               <a:rPr sz="1300">
@@ -6972,7 +7027,7 @@
                 </a:solidFill>
                 <a:latin typeface="Segoe UI"/>
               </a:rPr>
-              <a:t>Kiểm tra tích hợp liên module: POS trừ kho, Lịch hẹn đẩy vào Calendar, Router Guard chặn quyền, Client gọi API.</a:t>
+              <a:t>Kiểm tra tích hợp liên module: POS trừ kho, Lịch hẹn đẩy vào Lịch biểu, Phân quyền chặn truy cập, Client gọi API.</a:t>
             </a:r>
           </a:p>
           <a:p>
@@ -6991,7 +7046,7 @@
                 </a:solidFill>
                 <a:latin typeface="Segoe UI"/>
               </a:rPr>
-              <a:t>• System Test (100 Test Cases): </a:t>
+              <a:t>• System Test (100 Ca kiểm thử): </a:t>
             </a:r>
             <a:r>
               <a:rPr sz="1300">
@@ -7081,7 +7136,7 @@
               </a:defRPr>
             </a:pPr>
             <a:r>
-              <a:t>✔ Hoàn thành 100% (240/240 Test Cases Pass)</a:t>
+              <a:t>✔ Hoàn thành 100% (240/240 Ca kiểm thử Pass)</a:t>
             </a:r>
           </a:p>
         </p:txBody>
@@ -7206,7 +7261,7 @@
           <a:lstStyle/>
           <a:p>
             <a:pPr>
-              <a:defRPr sz="2400" b="1">
+              <a:defRPr sz="2300" b="1">
                 <a:solidFill>
                   <a:srgbClr val="0F172A"/>
                 </a:solidFill>
@@ -7367,7 +7422,7 @@
                 </a:solidFill>
                 <a:latin typeface="Segoe UI"/>
               </a:rPr>
-              <a:t>• Khảo sát SRS: </a:t>
+              <a:t>• Khảo sát tài liệu: </a:t>
             </a:r>
             <a:r>
               <a:rPr sz="1200">
@@ -7376,7 +7431,7 @@
                 </a:solidFill>
                 <a:latin typeface="Segoe UI"/>
               </a:rPr>
-              <a:t>Nghiên cứu tài liệu yêu cầu nghiệp vụ PetCare.</a:t>
+              <a:t>Nghiên cứu yêu cầu nghiệp vụ hệ thống quản lý thú cưng.</a:t>
             </a:r>
           </a:p>
           <a:p>
@@ -7750,7 +7805,7 @@
                 </a:solidFill>
                 <a:latin typeface="Segoe UI"/>
               </a:rPr>
-              <a:t>• Review chéo: </a:t>
+              <a:t>• Thẩm định chéo: </a:t>
             </a:r>
             <a:r>
               <a:rPr sz="1200">
@@ -7965,7 +8020,7 @@
                 </a:solidFill>
                 <a:latin typeface="Segoe UI"/>
               </a:rPr>
-              <a:t>• Thực thi Manual: </a:t>
+              <a:t>• Thực thi Thủ công: </a:t>
             </a:r>
             <a:r>
               <a:rPr sz="1200">
@@ -8030,7 +8085,7 @@
                 </a:solidFill>
                 <a:latin typeface="Segoe UI"/>
               </a:rPr>
-              <a:t>Log lỗi chi tiết, gắn mức độ Severity và đính kèm ảnh chụp.</a:t>
+              <a:t>Log lỗi chi tiết, gắn mức độ nghiêm trọng và đính kèm ảnh chụp.</a:t>
             </a:r>
           </a:p>
           <a:p>
@@ -8049,7 +8104,7 @@
                 </a:solidFill>
                 <a:latin typeface="Segoe UI"/>
               </a:rPr>
-              <a:t>• File chạy .bat: </a:t>
+              <a:t>• Kịch bản chạy .bat: </a:t>
             </a:r>
             <a:r>
               <a:rPr sz="1200">
@@ -8058,7 +8113,7 @@
                 </a:solidFill>
                 <a:latin typeface="Segoe UI"/>
               </a:rPr>
-              <a:t>Tạo các kịch bản chạy tự động 1 click tiện lợi.</a:t>
+              <a:t>Tạo các file chạy tự động 1 click tiện lợi.</a:t>
             </a:r>
           </a:p>
         </p:txBody>
@@ -8264,7 +8319,7 @@
                 </a:solidFill>
                 <a:latin typeface="Segoe UI"/>
               </a:rPr>
-              <a:t>• Retest &amp; Verify: </a:t>
+              <a:t>• Kiểm thử lại (Retest): </a:t>
             </a:r>
             <a:r>
               <a:rPr sz="1200">
@@ -8273,7 +8328,7 @@
                 </a:solidFill>
                 <a:latin typeface="Segoe UI"/>
               </a:rPr>
-              <a:t>Kiểm tra lại sau khi Developer sửa lỗi thành công.</a:t>
+              <a:t>Kiểm tra lại sau khi lỗi đã được sửa thành công.</a:t>
             </a:r>
           </a:p>
           <a:p>
@@ -8535,7 +8590,7 @@
           <a:lstStyle/>
           <a:p>
             <a:pPr>
-              <a:defRPr sz="2400" b="1">
+              <a:defRPr sz="2300" b="1">
                 <a:solidFill>
                   <a:srgbClr val="0F172A"/>
                 </a:solidFill>
@@ -8641,7 +8696,7 @@
               </a:defRPr>
             </a:pPr>
             <a:r>
-              <a:t>VŨ XUÂN MẠNH</a:t>
+              <a:t>ĐẶNG VĂN MẠNH</a:t>
             </a:r>
           </a:p>
           <a:p>
@@ -8654,7 +8709,7 @@
               </a:defRPr>
             </a:pPr>
             <a:r>
-              <a:t>TRƯỞNG NHÓM (33.3% ĐÓNG GÓP)</a:t>
+              <a:t>TRƯỞNG NHÓM (MSV: 20232652)</a:t>
             </a:r>
           </a:p>
         </p:txBody>
@@ -8705,7 +8760,7 @@
                 </a:solidFill>
                 <a:latin typeface="Segoe UI"/>
               </a:rPr>
-              <a:t>Chịu trách nhiệm Cấp độ 1 - Unit Test (70 Test Cases).</a:t>
+              <a:t>Chịu trách nhiệm Cấp độ 1 - Kiểm thử Đơn vị (70 Unit Test Cases).</a:t>
             </a:r>
           </a:p>
           <a:p>
@@ -8733,7 +8788,7 @@
                 </a:solidFill>
                 <a:latin typeface="Segoe UI"/>
               </a:rPr>
-              <a:t>Viết test case logic Auth, Customer, Pet, Product, Service, POS &amp; Orders.</a:t>
+              <a:t>Viết test case logic Xác thực, Khách hàng, Thú cưng, Sản phẩm, Dịch vụ, Bán hàng POS.</a:t>
             </a:r>
           </a:p>
           <a:p>
@@ -8940,7 +8995,7 @@
               </a:defRPr>
             </a:pPr>
             <a:r>
-              <a:t>NGUYỄN THẾ SƠN</a:t>
+              <a:t>TRẦN NGỌC SƠN</a:t>
             </a:r>
           </a:p>
           <a:p>
@@ -8953,7 +9008,7 @@
               </a:defRPr>
             </a:pPr>
             <a:r>
-              <a:t>THÀNH VIÊN (33.3% ĐÓNG GÓP)</a:t>
+              <a:t>THÀNH VIÊN (MSV: 20232472)</a:t>
             </a:r>
           </a:p>
         </p:txBody>
@@ -9004,7 +9059,7 @@
                 </a:solidFill>
                 <a:latin typeface="Segoe UI"/>
               </a:rPr>
-              <a:t>Chịu trách nhiệm Cấp độ 2 - Integration Test (70 Test Cases).</a:t>
+              <a:t>Chịu trách nhiệm Cấp độ 2 - Kiểm thử Tích hợp (70 Integration Test Cases).</a:t>
             </a:r>
           </a:p>
           <a:p>
@@ -9239,7 +9294,7 @@
               </a:defRPr>
             </a:pPr>
             <a:r>
-              <a:t>DƯƠNG HOÀNG ANH</a:t>
+              <a:t>NGÔ HOÀNG ANH</a:t>
             </a:r>
           </a:p>
           <a:p>
@@ -9252,7 +9307,7 @@
               </a:defRPr>
             </a:pPr>
             <a:r>
-              <a:t>THÀNH VIÊN (33.3% ĐÓNG GÓP)</a:t>
+              <a:t>THÀNH VIÊN (MSV: 20232558)</a:t>
             </a:r>
           </a:p>
         </p:txBody>
@@ -9303,7 +9358,7 @@
                 </a:solidFill>
                 <a:latin typeface="Segoe UI"/>
               </a:rPr>
-              <a:t>Chịu trách nhiệm Cấp độ 3 - System Test (100 Test Cases).</a:t>
+              <a:t>Chịu trách nhiệm Cấp độ 3 - Kiểm thử Hệ thống (100 System Test Cases).</a:t>
             </a:r>
           </a:p>
           <a:p>
@@ -9565,7 +9620,7 @@
           <a:lstStyle/>
           <a:p>
             <a:pPr>
-              <a:defRPr sz="2400" b="1">
+              <a:defRPr sz="2300" b="1">
                 <a:solidFill>
                   <a:srgbClr val="0F172A"/>
                 </a:solidFill>
@@ -9573,7 +9628,7 @@
               </a:defRPr>
             </a:pPr>
             <a:r>
-              <a:t>Kiểm Thử Đơn Vị - Unit Test (70 Test Cases)</a:t>
+              <a:t>Kiểm Thử Đơn Vị - Unit Test (70 Ca kiểm thử)</a:t>
             </a:r>
           </a:p>
         </p:txBody>
@@ -9726,7 +9781,7 @@
                 </a:solidFill>
                 <a:latin typeface="Segoe UI"/>
               </a:rPr>
-              <a:t>• Auth Service (10 TC): </a:t>
+              <a:t>• Xác thực Auth (10 TC): </a:t>
             </a:r>
             <a:r>
               <a:rPr sz="1150">
@@ -9735,7 +9790,7 @@
                 </a:solidFill>
                 <a:latin typeface="Segoe UI"/>
               </a:rPr>
-              <a:t>Đăng nhập, đăng xuất, phân quyền Role, regex email, session null safety.</a:t>
+              <a:t>Đăng nhập, đăng xuất, phân quyền Role, regex email, kiểm tra phiên làm việc.</a:t>
             </a:r>
           </a:p>
           <a:p>
@@ -9754,7 +9809,7 @@
                 </a:solidFill>
                 <a:latin typeface="Segoe UI"/>
               </a:rPr>
-              <a:t>• Customer Store (12 TC): </a:t>
+              <a:t>• Quản lý Khách hàng (12 TC): </a:t>
             </a:r>
             <a:r>
               <a:rPr sz="1150">
@@ -9763,7 +9818,7 @@
                 </a:solidFill>
                 <a:latin typeface="Segoe UI"/>
               </a:rPr>
-              <a:t>Thêm/sửa/xóa khách, sinh mã KH-xxxx, fallback email, 4 hạng VIP.</a:t>
+              <a:t>Thêm/sửa/xóa khách, sinh mã KH-xxxx, fallback email, 4 hạng thành viên.</a:t>
             </a:r>
           </a:p>
           <a:p>
@@ -9782,7 +9837,7 @@
                 </a:solidFill>
                 <a:latin typeface="Segoe UI"/>
               </a:rPr>
-              <a:t>• Pet Store (8 TC): </a:t>
+              <a:t>• Quản lý Thú cưng (8 TC): </a:t>
             </a:r>
             <a:r>
               <a:rPr sz="1150">
@@ -9810,7 +9865,7 @@
                 </a:solidFill>
                 <a:latin typeface="Segoe UI"/>
               </a:rPr>
-              <a:t>• Product Store (10 TC): </a:t>
+              <a:t>• Quản lý Sản phẩm (10 TC): </a:t>
             </a:r>
             <a:r>
               <a:rPr sz="1150">
@@ -9819,7 +9874,7 @@
                 </a:solidFill>
                 <a:latin typeface="Segoe UI"/>
               </a:rPr>
-              <a:t>Sinh mã SKU-PET, cập nhật tồn kho, chặn trừ kho âm (Math.max).</a:t>
+              <a:t>Sinh mã SKU, cập nhật tồn kho, chặn trừ kho âm (Math.max).</a:t>
             </a:r>
           </a:p>
           <a:p>
@@ -9838,7 +9893,7 @@
                 </a:solidFill>
                 <a:latin typeface="Segoe UI"/>
               </a:rPr>
-              <a:t>• Service Store (6 TC): </a:t>
+              <a:t>• Quản lý Dịch vụ (6 TC): </a:t>
             </a:r>
             <a:r>
               <a:rPr sz="1150">
@@ -9847,7 +9902,7 @@
                 </a:solidFill>
                 <a:latin typeface="Segoe UI"/>
               </a:rPr>
-              <a:t>Thêm/sửa giá dịch vụ, bật/tắt active, xóa an toàn, phân loại.</a:t>
+              <a:t>Thêm/sửa giá dịch vụ, bật/tắt active, xóa an toàn, phân loại danh mục.</a:t>
             </a:r>
           </a:p>
           <a:p>
@@ -9866,7 +9921,7 @@
                 </a:solidFill>
                 <a:latin typeface="Segoe UI"/>
               </a:rPr>
-              <a:t>• POS &amp; Orders (16 TC): </a:t>
+              <a:t>• Bán hàng POS &amp; Đơn (16 TC): </a:t>
             </a:r>
             <a:r>
               <a:rPr sz="1150">
@@ -9894,7 +9949,7 @@
                 </a:solidFill>
                 <a:latin typeface="Segoe UI"/>
               </a:rPr>
-              <a:t>• Appointment Store (8 TC): </a:t>
+              <a:t>• Đặt lịch hẹn (8 TC): </a:t>
             </a:r>
             <a:r>
               <a:rPr sz="1150">
@@ -9903,7 +9958,7 @@
                 </a:solidFill>
                 <a:latin typeface="Segoe UI"/>
               </a:rPr>
-              <a:t>Tạo lịch hẹn, sinh mã LH-xxxx, phân công thợ Spa, dời giờ.</a:t>
+              <a:t>Tạo lịch hẹn, sinh mã LH-xxxx, phân công nhân viên Spa, dời giờ.</a:t>
             </a:r>
           </a:p>
         </p:txBody>
@@ -9956,7 +10011,7 @@
               </a:defRPr>
             </a:pPr>
             <a:r>
-              <a:t>✔ 70/70 Test Cases Pass (Tỷ lệ 100%)</a:t>
+              <a:t>✔ 70/70 Ca kiểm thử Pass (Tỷ lệ 100%)</a:t>
             </a:r>
           </a:p>
         </p:txBody>
@@ -10289,7 +10344,7 @@
               </a:defRPr>
             </a:pPr>
             <a:r>
-              <a:t>✔ UT_AUTH_003: Chặn vai trò Customer vào Admin</a:t>
+              <a:t>✔ UT_AUTH_003: Chặn vai trò Khách hàng vào Quản trị</a:t>
             </a:r>
           </a:p>
           <a:p>
@@ -10309,7 +10364,7 @@
             </a:r>
             <a:br/>
             <a:r>
-              <a:t>• Xử lý: Router Guard kiểm tra quyền Staff/Admin</a:t>
+              <a:t>• Xử lý: Router Guard kiểm tra quyền Nhân viên/Quản trị</a:t>
             </a:r>
             <a:br/>
             <a:r>
@@ -10491,7 +10546,7 @@
           <a:lstStyle/>
           <a:p>
             <a:pPr>
-              <a:defRPr sz="2400" b="1">
+              <a:defRPr sz="2300" b="1">
                 <a:solidFill>
                   <a:srgbClr val="0F172A"/>
                 </a:solidFill>
@@ -10499,7 +10554,7 @@
               </a:defRPr>
             </a:pPr>
             <a:r>
-              <a:t>Kiểm Thử Tích Hợp - Integration Test (70 Test Cases)</a:t>
+              <a:t>Kiểm Thử Tích Hợp - Integration Test (70 Ca kiểm thử)</a:t>
             </a:r>
           </a:p>
         </p:txBody>
@@ -10597,7 +10652,7 @@
               </a:defRPr>
             </a:pPr>
             <a:r>
-              <a:t>TÍCH HỢP STATE &amp; UI</a:t>
+              <a:t>TÍCH HỢP STATE &amp; GIAO DIỆN</a:t>
             </a:r>
           </a:p>
           <a:p>
@@ -10610,7 +10665,7 @@
               </a:defRPr>
             </a:pPr>
             <a:r>
-              <a:t>Quy mô: 32 Test Cases</a:t>
+              <a:t>Quy mô: 32 Ca kiểm thử</a:t>
             </a:r>
           </a:p>
         </p:txBody>
@@ -10652,7 +10707,7 @@
                 </a:solidFill>
                 <a:latin typeface="Segoe UI"/>
               </a:rPr>
-              <a:t>• Auth ↔ Router Guard: </a:t>
+              <a:t>• Xác thực ↔ Điều hướng Menu: </a:t>
             </a:r>
             <a:r>
               <a:rPr sz="1300">
@@ -10680,7 +10735,7 @@
                 </a:solidFill>
                 <a:latin typeface="Segoe UI"/>
               </a:rPr>
-              <a:t>• Form Đặt lịch ↔ Calendar: </a:t>
+              <a:t>• Form Đặt lịch ↔ Lịch biểu: </a:t>
             </a:r>
             <a:r>
               <a:rPr sz="1300">
@@ -10689,7 +10744,7 @@
                 </a:solidFill>
                 <a:latin typeface="Segoe UI"/>
               </a:rPr>
-              <a:t>Quy trình 7 bước đặt lịch Spa đồng bộ ngay lên lịch làm việc của thợ.</a:t>
+              <a:t>Quy trình 7 bước đặt lịch Spa đồng bộ ngay lên lịch làm việc nhân viên.</a:t>
             </a:r>
           </a:p>
           <a:p>
@@ -10736,7 +10791,7 @@
                 </a:solidFill>
                 <a:latin typeface="Segoe UI"/>
               </a:rPr>
-              <a:t>• Đổi trạng thái ↔ Badge UI: </a:t>
+              <a:t>• Đổi trạng thái ↔ Đổi màu Badge: </a:t>
             </a:r>
             <a:r>
               <a:rPr sz="1300">
@@ -10745,7 +10800,7 @@
                 </a:solidFill>
                 <a:latin typeface="Segoe UI"/>
               </a:rPr>
-              <a:t>Thay đổi trạng thái đơn hàng/lịch hẹn tự động đổi màu Badge tức thì.</a:t>
+              <a:t>Thay đổi trạng thái đơn hàng/lịch hẹn tự động cập nhật màu sắc tức thì.</a:t>
             </a:r>
           </a:p>
         </p:txBody>
@@ -10798,7 +10853,7 @@
               </a:defRPr>
             </a:pPr>
             <a:r>
-              <a:t>✔ 32/32 Passed (100%)</a:t>
+              <a:t>✔ 32/32 Ca kiểm thử Đạt (100%)</a:t>
             </a:r>
           </a:p>
         </p:txBody>
@@ -10909,7 +10964,7 @@
               </a:defRPr>
             </a:pPr>
             <a:r>
-              <a:t>Quy mô: 22 Test Cases</a:t>
+              <a:t>Quy mô: 22 Ca kiểm thử</a:t>
             </a:r>
           </a:p>
         </p:txBody>
@@ -11097,7 +11152,7 @@
               </a:defRPr>
             </a:pPr>
             <a:r>
-              <a:t>✔ 22/22 Passed (100%)</a:t>
+              <a:t>✔ 22/22 Ca kiểm thử Đạt (100%)</a:t>
             </a:r>
           </a:p>
         </p:txBody>
@@ -11208,7 +11263,7 @@
               </a:defRPr>
             </a:pPr>
             <a:r>
-              <a:t>Quy mô: 16 Test Cases</a:t>
+              <a:t>Quy mô: 16 Ca kiểm thử</a:t>
             </a:r>
           </a:p>
         </p:txBody>
@@ -11259,7 +11314,7 @@
                 </a:solidFill>
                 <a:latin typeface="Segoe UI"/>
               </a:rPr>
-              <a:t>Lấy danh sách sản phẩm trả về mã HTTP 200 OK kèm payload JSON.</a:t>
+              <a:t>Lấy danh sách sản phẩm trả về mã HTTP 200 OK kèm dữ liệu JSON.</a:t>
             </a:r>
           </a:p>
           <a:p>
@@ -11287,7 +11342,7 @@
                 </a:solidFill>
                 <a:latin typeface="Segoe UI"/>
               </a:rPr>
-              <a:t>Tạo đơn hàng đẩy lên server trả về HTTP 201 Created chuẩn xác.</a:t>
+              <a:t>Tạo đơn hàng gửi lên máy chủ trả về HTTP 201 Created chuẩn xác.</a:t>
             </a:r>
           </a:p>
           <a:p>
@@ -11315,7 +11370,7 @@
                 </a:solidFill>
                 <a:latin typeface="Segoe UI"/>
               </a:rPr>
-              <a:t>Đồng bộ số liệu doanh thu và KPI tổng quan theo thời gian thực.</a:t>
+              <a:t>Đồng bộ số liệu doanh thu và chỉ số thống kê theo thời gian thực.</a:t>
             </a:r>
           </a:p>
           <a:p>
@@ -11396,7 +11451,7 @@
               </a:defRPr>
             </a:pPr>
             <a:r>
-              <a:t>✔ 16/16 Passed (100%)</a:t>
+              <a:t>✔ 16/16 Ca kiểm thử Đạt (100%)</a:t>
             </a:r>
           </a:p>
         </p:txBody>
@@ -11521,7 +11576,7 @@
           <a:lstStyle/>
           <a:p>
             <a:pPr>
-              <a:defRPr sz="2400" b="1">
+              <a:defRPr sz="2300" b="1">
                 <a:solidFill>
                   <a:srgbClr val="0F172A"/>
                 </a:solidFill>
@@ -11529,7 +11584,7 @@
               </a:defRPr>
             </a:pPr>
             <a:r>
-              <a:t>Kiểm Thử Hệ Thống - System Test (100 Test Cases)</a:t>
+              <a:t>Kiểm Thử Hệ Thống - System Test (100 Ca kiểm thử)</a:t>
             </a:r>
           </a:p>
         </p:txBody>
@@ -11640,7 +11695,7 @@
               </a:defRPr>
             </a:pPr>
             <a:r>
-              <a:t>Kịch bản vận hành thực tế End-to-End (E2E)</a:t>
+              <a:t>Kịch bản vận hành thực tế Toàn diện (E2E)</a:t>
             </a:r>
           </a:p>
         </p:txBody>
@@ -11682,7 +11737,7 @@
                 </a:solidFill>
                 <a:latin typeface="Segoe UI"/>
               </a:rPr>
-              <a:t>• Luồng E2E Đặt lịch Spa (15 TC): </a:t>
+              <a:t>• Luồng Đặt lịch Dịch vụ Spa (15 TC): </a:t>
             </a:r>
             <a:r>
               <a:rPr sz="1300">
@@ -11691,7 +11746,7 @@
                 </a:solidFill>
                 <a:latin typeface="Segoe UI"/>
               </a:rPr>
-              <a:t>Khách vào web -&gt; Đặt lịch 7 bước -&gt; Phân công thợ -&gt; Thực hiện dịch vụ -&gt; Thanh toán POS -&gt; Lưu hồ sơ.</a:t>
+              <a:t>Khách vào web -&gt; Đặt lịch 7 bước -&gt; Phân công nhân viên -&gt; Thực hiện dịch vụ -&gt; Thanh toán POS -&gt; Lưu hồ sơ.</a:t>
             </a:r>
           </a:p>
           <a:p>
@@ -11710,7 +11765,7 @@
                 </a:solidFill>
                 <a:latin typeface="Segoe UI"/>
               </a:rPr>
-              <a:t>• Luồng E2E Bán hàng POS (15 TC): </a:t>
+              <a:t>• Luồng Bán hàng POS &amp; Kho (15 TC): </a:t>
             </a:r>
             <a:r>
               <a:rPr sz="1300">
@@ -11719,7 +11774,7 @@
                 </a:solidFill>
                 <a:latin typeface="Segoe UI"/>
               </a:rPr>
-              <a:t>Quét mã SP -&gt; Thêm giỏ hàng -&gt; Chọn khách VIP -&gt; Áp voucher -&gt; Thanh toán đa phương thức -&gt; In hóa đơn.</a:t>
+              <a:t>Quét mã SP -&gt; Thêm giỏ hàng -&gt; Chọn khách thành viên -&gt; Áp voucher -&gt; Thanh toán đa phương thức -&gt; In hóa đơn.</a:t>
             </a:r>
           </a:p>
           <a:p>
@@ -11747,7 +11802,7 @@
                 </a:solidFill>
                 <a:latin typeface="Segoe UI"/>
               </a:rPr>
-              <a:t>Thêm mới chủ và pet -&gt; Tìm kiếm theo SĐT -&gt; Nâng hạng VIP -&gt; Lịch sử khám chữa bệnh.</a:t>
+              <a:t>Thêm mới chủ và pet -&gt; Tìm kiếm theo SĐT -&gt; Xếp hạng thành viên -&gt; Lịch sử khám chữa bệnh.</a:t>
             </a:r>
           </a:p>
           <a:p>
@@ -11766,7 +11821,7 @@
                 </a:solidFill>
                 <a:latin typeface="Segoe UI"/>
               </a:rPr>
-              <a:t>• Luồng Quản lý Dịch vụ &amp; Báo cáo (15 TC): </a:t>
+              <a:t>• Luồng Quản lý Bảng giá &amp; Báo cáo (15 TC): </a:t>
             </a:r>
             <a:r>
               <a:rPr sz="1300">
@@ -11775,7 +11830,7 @@
                 </a:solidFill>
                 <a:latin typeface="Segoe UI"/>
               </a:rPr>
-              <a:t>Cấu hình bảng giá -&gt; Kiểm tra doanh thu ngày/tháng -&gt; Biểu đồ Chart.js -&gt; Xuất báo cáo Excel.</a:t>
+              <a:t>Cấu hình giá dịch vụ -&gt; Kiểm tra doanh thu ngày/tháng -&gt; Biểu đồ trực quan -&gt; Xuất báo cáo.</a:t>
             </a:r>
           </a:p>
         </p:txBody>
@@ -11981,7 +12036,7 @@
                 </a:solidFill>
                 <a:latin typeface="Segoe UI"/>
               </a:rPr>
-              <a:t>• Responsive &amp; Đa thiết bị (12 TC): </a:t>
+              <a:t>• Đa thiết bị Responsive (12 TC): </a:t>
             </a:r>
             <a:r>
               <a:rPr sz="1300">
@@ -11990,7 +12045,7 @@
                 </a:solidFill>
                 <a:latin typeface="Segoe UI"/>
               </a:rPr>
-              <a:t>Hiển thị hoàn hảo trên Desktop (1920x1080), Laptop (1366x768), Tablet (768px) và Mobile (375px).</a:t>
+              <a:t>Hiển thị hoàn hảo trên Máy tính bàn (1920x1080), Laptop (1366x768), Máy tính bảng (768px) và Điện thoại (375px).</a:t>
             </a:r>
           </a:p>
           <a:p>
@@ -12046,7 +12101,7 @@
                 </a:solidFill>
                 <a:latin typeface="Segoe UI"/>
               </a:rPr>
-              <a:t>Chống SQL Injection, XSS trên form, bảo vệ LocalStorage, tự động logout khi hết hạn session.</a:t>
+              <a:t>Chống SQL Injection, XSS trên form, bảo vệ dữ liệu cục bộ, tự động đăng xuất khi hết phiên làm việc.</a:t>
             </a:r>
           </a:p>
           <a:p>
@@ -12074,7 +12129,7 @@
                 </a:solidFill>
                 <a:latin typeface="Segoe UI"/>
               </a:rPr>
-              <a:t>Thời gian tải trang ban đầu &lt; 1.5s, chuyển tab &lt; 100ms, bộ nhớ RAM tiêu thụ ổn định.</a:t>
+              <a:t>Thời gian tải trang ban đầu &lt; 1.5s, chuyển tab &lt; 100ms, tiêu thụ bộ nhớ RAM tối ưu.</a:t>
             </a:r>
           </a:p>
         </p:txBody>
@@ -12252,7 +12307,7 @@
           <a:lstStyle/>
           <a:p>
             <a:pPr>
-              <a:defRPr sz="2400" b="1">
+              <a:defRPr sz="2300" b="1">
                 <a:solidFill>
                   <a:srgbClr val="0F172A"/>
                 </a:solidFill>
@@ -12260,7 +12315,7 @@
               </a:defRPr>
             </a:pPr>
             <a:r>
-              <a:t>Framework Test Automation &amp; Thực Thi Tự Động</a:t>
+              <a:t>Khung Kiểm Thử Tự Động &amp; Thực Thi Trực Quan</a:t>
             </a:r>
           </a:p>
         </p:txBody>
@@ -12497,7 +12552,7 @@
                 </a:solidFill>
                 <a:latin typeface="Segoe UI"/>
               </a:rPr>
-              <a:t>• Clean Code: </a:t>
+              <a:t>• Thiết kế chuẩn mực: </a:t>
             </a:r>
             <a:r>
               <a:rPr sz="1250">
@@ -12805,7 +12860,7 @@
                 </a:solidFill>
                 <a:latin typeface="Segoe UI"/>
               </a:rPr>
-              <a:t>Chạy trọn gói cả 3 cấp độ (240 Test Cases) chỉ với 1 click duy nhất.</a:t>
+              <a:t>Chạy trọn gói cả 3 cấp độ (240 Ca kiểm thử) chỉ với 1 click duy nhất.</a:t>
             </a:r>
           </a:p>
         </p:txBody>
@@ -12969,7 +13024,7 @@
               </a:defRPr>
             </a:pPr>
             <a:r>
-              <a:t>Live Automation Demonstration</a:t>
+              <a:t>Trình diễn trực tiếp trên Trình duyệt</a:t>
             </a:r>
           </a:p>
         </p:txBody>
@@ -13048,7 +13103,7 @@
                 </a:solidFill>
                 <a:latin typeface="Segoe UI"/>
               </a:rPr>
-              <a:t>Thấy rõ chuột click, tự động gõ văn bản vào form, chuyển trang và hiện popup.</a:t>
+              <a:t>Thấy rõ chuột click, tự động điền form, chuyển trang và mở popup.</a:t>
             </a:r>
           </a:p>
           <a:p>
@@ -13076,7 +13131,7 @@
                 </a:solidFill>
                 <a:latin typeface="Segoe UI"/>
               </a:rPr>
-              <a:t>TestNG Report xuất báo cáo thời gian thực, chụp màn hình khi có lỗi.</a:t>
+              <a:t>TestNG Report xuất báo cáo thời gian thực, chụp màn hình tự động.</a:t>
             </a:r>
           </a:p>
           <a:p>
@@ -13104,7 +13159,7 @@
                 </a:solidFill>
                 <a:latin typeface="Segoe UI"/>
               </a:rPr>
-              <a:t>Assert kiểm tra chính xác từng element và chuỗi phản hồi.</a:t>
+              <a:t>Khẳng định (Assert) kiểm tra chính xác từng phần tử và kết quả.</a:t>
             </a:r>
           </a:p>
         </p:txBody>

--- a/BaoCao/Slide_BaoCao_DeTai4_Nhom9.pptx
+++ b/BaoCao/Slide_BaoCao_DeTai4_Nhom9.pptx
@@ -3205,8 +3205,8 @@
         </p:nvSpPr>
         <p:spPr>
           <a:xfrm>
-            <a:off x="731520" y="1143000"/>
-            <a:ext cx="10728655" cy="2194560"/>
+            <a:off x="731520" y="1188720"/>
+            <a:ext cx="10728655" cy="2148840"/>
           </a:xfrm>
           <a:prstGeom prst="rect">
             <a:avLst/>
@@ -3250,7 +3250,7 @@
               </a:defRPr>
             </a:pPr>
             <a:r>
-              <a:t>ĐỀ TÀI 4: XÂY DỰNG VÀ KIỂM THỬ HỆ THỐNG QUẢN LÝ</a:t>
+              <a:t>ĐỀ TÀI 4: KIỂM THỬ WEBSITE QUẢN LÝ CỬA HÀNG</a:t>
             </a:r>
             <a:br/>
             <a:r>
@@ -3267,7 +3267,7 @@
               </a:defRPr>
             </a:pPr>
             <a:r>
-              <a:t>Giải pháp Quản lý Cửa hàng &amp; Dịch vụ Toàn diện • 240 Ca kiểm thử (Đơn vị - Tích hợp - Hệ thống Tự động hóa)</a:t>
+              <a:t>Giải pháp Đảm bảo Chất lượng Phần mềm Toàn diện • 240 Ca kiểm thử (Đơn vị - Tích hợp - Hệ thống Tự động hóa)</a:t>
             </a:r>
           </a:p>
         </p:txBody>
@@ -4951,7 +4951,7 @@
               </a:defRPr>
             </a:pPr>
             <a:r>
-              <a:t>Hệ thống đáp ứng trọn vẹn mọi yêu cầu chất lượng</a:t>
+              <a:t>Website Quản lý Cửa hàng Dịch vụ Thú cưng đáp ứng trọn vẹn mọi tiêu chuẩn chất lượng</a:t>
             </a:r>
           </a:p>
         </p:txBody>
@@ -5452,7 +5452,7 @@
               </a:defRPr>
             </a:pPr>
             <a:r>
-              <a:t>Hệ Thống Quản Lý Dịch Vụ Chăm Sóc Thú Cưng</a:t>
+              <a:t>Website Quản Lý Cửa Hàng Dịch Vụ Thú Cưng</a:t>
             </a:r>
           </a:p>
         </p:txBody>
@@ -6636,7 +6636,7 @@
               </a:defRPr>
             </a:pPr>
             <a:r>
-              <a:t>🎯 MỤC TIÊU CHẤT LƯỢNG HỆ THỐNG</a:t>
+              <a:t>🎯 MỤC TIÊU CHẤT LƯỢNG WEBSITE</a:t>
             </a:r>
           </a:p>
           <a:p>
@@ -7431,7 +7431,7 @@
                 </a:solidFill>
                 <a:latin typeface="Segoe UI"/>
               </a:rPr>
-              <a:t>Nghiên cứu yêu cầu nghiệp vụ hệ thống quản lý thú cưng.</a:t>
+              <a:t>Nghiên cứu yêu cầu nghiệp vụ website quản lý dịch vụ thú cưng.</a:t>
             </a:r>
           </a:p>
           <a:p>

--- a/BaoCao/Slide_BaoCao_DeTai4_Nhom9.pptx
+++ b/BaoCao/Slide_BaoCao_DeTai4_Nhom9.pptx
@@ -3254,7 +3254,7 @@
             </a:r>
             <a:br/>
             <a:r>
-              <a:t>DỊCH VỤ CHĂM SÓC THÚ CƯNG</a:t>
+              <a:t>DỊCH VỤ THÚ CƯNG</a:t>
             </a:r>
           </a:p>
           <a:p>
@@ -3612,7 +3612,7 @@
               </a:defRPr>
             </a:pPr>
             <a:r>
-              <a:t>Giảng viên hướng dẫn: ThS. Hoàng Thị Phương Lan • Nhóm 9 • Lớp tín chỉ: Kiểm thử phần mềm-1-1-26(N04) • Hà Nội 2026</a:t>
+              <a:t>Giảng viên hướng dẫn: Lê Tuấn Anh • Nhóm 9 • Lớp tín chỉ: Kiểm thử phần mềm-1-1-26(N04) • Bắc Ninh 2026</a:t>
             </a:r>
           </a:p>
         </p:txBody>
